--- a/tutorials/week_3/3.command_line_arguments.pptx
+++ b/tutorials/week_3/3.command_line_arguments.pptx
@@ -2,21 +2,132 @@
 <file path=ppt/presentation.xml><?xml version="1.0" encoding="utf-8"?>
 <p:presentation xmlns:a="http://schemas.openxmlformats.org/drawingml/2006/main" xmlns:r="http://schemas.openxmlformats.org/officeDocument/2006/relationships" xmlns:p="http://schemas.openxmlformats.org/presentationml/2006/main" saveSubsetFonts="1">
   <p:sldMasterIdLst>
-    <p:sldMasterId r:id="rId1" id="2147483648"/>
+    <p:sldMasterId id="2147483648" r:id="rId1"/>
   </p:sldMasterIdLst>
   <p:sldIdLst>
-    <p:sldId r:id="rId2" id="256"/>
-    <p:sldId r:id="rId7" id="257"/>
-    <p:sldId r:id="rId8" id="258"/>
-    <p:sldId r:id="rId9" id="259"/>
-    <p:sldId r:id="rId10" id="260"/>
-    <p:sldId r:id="rId11" id="261"/>
-    <p:sldId r:id="rId12" id="262"/>
-    <p:sldId r:id="rId13" id="263"/>
-    <p:sldId r:id="rId14" id="264"/>
+    <p:sldId id="256" r:id="rId2"/>
+    <p:sldId id="257" r:id="rId3"/>
+    <p:sldId id="258" r:id="rId4"/>
+    <p:sldId id="259" r:id="rId5"/>
+    <p:sldId id="260" r:id="rId6"/>
+    <p:sldId id="261" r:id="rId7"/>
+    <p:sldId id="262" r:id="rId8"/>
+    <p:sldId id="263" r:id="rId9"/>
+    <p:sldId id="264" r:id="rId10"/>
   </p:sldIdLst>
   <p:sldSz cx="10693400" cy="7556500"/>
   <p:notesSz cx="6858000" cy="9144000"/>
+  <p:defaultTextStyle>
+    <a:defPPr>
+      <a:defRPr lang="en-US"/>
+    </a:defPPr>
+    <a:lvl1pPr marL="0" algn="l" defTabSz="914400" rtl="0" eaLnBrk="1" latinLnBrk="0" hangingPunct="1">
+      <a:defRPr sz="1800" kern="1200">
+        <a:solidFill>
+          <a:schemeClr val="tx1"/>
+        </a:solidFill>
+        <a:latin typeface="+mn-lt"/>
+        <a:ea typeface="+mn-ea"/>
+        <a:cs typeface="+mn-cs"/>
+      </a:defRPr>
+    </a:lvl1pPr>
+    <a:lvl2pPr marL="457200" algn="l" defTabSz="914400" rtl="0" eaLnBrk="1" latinLnBrk="0" hangingPunct="1">
+      <a:defRPr sz="1800" kern="1200">
+        <a:solidFill>
+          <a:schemeClr val="tx1"/>
+        </a:solidFill>
+        <a:latin typeface="+mn-lt"/>
+        <a:ea typeface="+mn-ea"/>
+        <a:cs typeface="+mn-cs"/>
+      </a:defRPr>
+    </a:lvl2pPr>
+    <a:lvl3pPr marL="914400" algn="l" defTabSz="914400" rtl="0" eaLnBrk="1" latinLnBrk="0" hangingPunct="1">
+      <a:defRPr sz="1800" kern="1200">
+        <a:solidFill>
+          <a:schemeClr val="tx1"/>
+        </a:solidFill>
+        <a:latin typeface="+mn-lt"/>
+        <a:ea typeface="+mn-ea"/>
+        <a:cs typeface="+mn-cs"/>
+      </a:defRPr>
+    </a:lvl3pPr>
+    <a:lvl4pPr marL="1371600" algn="l" defTabSz="914400" rtl="0" eaLnBrk="1" latinLnBrk="0" hangingPunct="1">
+      <a:defRPr sz="1800" kern="1200">
+        <a:solidFill>
+          <a:schemeClr val="tx1"/>
+        </a:solidFill>
+        <a:latin typeface="+mn-lt"/>
+        <a:ea typeface="+mn-ea"/>
+        <a:cs typeface="+mn-cs"/>
+      </a:defRPr>
+    </a:lvl4pPr>
+    <a:lvl5pPr marL="1828800" algn="l" defTabSz="914400" rtl="0" eaLnBrk="1" latinLnBrk="0" hangingPunct="1">
+      <a:defRPr sz="1800" kern="1200">
+        <a:solidFill>
+          <a:schemeClr val="tx1"/>
+        </a:solidFill>
+        <a:latin typeface="+mn-lt"/>
+        <a:ea typeface="+mn-ea"/>
+        <a:cs typeface="+mn-cs"/>
+      </a:defRPr>
+    </a:lvl5pPr>
+    <a:lvl6pPr marL="2286000" algn="l" defTabSz="914400" rtl="0" eaLnBrk="1" latinLnBrk="0" hangingPunct="1">
+      <a:defRPr sz="1800" kern="1200">
+        <a:solidFill>
+          <a:schemeClr val="tx1"/>
+        </a:solidFill>
+        <a:latin typeface="+mn-lt"/>
+        <a:ea typeface="+mn-ea"/>
+        <a:cs typeface="+mn-cs"/>
+      </a:defRPr>
+    </a:lvl6pPr>
+    <a:lvl7pPr marL="2743200" algn="l" defTabSz="914400" rtl="0" eaLnBrk="1" latinLnBrk="0" hangingPunct="1">
+      <a:defRPr sz="1800" kern="1200">
+        <a:solidFill>
+          <a:schemeClr val="tx1"/>
+        </a:solidFill>
+        <a:latin typeface="+mn-lt"/>
+        <a:ea typeface="+mn-ea"/>
+        <a:cs typeface="+mn-cs"/>
+      </a:defRPr>
+    </a:lvl7pPr>
+    <a:lvl8pPr marL="3200400" algn="l" defTabSz="914400" rtl="0" eaLnBrk="1" latinLnBrk="0" hangingPunct="1">
+      <a:defRPr sz="1800" kern="1200">
+        <a:solidFill>
+          <a:schemeClr val="tx1"/>
+        </a:solidFill>
+        <a:latin typeface="+mn-lt"/>
+        <a:ea typeface="+mn-ea"/>
+        <a:cs typeface="+mn-cs"/>
+      </a:defRPr>
+    </a:lvl8pPr>
+    <a:lvl9pPr marL="3657600" algn="l" defTabSz="914400" rtl="0" eaLnBrk="1" latinLnBrk="0" hangingPunct="1">
+      <a:defRPr sz="1800" kern="1200">
+        <a:solidFill>
+          <a:schemeClr val="tx1"/>
+        </a:solidFill>
+        <a:latin typeface="+mn-lt"/>
+        <a:ea typeface="+mn-ea"/>
+        <a:cs typeface="+mn-cs"/>
+      </a:defRPr>
+    </a:lvl9pPr>
+  </p:defaultTextStyle>
+  <p:extLst>
+    <p:ext uri="{EFAFB233-063F-42B5-8137-9DF3F51BA10A}">
+      <p15:sldGuideLst xmlns:p15="http://schemas.microsoft.com/office/powerpoint/2012/main">
+        <p15:guide id="1" orient="horz" pos="2160">
+          <p15:clr>
+            <a:srgbClr val="A4A3A4"/>
+          </p15:clr>
+        </p15:guide>
+        <p15:guide id="2" pos="2880">
+          <p15:clr>
+            <a:srgbClr val="A4A3A4"/>
+          </p15:clr>
+        </p15:guide>
+      </p15:sldGuideLst>
+    </p:ext>
+  </p:extLst>
 </p:presentation>
 </file>
 
@@ -40,7 +151,9 @@
       <p:sp>
         <p:nvSpPr>
           <p:cNvPr id="2" name="Title 1"/>
-          <p:cNvSpPr/>
+          <p:cNvSpPr>
+            <a:spLocks noGrp="1"/>
+          </p:cNvSpPr>
           <p:nvPr>
             <p:ph type="ctrTitle"/>
           </p:nvPr>
@@ -57,19 +170,19 @@
             <a:defPPr/>
           </a:lstStyle>
           <a:p>
-            <a:pPr/>
-            <a:r>
-              <a:rPr lang="en-US" dirty="1" smtClean="0"/>
+            <a:r>
+              <a:rPr lang="en-US"/>
               <a:t>Click to edit Master title style</a:t>
             </a:r>
-            <a:endParaRPr lang="en-US"/>
           </a:p>
         </p:txBody>
       </p:sp>
       <p:sp>
         <p:nvSpPr>
           <p:cNvPr id="3" name="Subtitle 2"/>
-          <p:cNvSpPr/>
+          <p:cNvSpPr>
+            <a:spLocks noGrp="1"/>
+          </p:cNvSpPr>
           <p:nvPr>
             <p:ph type="subTitle" idx="1"/>
           </p:nvPr>
@@ -95,19 +208,19 @@
             <a:lvl9pPr/>
           </a:lstStyle>
           <a:p>
-            <a:pPr/>
-            <a:r>
-              <a:rPr lang="en-US" dirty="1" smtClean="0"/>
+            <a:r>
+              <a:rPr lang="en-US"/>
               <a:t>Click to edit Master subtitle style</a:t>
             </a:r>
-            <a:endParaRPr lang="en-US"/>
           </a:p>
         </p:txBody>
       </p:sp>
       <p:sp>
         <p:nvSpPr>
           <p:cNvPr id="4" name="Date Placeholder 3"/>
-          <p:cNvSpPr/>
+          <p:cNvSpPr>
+            <a:spLocks noGrp="1"/>
+          </p:cNvSpPr>
           <p:nvPr>
             <p:ph type="dt" sz="half" idx="10"/>
           </p:nvPr>
@@ -119,10 +232,9 @@
             <a:defPPr/>
           </a:lstStyle>
           <a:p>
-            <a:pPr/>
             <a:fld id="{E8FD0B7A-F5DD-4F40-B4CB-3B2C354B893A}" type="datetimeFigureOut">
               <a:rPr lang="en-US" smtClean="0"/>
-              <a:t>3/4/2014</a:t>
+              <a:t>10/10/2025</a:t>
             </a:fld>
             <a:endParaRPr lang="en-US"/>
           </a:p>
@@ -131,7 +243,9 @@
       <p:sp>
         <p:nvSpPr>
           <p:cNvPr id="5" name="Footer Placeholder 4"/>
-          <p:cNvSpPr/>
+          <p:cNvSpPr>
+            <a:spLocks noGrp="1"/>
+          </p:cNvSpPr>
           <p:nvPr>
             <p:ph type="ftr" sz="quarter" idx="11"/>
           </p:nvPr>
@@ -143,7 +257,6 @@
             <a:defPPr/>
           </a:lstStyle>
           <a:p>
-            <a:pPr/>
             <a:endParaRPr lang="en-US"/>
           </a:p>
         </p:txBody>
@@ -151,7 +264,9 @@
       <p:sp>
         <p:nvSpPr>
           <p:cNvPr id="6" name="Slide Number Placeholder 5"/>
-          <p:cNvSpPr/>
+          <p:cNvSpPr>
+            <a:spLocks noGrp="1"/>
+          </p:cNvSpPr>
           <p:nvPr>
             <p:ph type="sldNum" sz="quarter" idx="12"/>
           </p:nvPr>
@@ -163,7 +278,6 @@
             <a:defPPr/>
           </a:lstStyle>
           <a:p>
-            <a:pPr/>
             <a:fld id="{93AE1883-0942-4AA3-9DB2-9C7C3A0314B1}" type="slidenum">
               <a:rPr lang="en-US" smtClean="0"/>
               <a:t>‹#›</a:t>
@@ -200,7 +314,9 @@
       <p:sp>
         <p:nvSpPr>
           <p:cNvPr id="2" name="Title 1"/>
-          <p:cNvSpPr/>
+          <p:cNvSpPr>
+            <a:spLocks noGrp="1"/>
+          </p:cNvSpPr>
           <p:nvPr>
             <p:ph type="title"/>
           </p:nvPr>
@@ -212,19 +328,19 @@
             <a:defPPr/>
           </a:lstStyle>
           <a:p>
-            <a:pPr/>
-            <a:r>
-              <a:rPr lang="en-US" dirty="1" smtClean="0"/>
+            <a:r>
+              <a:rPr lang="en-US"/>
               <a:t>Click to edit Master title style</a:t>
             </a:r>
-            <a:endParaRPr lang="en-US"/>
           </a:p>
         </p:txBody>
       </p:sp>
       <p:sp>
         <p:nvSpPr>
           <p:cNvPr id="3" name="Vertical Text Placeholder 2"/>
-          <p:cNvSpPr/>
+          <p:cNvSpPr>
+            <a:spLocks noGrp="1"/>
+          </p:cNvSpPr>
           <p:nvPr>
             <p:ph type="body" orient="vert" idx="1"/>
           </p:nvPr>
@@ -238,45 +354,46 @@
           <a:p>
             <a:pPr lvl="0"/>
             <a:r>
-              <a:rPr lang="en-US" dirty="1" smtClean="0"/>
+              <a:rPr lang="en-US"/>
               <a:t>Click to edit Master text styles</a:t>
             </a:r>
           </a:p>
           <a:p>
             <a:pPr lvl="1"/>
             <a:r>
-              <a:rPr lang="en-US" dirty="1" smtClean="0"/>
+              <a:rPr lang="en-US"/>
               <a:t>Second level</a:t>
             </a:r>
           </a:p>
           <a:p>
             <a:pPr lvl="2"/>
             <a:r>
-              <a:rPr lang="en-US" dirty="1" smtClean="0"/>
+              <a:rPr lang="en-US"/>
               <a:t>Third level</a:t>
             </a:r>
           </a:p>
           <a:p>
             <a:pPr lvl="3"/>
             <a:r>
-              <a:rPr lang="en-US" dirty="1" smtClean="0"/>
+              <a:rPr lang="en-US"/>
               <a:t>Fourth level</a:t>
             </a:r>
           </a:p>
           <a:p>
             <a:pPr lvl="4"/>
             <a:r>
-              <a:rPr lang="en-US" dirty="1" smtClean="0"/>
+              <a:rPr lang="en-US"/>
               <a:t>Fifth level</a:t>
             </a:r>
-            <a:endParaRPr lang="en-US"/>
           </a:p>
         </p:txBody>
       </p:sp>
       <p:sp>
         <p:nvSpPr>
           <p:cNvPr id="4" name="Date Placeholder 3"/>
-          <p:cNvSpPr/>
+          <p:cNvSpPr>
+            <a:spLocks noGrp="1"/>
+          </p:cNvSpPr>
           <p:nvPr>
             <p:ph type="dt" sz="half" idx="10"/>
           </p:nvPr>
@@ -288,10 +405,9 @@
             <a:defPPr/>
           </a:lstStyle>
           <a:p>
-            <a:pPr/>
             <a:fld id="{E8FD0B7A-F5DD-4F40-B4CB-3B2C354B893A}" type="datetimeFigureOut">
               <a:rPr lang="en-US" smtClean="0"/>
-              <a:t>3/4/2014</a:t>
+              <a:t>10/10/2025</a:t>
             </a:fld>
             <a:endParaRPr lang="en-US"/>
           </a:p>
@@ -300,7 +416,9 @@
       <p:sp>
         <p:nvSpPr>
           <p:cNvPr id="5" name="Footer Placeholder 4"/>
-          <p:cNvSpPr/>
+          <p:cNvSpPr>
+            <a:spLocks noGrp="1"/>
+          </p:cNvSpPr>
           <p:nvPr>
             <p:ph type="ftr" sz="quarter" idx="11"/>
           </p:nvPr>
@@ -312,7 +430,6 @@
             <a:defPPr/>
           </a:lstStyle>
           <a:p>
-            <a:pPr/>
             <a:endParaRPr lang="en-US"/>
           </a:p>
         </p:txBody>
@@ -320,7 +437,9 @@
       <p:sp>
         <p:nvSpPr>
           <p:cNvPr id="6" name="Slide Number Placeholder 5"/>
-          <p:cNvSpPr/>
+          <p:cNvSpPr>
+            <a:spLocks noGrp="1"/>
+          </p:cNvSpPr>
           <p:nvPr>
             <p:ph type="sldNum" sz="quarter" idx="12"/>
           </p:nvPr>
@@ -332,7 +451,6 @@
             <a:defPPr/>
           </a:lstStyle>
           <a:p>
-            <a:pPr/>
             <a:fld id="{93AE1883-0942-4AA3-9DB2-9C7C3A0314B1}" type="slidenum">
               <a:rPr lang="en-US" smtClean="0"/>
               <a:t>‹#›</a:t>
@@ -369,7 +487,9 @@
       <p:sp>
         <p:nvSpPr>
           <p:cNvPr id="2" name="Vertical Title 1"/>
-          <p:cNvSpPr/>
+          <p:cNvSpPr>
+            <a:spLocks noGrp="1"/>
+          </p:cNvSpPr>
           <p:nvPr>
             <p:ph type="title" orient="vert"/>
           </p:nvPr>
@@ -386,19 +506,19 @@
             <a:defPPr/>
           </a:lstStyle>
           <a:p>
-            <a:pPr/>
-            <a:r>
-              <a:rPr lang="en-US" dirty="1" smtClean="0"/>
+            <a:r>
+              <a:rPr lang="en-US"/>
               <a:t>Click to edit Master title style</a:t>
             </a:r>
-            <a:endParaRPr lang="en-US"/>
           </a:p>
         </p:txBody>
       </p:sp>
       <p:sp>
         <p:nvSpPr>
           <p:cNvPr id="3" name="Vertical Text Placeholder 2"/>
-          <p:cNvSpPr/>
+          <p:cNvSpPr>
+            <a:spLocks noGrp="1"/>
+          </p:cNvSpPr>
           <p:nvPr>
             <p:ph type="body" orient="vert" idx="1"/>
           </p:nvPr>
@@ -417,45 +537,46 @@
           <a:p>
             <a:pPr lvl="0"/>
             <a:r>
-              <a:rPr lang="en-US" dirty="1" smtClean="0"/>
+              <a:rPr lang="en-US"/>
               <a:t>Click to edit Master text styles</a:t>
             </a:r>
           </a:p>
           <a:p>
             <a:pPr lvl="1"/>
             <a:r>
-              <a:rPr lang="en-US" dirty="1" smtClean="0"/>
+              <a:rPr lang="en-US"/>
               <a:t>Second level</a:t>
             </a:r>
           </a:p>
           <a:p>
             <a:pPr lvl="2"/>
             <a:r>
-              <a:rPr lang="en-US" dirty="1" smtClean="0"/>
+              <a:rPr lang="en-US"/>
               <a:t>Third level</a:t>
             </a:r>
           </a:p>
           <a:p>
             <a:pPr lvl="3"/>
             <a:r>
-              <a:rPr lang="en-US" dirty="1" smtClean="0"/>
+              <a:rPr lang="en-US"/>
               <a:t>Fourth level</a:t>
             </a:r>
           </a:p>
           <a:p>
             <a:pPr lvl="4"/>
             <a:r>
-              <a:rPr lang="en-US" dirty="1" smtClean="0"/>
+              <a:rPr lang="en-US"/>
               <a:t>Fifth level</a:t>
             </a:r>
-            <a:endParaRPr lang="en-US"/>
           </a:p>
         </p:txBody>
       </p:sp>
       <p:sp>
         <p:nvSpPr>
           <p:cNvPr id="4" name="Date Placeholder 3"/>
-          <p:cNvSpPr/>
+          <p:cNvSpPr>
+            <a:spLocks noGrp="1"/>
+          </p:cNvSpPr>
           <p:nvPr>
             <p:ph type="dt" sz="half" idx="10"/>
           </p:nvPr>
@@ -467,10 +588,9 @@
             <a:defPPr/>
           </a:lstStyle>
           <a:p>
-            <a:pPr/>
             <a:fld id="{E8FD0B7A-F5DD-4F40-B4CB-3B2C354B893A}" type="datetimeFigureOut">
               <a:rPr lang="en-US" smtClean="0"/>
-              <a:t>3/4/2014</a:t>
+              <a:t>10/10/2025</a:t>
             </a:fld>
             <a:endParaRPr lang="en-US"/>
           </a:p>
@@ -479,7 +599,9 @@
       <p:sp>
         <p:nvSpPr>
           <p:cNvPr id="5" name="Footer Placeholder 4"/>
-          <p:cNvSpPr/>
+          <p:cNvSpPr>
+            <a:spLocks noGrp="1"/>
+          </p:cNvSpPr>
           <p:nvPr>
             <p:ph type="ftr" sz="quarter" idx="11"/>
           </p:nvPr>
@@ -491,7 +613,6 @@
             <a:defPPr/>
           </a:lstStyle>
           <a:p>
-            <a:pPr/>
             <a:endParaRPr lang="en-US"/>
           </a:p>
         </p:txBody>
@@ -499,7 +620,9 @@
       <p:sp>
         <p:nvSpPr>
           <p:cNvPr id="6" name="Slide Number Placeholder 5"/>
-          <p:cNvSpPr/>
+          <p:cNvSpPr>
+            <a:spLocks noGrp="1"/>
+          </p:cNvSpPr>
           <p:nvPr>
             <p:ph type="sldNum" sz="quarter" idx="12"/>
           </p:nvPr>
@@ -511,7 +634,6 @@
             <a:defPPr/>
           </a:lstStyle>
           <a:p>
-            <a:pPr/>
             <a:fld id="{93AE1883-0942-4AA3-9DB2-9C7C3A0314B1}" type="slidenum">
               <a:rPr lang="en-US" smtClean="0"/>
               <a:t>‹#›</a:t>
@@ -548,7 +670,9 @@
       <p:sp>
         <p:nvSpPr>
           <p:cNvPr id="2" name="Title 1"/>
-          <p:cNvSpPr/>
+          <p:cNvSpPr>
+            <a:spLocks noGrp="1"/>
+          </p:cNvSpPr>
           <p:nvPr>
             <p:ph type="title"/>
           </p:nvPr>
@@ -560,21 +684,21 @@
             <a:defPPr/>
           </a:lstStyle>
           <a:p>
-            <a:pPr/>
-            <a:r>
-              <a:rPr lang="en-US" dirty="1" smtClean="0"/>
+            <a:r>
+              <a:rPr lang="en-US"/>
               <a:t>Click to edit Master title style</a:t>
             </a:r>
-            <a:endParaRPr lang="en-US"/>
           </a:p>
         </p:txBody>
       </p:sp>
       <p:sp>
         <p:nvSpPr>
           <p:cNvPr id="3" name="Content Placeholder 2"/>
-          <p:cNvSpPr/>
+          <p:cNvSpPr>
+            <a:spLocks noGrp="1"/>
+          </p:cNvSpPr>
           <p:nvPr>
-            <p:ph type="obj" idx="1"/>
+            <p:ph idx="1"/>
           </p:nvPr>
         </p:nvSpPr>
         <p:spPr/>
@@ -586,45 +710,46 @@
           <a:p>
             <a:pPr lvl="0"/>
             <a:r>
-              <a:rPr lang="en-US" dirty="1" smtClean="0"/>
+              <a:rPr lang="en-US"/>
               <a:t>Click to edit Master text styles</a:t>
             </a:r>
           </a:p>
           <a:p>
             <a:pPr lvl="1"/>
             <a:r>
-              <a:rPr lang="en-US" dirty="1" smtClean="0"/>
+              <a:rPr lang="en-US"/>
               <a:t>Second level</a:t>
             </a:r>
           </a:p>
           <a:p>
             <a:pPr lvl="2"/>
             <a:r>
-              <a:rPr lang="en-US" dirty="1" smtClean="0"/>
+              <a:rPr lang="en-US"/>
               <a:t>Third level</a:t>
             </a:r>
           </a:p>
           <a:p>
             <a:pPr lvl="3"/>
             <a:r>
-              <a:rPr lang="en-US" dirty="1" smtClean="0"/>
+              <a:rPr lang="en-US"/>
               <a:t>Fourth level</a:t>
             </a:r>
           </a:p>
           <a:p>
             <a:pPr lvl="4"/>
             <a:r>
-              <a:rPr lang="en-US" dirty="1" smtClean="0"/>
+              <a:rPr lang="en-US"/>
               <a:t>Fifth level</a:t>
             </a:r>
-            <a:endParaRPr lang="en-US"/>
           </a:p>
         </p:txBody>
       </p:sp>
       <p:sp>
         <p:nvSpPr>
           <p:cNvPr id="4" name="Date Placeholder 3"/>
-          <p:cNvSpPr/>
+          <p:cNvSpPr>
+            <a:spLocks noGrp="1"/>
+          </p:cNvSpPr>
           <p:nvPr>
             <p:ph type="dt" sz="half" idx="10"/>
           </p:nvPr>
@@ -636,10 +761,9 @@
             <a:defPPr/>
           </a:lstStyle>
           <a:p>
-            <a:pPr/>
             <a:fld id="{E8FD0B7A-F5DD-4F40-B4CB-3B2C354B893A}" type="datetimeFigureOut">
               <a:rPr lang="en-US" smtClean="0"/>
-              <a:t>3/4/2014</a:t>
+              <a:t>10/10/2025</a:t>
             </a:fld>
             <a:endParaRPr lang="en-US"/>
           </a:p>
@@ -648,7 +772,9 @@
       <p:sp>
         <p:nvSpPr>
           <p:cNvPr id="5" name="Footer Placeholder 4"/>
-          <p:cNvSpPr/>
+          <p:cNvSpPr>
+            <a:spLocks noGrp="1"/>
+          </p:cNvSpPr>
           <p:nvPr>
             <p:ph type="ftr" sz="quarter" idx="11"/>
           </p:nvPr>
@@ -660,7 +786,6 @@
             <a:defPPr/>
           </a:lstStyle>
           <a:p>
-            <a:pPr/>
             <a:endParaRPr lang="en-US"/>
           </a:p>
         </p:txBody>
@@ -668,7 +793,9 @@
       <p:sp>
         <p:nvSpPr>
           <p:cNvPr id="6" name="Slide Number Placeholder 5"/>
-          <p:cNvSpPr/>
+          <p:cNvSpPr>
+            <a:spLocks noGrp="1"/>
+          </p:cNvSpPr>
           <p:nvPr>
             <p:ph type="sldNum" sz="quarter" idx="12"/>
           </p:nvPr>
@@ -680,7 +807,6 @@
             <a:defPPr/>
           </a:lstStyle>
           <a:p>
-            <a:pPr/>
             <a:fld id="{93AE1883-0942-4AA3-9DB2-9C7C3A0314B1}" type="slidenum">
               <a:rPr lang="en-US" smtClean="0"/>
               <a:t>‹#›</a:t>
@@ -717,7 +843,9 @@
       <p:sp>
         <p:nvSpPr>
           <p:cNvPr id="2" name="Title 1"/>
-          <p:cNvSpPr/>
+          <p:cNvSpPr>
+            <a:spLocks noGrp="1"/>
+          </p:cNvSpPr>
           <p:nvPr>
             <p:ph type="title"/>
           </p:nvPr>
@@ -735,19 +863,19 @@
             <a:lvl1pPr/>
           </a:lstStyle>
           <a:p>
-            <a:pPr/>
-            <a:r>
-              <a:rPr lang="en-US" dirty="1" smtClean="0"/>
+            <a:r>
+              <a:rPr lang="en-US"/>
               <a:t>Click to edit Master title style</a:t>
             </a:r>
-            <a:endParaRPr lang="en-US"/>
           </a:p>
         </p:txBody>
       </p:sp>
       <p:sp>
         <p:nvSpPr>
           <p:cNvPr id="3" name="Text Placeholder 2"/>
-          <p:cNvSpPr/>
+          <p:cNvSpPr>
+            <a:spLocks noGrp="1"/>
+          </p:cNvSpPr>
           <p:nvPr>
             <p:ph type="body" idx="1"/>
           </p:nvPr>
@@ -775,7 +903,7 @@
           <a:p>
             <a:pPr lvl="0"/>
             <a:r>
-              <a:rPr lang="en-US" dirty="1" smtClean="0"/>
+              <a:rPr lang="en-US"/>
               <a:t>Click to edit Master text styles</a:t>
             </a:r>
           </a:p>
@@ -784,7 +912,9 @@
       <p:sp>
         <p:nvSpPr>
           <p:cNvPr id="4" name="Date Placeholder 3"/>
-          <p:cNvSpPr/>
+          <p:cNvSpPr>
+            <a:spLocks noGrp="1"/>
+          </p:cNvSpPr>
           <p:nvPr>
             <p:ph type="dt" sz="half" idx="10"/>
           </p:nvPr>
@@ -796,10 +926,9 @@
             <a:defPPr/>
           </a:lstStyle>
           <a:p>
-            <a:pPr/>
             <a:fld id="{E8FD0B7A-F5DD-4F40-B4CB-3B2C354B893A}" type="datetimeFigureOut">
               <a:rPr lang="en-US" smtClean="0"/>
-              <a:t>3/4/2014</a:t>
+              <a:t>10/10/2025</a:t>
             </a:fld>
             <a:endParaRPr lang="en-US"/>
           </a:p>
@@ -808,7 +937,9 @@
       <p:sp>
         <p:nvSpPr>
           <p:cNvPr id="5" name="Footer Placeholder 4"/>
-          <p:cNvSpPr/>
+          <p:cNvSpPr>
+            <a:spLocks noGrp="1"/>
+          </p:cNvSpPr>
           <p:nvPr>
             <p:ph type="ftr" sz="quarter" idx="11"/>
           </p:nvPr>
@@ -820,7 +951,6 @@
             <a:defPPr/>
           </a:lstStyle>
           <a:p>
-            <a:pPr/>
             <a:endParaRPr lang="en-US"/>
           </a:p>
         </p:txBody>
@@ -828,7 +958,9 @@
       <p:sp>
         <p:nvSpPr>
           <p:cNvPr id="6" name="Slide Number Placeholder 5"/>
-          <p:cNvSpPr/>
+          <p:cNvSpPr>
+            <a:spLocks noGrp="1"/>
+          </p:cNvSpPr>
           <p:nvPr>
             <p:ph type="sldNum" sz="quarter" idx="12"/>
           </p:nvPr>
@@ -840,7 +972,6 @@
             <a:defPPr/>
           </a:lstStyle>
           <a:p>
-            <a:pPr/>
             <a:fld id="{93AE1883-0942-4AA3-9DB2-9C7C3A0314B1}" type="slidenum">
               <a:rPr lang="en-US" smtClean="0"/>
               <a:t>‹#›</a:t>
@@ -877,7 +1008,9 @@
       <p:sp>
         <p:nvSpPr>
           <p:cNvPr id="2" name="Title 1"/>
-          <p:cNvSpPr/>
+          <p:cNvSpPr>
+            <a:spLocks noGrp="1"/>
+          </p:cNvSpPr>
           <p:nvPr>
             <p:ph type="title"/>
           </p:nvPr>
@@ -889,21 +1022,21 @@
             <a:defPPr/>
           </a:lstStyle>
           <a:p>
-            <a:pPr/>
-            <a:r>
-              <a:rPr lang="en-US" dirty="1" smtClean="0"/>
+            <a:r>
+              <a:rPr lang="en-US"/>
               <a:t>Click to edit Master title style</a:t>
             </a:r>
-            <a:endParaRPr lang="en-US"/>
           </a:p>
         </p:txBody>
       </p:sp>
       <p:sp>
         <p:nvSpPr>
           <p:cNvPr id="3" name="Content Placeholder 2"/>
-          <p:cNvSpPr/>
+          <p:cNvSpPr>
+            <a:spLocks noGrp="1"/>
+          </p:cNvSpPr>
           <p:nvPr>
-            <p:ph type="obj" sz="half" idx="1"/>
+            <p:ph sz="half" idx="1"/>
           </p:nvPr>
         </p:nvSpPr>
         <p:spPr>
@@ -929,47 +1062,48 @@
           <a:p>
             <a:pPr lvl="0"/>
             <a:r>
-              <a:rPr lang="en-US" dirty="1" smtClean="0"/>
+              <a:rPr lang="en-US"/>
               <a:t>Click to edit Master text styles</a:t>
             </a:r>
           </a:p>
           <a:p>
             <a:pPr lvl="1"/>
             <a:r>
-              <a:rPr lang="en-US" dirty="1" smtClean="0"/>
+              <a:rPr lang="en-US"/>
               <a:t>Second level</a:t>
             </a:r>
           </a:p>
           <a:p>
             <a:pPr lvl="2"/>
             <a:r>
-              <a:rPr lang="en-US" dirty="1" smtClean="0"/>
+              <a:rPr lang="en-US"/>
               <a:t>Third level</a:t>
             </a:r>
           </a:p>
           <a:p>
             <a:pPr lvl="3"/>
             <a:r>
-              <a:rPr lang="en-US" dirty="1" smtClean="0"/>
+              <a:rPr lang="en-US"/>
               <a:t>Fourth level</a:t>
             </a:r>
           </a:p>
           <a:p>
             <a:pPr lvl="4"/>
             <a:r>
-              <a:rPr lang="en-US" dirty="1" smtClean="0"/>
+              <a:rPr lang="en-US"/>
               <a:t>Fifth level</a:t>
             </a:r>
-            <a:endParaRPr lang="en-US"/>
           </a:p>
         </p:txBody>
       </p:sp>
       <p:sp>
         <p:nvSpPr>
           <p:cNvPr id="4" name="Content Placeholder 3"/>
-          <p:cNvSpPr/>
+          <p:cNvSpPr>
+            <a:spLocks noGrp="1"/>
+          </p:cNvSpPr>
           <p:nvPr>
-            <p:ph type="obj" sz="half" idx="2"/>
+            <p:ph sz="half" idx="2"/>
           </p:nvPr>
         </p:nvSpPr>
         <p:spPr>
@@ -995,45 +1129,46 @@
           <a:p>
             <a:pPr lvl="0"/>
             <a:r>
-              <a:rPr lang="en-US" dirty="1" smtClean="0"/>
+              <a:rPr lang="en-US"/>
               <a:t>Click to edit Master text styles</a:t>
             </a:r>
           </a:p>
           <a:p>
             <a:pPr lvl="1"/>
             <a:r>
-              <a:rPr lang="en-US" dirty="1" smtClean="0"/>
+              <a:rPr lang="en-US"/>
               <a:t>Second level</a:t>
             </a:r>
           </a:p>
           <a:p>
             <a:pPr lvl="2"/>
             <a:r>
-              <a:rPr lang="en-US" dirty="1" smtClean="0"/>
+              <a:rPr lang="en-US"/>
               <a:t>Third level</a:t>
             </a:r>
           </a:p>
           <a:p>
             <a:pPr lvl="3"/>
             <a:r>
-              <a:rPr lang="en-US" dirty="1" smtClean="0"/>
+              <a:rPr lang="en-US"/>
               <a:t>Fourth level</a:t>
             </a:r>
           </a:p>
           <a:p>
             <a:pPr lvl="4"/>
             <a:r>
-              <a:rPr lang="en-US" dirty="1" smtClean="0"/>
+              <a:rPr lang="en-US"/>
               <a:t>Fifth level</a:t>
             </a:r>
-            <a:endParaRPr lang="en-US"/>
           </a:p>
         </p:txBody>
       </p:sp>
       <p:sp>
         <p:nvSpPr>
           <p:cNvPr id="5" name="Date Placeholder 4"/>
-          <p:cNvSpPr/>
+          <p:cNvSpPr>
+            <a:spLocks noGrp="1"/>
+          </p:cNvSpPr>
           <p:nvPr>
             <p:ph type="dt" sz="half" idx="10"/>
           </p:nvPr>
@@ -1045,10 +1180,9 @@
             <a:defPPr/>
           </a:lstStyle>
           <a:p>
-            <a:pPr/>
             <a:fld id="{E8FD0B7A-F5DD-4F40-B4CB-3B2C354B893A}" type="datetimeFigureOut">
               <a:rPr lang="en-US" smtClean="0"/>
-              <a:t>3/4/2014</a:t>
+              <a:t>10/10/2025</a:t>
             </a:fld>
             <a:endParaRPr lang="en-US"/>
           </a:p>
@@ -1057,7 +1191,9 @@
       <p:sp>
         <p:nvSpPr>
           <p:cNvPr id="6" name="Footer Placeholder 5"/>
-          <p:cNvSpPr/>
+          <p:cNvSpPr>
+            <a:spLocks noGrp="1"/>
+          </p:cNvSpPr>
           <p:nvPr>
             <p:ph type="ftr" sz="quarter" idx="11"/>
           </p:nvPr>
@@ -1069,7 +1205,6 @@
             <a:defPPr/>
           </a:lstStyle>
           <a:p>
-            <a:pPr/>
             <a:endParaRPr lang="en-US"/>
           </a:p>
         </p:txBody>
@@ -1077,7 +1212,9 @@
       <p:sp>
         <p:nvSpPr>
           <p:cNvPr id="7" name="Slide Number Placeholder 6"/>
-          <p:cNvSpPr/>
+          <p:cNvSpPr>
+            <a:spLocks noGrp="1"/>
+          </p:cNvSpPr>
           <p:nvPr>
             <p:ph type="sldNum" sz="quarter" idx="12"/>
           </p:nvPr>
@@ -1089,7 +1226,6 @@
             <a:defPPr/>
           </a:lstStyle>
           <a:p>
-            <a:pPr/>
             <a:fld id="{93AE1883-0942-4AA3-9DB2-9C7C3A0314B1}" type="slidenum">
               <a:rPr lang="en-US" smtClean="0"/>
               <a:t>‹#›</a:t>
@@ -1126,7 +1262,9 @@
       <p:sp>
         <p:nvSpPr>
           <p:cNvPr id="2" name="Title 1"/>
-          <p:cNvSpPr/>
+          <p:cNvSpPr>
+            <a:spLocks noGrp="1"/>
+          </p:cNvSpPr>
           <p:nvPr>
             <p:ph type="title"/>
           </p:nvPr>
@@ -1139,19 +1277,19 @@
             <a:lvl1pPr/>
           </a:lstStyle>
           <a:p>
-            <a:pPr/>
-            <a:r>
-              <a:rPr lang="en-US" dirty="1" smtClean="0"/>
+            <a:r>
+              <a:rPr lang="en-US"/>
               <a:t>Click to edit Master title style</a:t>
             </a:r>
-            <a:endParaRPr lang="en-US"/>
           </a:p>
         </p:txBody>
       </p:sp>
       <p:sp>
         <p:nvSpPr>
           <p:cNvPr id="3" name="Text Placeholder 2"/>
-          <p:cNvSpPr/>
+          <p:cNvSpPr>
+            <a:spLocks noGrp="1"/>
+          </p:cNvSpPr>
           <p:nvPr>
             <p:ph type="body" idx="1"/>
           </p:nvPr>
@@ -1179,7 +1317,7 @@
           <a:p>
             <a:pPr lvl="0"/>
             <a:r>
-              <a:rPr lang="en-US" dirty="1" smtClean="0"/>
+              <a:rPr lang="en-US"/>
               <a:t>Click to edit Master text styles</a:t>
             </a:r>
           </a:p>
@@ -1188,9 +1326,11 @@
       <p:sp>
         <p:nvSpPr>
           <p:cNvPr id="4" name="Content Placeholder 3"/>
-          <p:cNvSpPr/>
+          <p:cNvSpPr>
+            <a:spLocks noGrp="1"/>
+          </p:cNvSpPr>
           <p:nvPr>
-            <p:ph type="obj" sz="half" idx="2"/>
+            <p:ph sz="half" idx="2"/>
           </p:nvPr>
         </p:nvSpPr>
         <p:spPr>
@@ -1216,45 +1356,46 @@
           <a:p>
             <a:pPr lvl="0"/>
             <a:r>
-              <a:rPr lang="en-US" dirty="1" smtClean="0"/>
+              <a:rPr lang="en-US"/>
               <a:t>Click to edit Master text styles</a:t>
             </a:r>
           </a:p>
           <a:p>
             <a:pPr lvl="1"/>
             <a:r>
-              <a:rPr lang="en-US" dirty="1" smtClean="0"/>
+              <a:rPr lang="en-US"/>
               <a:t>Second level</a:t>
             </a:r>
           </a:p>
           <a:p>
             <a:pPr lvl="2"/>
             <a:r>
-              <a:rPr lang="en-US" dirty="1" smtClean="0"/>
+              <a:rPr lang="en-US"/>
               <a:t>Third level</a:t>
             </a:r>
           </a:p>
           <a:p>
             <a:pPr lvl="3"/>
             <a:r>
-              <a:rPr lang="en-US" dirty="1" smtClean="0"/>
+              <a:rPr lang="en-US"/>
               <a:t>Fourth level</a:t>
             </a:r>
           </a:p>
           <a:p>
             <a:pPr lvl="4"/>
             <a:r>
-              <a:rPr lang="en-US" dirty="1" smtClean="0"/>
+              <a:rPr lang="en-US"/>
               <a:t>Fifth level</a:t>
             </a:r>
-            <a:endParaRPr lang="en-US"/>
           </a:p>
         </p:txBody>
       </p:sp>
       <p:sp>
         <p:nvSpPr>
           <p:cNvPr id="5" name="Text Placeholder 4"/>
-          <p:cNvSpPr/>
+          <p:cNvSpPr>
+            <a:spLocks noGrp="1"/>
+          </p:cNvSpPr>
           <p:nvPr>
             <p:ph type="body" sz="quarter" idx="3"/>
           </p:nvPr>
@@ -1282,7 +1423,7 @@
           <a:p>
             <a:pPr lvl="0"/>
             <a:r>
-              <a:rPr lang="en-US" dirty="1" smtClean="0"/>
+              <a:rPr lang="en-US"/>
               <a:t>Click to edit Master text styles</a:t>
             </a:r>
           </a:p>
@@ -1291,9 +1432,11 @@
       <p:sp>
         <p:nvSpPr>
           <p:cNvPr id="6" name="Content Placeholder 5"/>
-          <p:cNvSpPr/>
+          <p:cNvSpPr>
+            <a:spLocks noGrp="1"/>
+          </p:cNvSpPr>
           <p:nvPr>
-            <p:ph type="obj" sz="quarter" idx="4"/>
+            <p:ph sz="quarter" idx="4"/>
           </p:nvPr>
         </p:nvSpPr>
         <p:spPr>
@@ -1319,45 +1462,46 @@
           <a:p>
             <a:pPr lvl="0"/>
             <a:r>
-              <a:rPr lang="en-US" dirty="1" smtClean="0"/>
+              <a:rPr lang="en-US"/>
               <a:t>Click to edit Master text styles</a:t>
             </a:r>
           </a:p>
           <a:p>
             <a:pPr lvl="1"/>
             <a:r>
-              <a:rPr lang="en-US" dirty="1" smtClean="0"/>
+              <a:rPr lang="en-US"/>
               <a:t>Second level</a:t>
             </a:r>
           </a:p>
           <a:p>
             <a:pPr lvl="2"/>
             <a:r>
-              <a:rPr lang="en-US" dirty="1" smtClean="0"/>
+              <a:rPr lang="en-US"/>
               <a:t>Third level</a:t>
             </a:r>
           </a:p>
           <a:p>
             <a:pPr lvl="3"/>
             <a:r>
-              <a:rPr lang="en-US" dirty="1" smtClean="0"/>
+              <a:rPr lang="en-US"/>
               <a:t>Fourth level</a:t>
             </a:r>
           </a:p>
           <a:p>
             <a:pPr lvl="4"/>
             <a:r>
-              <a:rPr lang="en-US" dirty="1" smtClean="0"/>
+              <a:rPr lang="en-US"/>
               <a:t>Fifth level</a:t>
             </a:r>
-            <a:endParaRPr lang="en-US"/>
           </a:p>
         </p:txBody>
       </p:sp>
       <p:sp>
         <p:nvSpPr>
           <p:cNvPr id="7" name="Date Placeholder 6"/>
-          <p:cNvSpPr/>
+          <p:cNvSpPr>
+            <a:spLocks noGrp="1"/>
+          </p:cNvSpPr>
           <p:nvPr>
             <p:ph type="dt" sz="half" idx="10"/>
           </p:nvPr>
@@ -1369,10 +1513,9 @@
             <a:defPPr/>
           </a:lstStyle>
           <a:p>
-            <a:pPr/>
             <a:fld id="{E8FD0B7A-F5DD-4F40-B4CB-3B2C354B893A}" type="datetimeFigureOut">
               <a:rPr lang="en-US" smtClean="0"/>
-              <a:t>3/4/2014</a:t>
+              <a:t>10/10/2025</a:t>
             </a:fld>
             <a:endParaRPr lang="en-US"/>
           </a:p>
@@ -1381,7 +1524,9 @@
       <p:sp>
         <p:nvSpPr>
           <p:cNvPr id="8" name="Footer Placeholder 7"/>
-          <p:cNvSpPr/>
+          <p:cNvSpPr>
+            <a:spLocks noGrp="1"/>
+          </p:cNvSpPr>
           <p:nvPr>
             <p:ph type="ftr" sz="quarter" idx="11"/>
           </p:nvPr>
@@ -1393,7 +1538,6 @@
             <a:defPPr/>
           </a:lstStyle>
           <a:p>
-            <a:pPr/>
             <a:endParaRPr lang="en-US"/>
           </a:p>
         </p:txBody>
@@ -1401,7 +1545,9 @@
       <p:sp>
         <p:nvSpPr>
           <p:cNvPr id="9" name="Slide Number Placeholder 8"/>
-          <p:cNvSpPr/>
+          <p:cNvSpPr>
+            <a:spLocks noGrp="1"/>
+          </p:cNvSpPr>
           <p:nvPr>
             <p:ph type="sldNum" sz="quarter" idx="12"/>
           </p:nvPr>
@@ -1413,7 +1559,6 @@
             <a:defPPr/>
           </a:lstStyle>
           <a:p>
-            <a:pPr/>
             <a:fld id="{93AE1883-0942-4AA3-9DB2-9C7C3A0314B1}" type="slidenum">
               <a:rPr lang="en-US" smtClean="0"/>
               <a:t>‹#›</a:t>
@@ -1450,7 +1595,9 @@
       <p:sp>
         <p:nvSpPr>
           <p:cNvPr id="2" name="Title 1"/>
-          <p:cNvSpPr/>
+          <p:cNvSpPr>
+            <a:spLocks noGrp="1"/>
+          </p:cNvSpPr>
           <p:nvPr>
             <p:ph type="title"/>
           </p:nvPr>
@@ -1462,19 +1609,19 @@
             <a:defPPr/>
           </a:lstStyle>
           <a:p>
-            <a:pPr/>
-            <a:r>
-              <a:rPr lang="en-US" dirty="1" smtClean="0"/>
+            <a:r>
+              <a:rPr lang="en-US"/>
               <a:t>Click to edit Master title style</a:t>
             </a:r>
-            <a:endParaRPr lang="en-US"/>
           </a:p>
         </p:txBody>
       </p:sp>
       <p:sp>
         <p:nvSpPr>
           <p:cNvPr id="3" name="Date Placeholder 2"/>
-          <p:cNvSpPr/>
+          <p:cNvSpPr>
+            <a:spLocks noGrp="1"/>
+          </p:cNvSpPr>
           <p:nvPr>
             <p:ph type="dt" sz="half" idx="10"/>
           </p:nvPr>
@@ -1486,10 +1633,9 @@
             <a:defPPr/>
           </a:lstStyle>
           <a:p>
-            <a:pPr/>
             <a:fld id="{E8FD0B7A-F5DD-4F40-B4CB-3B2C354B893A}" type="datetimeFigureOut">
               <a:rPr lang="en-US" smtClean="0"/>
-              <a:t>3/4/2014</a:t>
+              <a:t>10/10/2025</a:t>
             </a:fld>
             <a:endParaRPr lang="en-US"/>
           </a:p>
@@ -1498,7 +1644,9 @@
       <p:sp>
         <p:nvSpPr>
           <p:cNvPr id="4" name="Footer Placeholder 3"/>
-          <p:cNvSpPr/>
+          <p:cNvSpPr>
+            <a:spLocks noGrp="1"/>
+          </p:cNvSpPr>
           <p:nvPr>
             <p:ph type="ftr" sz="quarter" idx="11"/>
           </p:nvPr>
@@ -1510,7 +1658,6 @@
             <a:defPPr/>
           </a:lstStyle>
           <a:p>
-            <a:pPr/>
             <a:endParaRPr lang="en-US"/>
           </a:p>
         </p:txBody>
@@ -1518,7 +1665,9 @@
       <p:sp>
         <p:nvSpPr>
           <p:cNvPr id="5" name="Slide Number Placeholder 4"/>
-          <p:cNvSpPr/>
+          <p:cNvSpPr>
+            <a:spLocks noGrp="1"/>
+          </p:cNvSpPr>
           <p:nvPr>
             <p:ph type="sldNum" sz="quarter" idx="12"/>
           </p:nvPr>
@@ -1530,7 +1679,6 @@
             <a:defPPr/>
           </a:lstStyle>
           <a:p>
-            <a:pPr/>
             <a:fld id="{93AE1883-0942-4AA3-9DB2-9C7C3A0314B1}" type="slidenum">
               <a:rPr lang="en-US" smtClean="0"/>
               <a:t>‹#›</a:t>
@@ -1567,7 +1715,9 @@
       <p:sp>
         <p:nvSpPr>
           <p:cNvPr id="2" name="Date Placeholder 1"/>
-          <p:cNvSpPr/>
+          <p:cNvSpPr>
+            <a:spLocks noGrp="1"/>
+          </p:cNvSpPr>
           <p:nvPr>
             <p:ph type="dt" sz="half" idx="10"/>
           </p:nvPr>
@@ -1579,10 +1729,9 @@
             <a:defPPr/>
           </a:lstStyle>
           <a:p>
-            <a:pPr/>
             <a:fld id="{E8FD0B7A-F5DD-4F40-B4CB-3B2C354B893A}" type="datetimeFigureOut">
               <a:rPr lang="en-US" smtClean="0"/>
-              <a:t>3/4/2014</a:t>
+              <a:t>10/10/2025</a:t>
             </a:fld>
             <a:endParaRPr lang="en-US"/>
           </a:p>
@@ -1591,7 +1740,9 @@
       <p:sp>
         <p:nvSpPr>
           <p:cNvPr id="3" name="Footer Placeholder 2"/>
-          <p:cNvSpPr/>
+          <p:cNvSpPr>
+            <a:spLocks noGrp="1"/>
+          </p:cNvSpPr>
           <p:nvPr>
             <p:ph type="ftr" sz="quarter" idx="11"/>
           </p:nvPr>
@@ -1603,7 +1754,6 @@
             <a:defPPr/>
           </a:lstStyle>
           <a:p>
-            <a:pPr/>
             <a:endParaRPr lang="en-US"/>
           </a:p>
         </p:txBody>
@@ -1611,7 +1761,9 @@
       <p:sp>
         <p:nvSpPr>
           <p:cNvPr id="4" name="Slide Number Placeholder 3"/>
-          <p:cNvSpPr/>
+          <p:cNvSpPr>
+            <a:spLocks noGrp="1"/>
+          </p:cNvSpPr>
           <p:nvPr>
             <p:ph type="sldNum" sz="quarter" idx="12"/>
           </p:nvPr>
@@ -1623,7 +1775,6 @@
             <a:defPPr/>
           </a:lstStyle>
           <a:p>
-            <a:pPr/>
             <a:fld id="{93AE1883-0942-4AA3-9DB2-9C7C3A0314B1}" type="slidenum">
               <a:rPr lang="en-US" smtClean="0"/>
               <a:t>‹#›</a:t>
@@ -1660,7 +1811,9 @@
       <p:sp>
         <p:nvSpPr>
           <p:cNvPr id="2" name="Title 1"/>
-          <p:cNvSpPr/>
+          <p:cNvSpPr>
+            <a:spLocks noGrp="1"/>
+          </p:cNvSpPr>
           <p:nvPr>
             <p:ph type="title"/>
           </p:nvPr>
@@ -1678,21 +1831,21 @@
             <a:lvl1pPr/>
           </a:lstStyle>
           <a:p>
-            <a:pPr/>
-            <a:r>
-              <a:rPr lang="en-US" dirty="1" smtClean="0"/>
+            <a:r>
+              <a:rPr lang="en-US"/>
               <a:t>Click to edit Master title style</a:t>
             </a:r>
-            <a:endParaRPr lang="en-US"/>
           </a:p>
         </p:txBody>
       </p:sp>
       <p:sp>
         <p:nvSpPr>
           <p:cNvPr id="3" name="Content Placeholder 2"/>
-          <p:cNvSpPr/>
+          <p:cNvSpPr>
+            <a:spLocks noGrp="1"/>
+          </p:cNvSpPr>
           <p:nvPr>
-            <p:ph type="obj" idx="1"/>
+            <p:ph idx="1"/>
           </p:nvPr>
         </p:nvSpPr>
         <p:spPr>
@@ -1718,45 +1871,46 @@
           <a:p>
             <a:pPr lvl="0"/>
             <a:r>
-              <a:rPr lang="en-US" dirty="1" smtClean="0"/>
+              <a:rPr lang="en-US"/>
               <a:t>Click to edit Master text styles</a:t>
             </a:r>
           </a:p>
           <a:p>
             <a:pPr lvl="1"/>
             <a:r>
-              <a:rPr lang="en-US" dirty="1" smtClean="0"/>
+              <a:rPr lang="en-US"/>
               <a:t>Second level</a:t>
             </a:r>
           </a:p>
           <a:p>
             <a:pPr lvl="2"/>
             <a:r>
-              <a:rPr lang="en-US" dirty="1" smtClean="0"/>
+              <a:rPr lang="en-US"/>
               <a:t>Third level</a:t>
             </a:r>
           </a:p>
           <a:p>
             <a:pPr lvl="3"/>
             <a:r>
-              <a:rPr lang="en-US" dirty="1" smtClean="0"/>
+              <a:rPr lang="en-US"/>
               <a:t>Fourth level</a:t>
             </a:r>
           </a:p>
           <a:p>
             <a:pPr lvl="4"/>
             <a:r>
-              <a:rPr lang="en-US" dirty="1" smtClean="0"/>
+              <a:rPr lang="en-US"/>
               <a:t>Fifth level</a:t>
             </a:r>
-            <a:endParaRPr lang="en-US"/>
           </a:p>
         </p:txBody>
       </p:sp>
       <p:sp>
         <p:nvSpPr>
           <p:cNvPr id="4" name="Text Placeholder 3"/>
-          <p:cNvSpPr/>
+          <p:cNvSpPr>
+            <a:spLocks noGrp="1"/>
+          </p:cNvSpPr>
           <p:nvPr>
             <p:ph type="body" sz="half" idx="2"/>
           </p:nvPr>
@@ -1784,7 +1938,7 @@
           <a:p>
             <a:pPr lvl="0"/>
             <a:r>
-              <a:rPr lang="en-US" dirty="1" smtClean="0"/>
+              <a:rPr lang="en-US"/>
               <a:t>Click to edit Master text styles</a:t>
             </a:r>
           </a:p>
@@ -1793,7 +1947,9 @@
       <p:sp>
         <p:nvSpPr>
           <p:cNvPr id="5" name="Date Placeholder 4"/>
-          <p:cNvSpPr/>
+          <p:cNvSpPr>
+            <a:spLocks noGrp="1"/>
+          </p:cNvSpPr>
           <p:nvPr>
             <p:ph type="dt" sz="half" idx="10"/>
           </p:nvPr>
@@ -1805,10 +1961,9 @@
             <a:defPPr/>
           </a:lstStyle>
           <a:p>
-            <a:pPr/>
             <a:fld id="{E8FD0B7A-F5DD-4F40-B4CB-3B2C354B893A}" type="datetimeFigureOut">
               <a:rPr lang="en-US" smtClean="0"/>
-              <a:t>3/4/2014</a:t>
+              <a:t>10/10/2025</a:t>
             </a:fld>
             <a:endParaRPr lang="en-US"/>
           </a:p>
@@ -1817,7 +1972,9 @@
       <p:sp>
         <p:nvSpPr>
           <p:cNvPr id="6" name="Footer Placeholder 5"/>
-          <p:cNvSpPr/>
+          <p:cNvSpPr>
+            <a:spLocks noGrp="1"/>
+          </p:cNvSpPr>
           <p:nvPr>
             <p:ph type="ftr" sz="quarter" idx="11"/>
           </p:nvPr>
@@ -1829,7 +1986,6 @@
             <a:defPPr/>
           </a:lstStyle>
           <a:p>
-            <a:pPr/>
             <a:endParaRPr lang="en-US"/>
           </a:p>
         </p:txBody>
@@ -1837,7 +1993,9 @@
       <p:sp>
         <p:nvSpPr>
           <p:cNvPr id="7" name="Slide Number Placeholder 6"/>
-          <p:cNvSpPr/>
+          <p:cNvSpPr>
+            <a:spLocks noGrp="1"/>
+          </p:cNvSpPr>
           <p:nvPr>
             <p:ph type="sldNum" sz="quarter" idx="12"/>
           </p:nvPr>
@@ -1849,7 +2007,6 @@
             <a:defPPr/>
           </a:lstStyle>
           <a:p>
-            <a:pPr/>
             <a:fld id="{93AE1883-0942-4AA3-9DB2-9C7C3A0314B1}" type="slidenum">
               <a:rPr lang="en-US" smtClean="0"/>
               <a:t>‹#›</a:t>
@@ -1886,7 +2043,9 @@
       <p:sp>
         <p:nvSpPr>
           <p:cNvPr id="2" name="Title 1"/>
-          <p:cNvSpPr/>
+          <p:cNvSpPr>
+            <a:spLocks noGrp="1"/>
+          </p:cNvSpPr>
           <p:nvPr>
             <p:ph type="title"/>
           </p:nvPr>
@@ -1904,19 +2063,19 @@
             <a:lvl1pPr/>
           </a:lstStyle>
           <a:p>
-            <a:pPr/>
-            <a:r>
-              <a:rPr lang="en-US" dirty="1" smtClean="0"/>
+            <a:r>
+              <a:rPr lang="en-US"/>
               <a:t>Click to edit Master title style</a:t>
             </a:r>
-            <a:endParaRPr lang="en-US"/>
           </a:p>
         </p:txBody>
       </p:sp>
       <p:sp>
         <p:nvSpPr>
           <p:cNvPr id="3" name="Picture Placeholder 2"/>
-          <p:cNvSpPr/>
+          <p:cNvSpPr>
+            <a:spLocks noGrp="1"/>
+          </p:cNvSpPr>
           <p:nvPr>
             <p:ph type="pic" idx="1"/>
           </p:nvPr>
@@ -1942,7 +2101,6 @@
             <a:lvl9pPr/>
           </a:lstStyle>
           <a:p>
-            <a:pPr/>
             <a:endParaRPr lang="en-US"/>
           </a:p>
         </p:txBody>
@@ -1950,7 +2108,9 @@
       <p:sp>
         <p:nvSpPr>
           <p:cNvPr id="4" name="Text Placeholder 3"/>
-          <p:cNvSpPr/>
+          <p:cNvSpPr>
+            <a:spLocks noGrp="1"/>
+          </p:cNvSpPr>
           <p:nvPr>
             <p:ph type="body" sz="half" idx="2"/>
           </p:nvPr>
@@ -1978,7 +2138,7 @@
           <a:p>
             <a:pPr lvl="0"/>
             <a:r>
-              <a:rPr lang="en-US" dirty="1" smtClean="0"/>
+              <a:rPr lang="en-US"/>
               <a:t>Click to edit Master text styles</a:t>
             </a:r>
           </a:p>
@@ -1987,7 +2147,9 @@
       <p:sp>
         <p:nvSpPr>
           <p:cNvPr id="5" name="Date Placeholder 4"/>
-          <p:cNvSpPr/>
+          <p:cNvSpPr>
+            <a:spLocks noGrp="1"/>
+          </p:cNvSpPr>
           <p:nvPr>
             <p:ph type="dt" sz="half" idx="10"/>
           </p:nvPr>
@@ -1999,10 +2161,9 @@
             <a:defPPr/>
           </a:lstStyle>
           <a:p>
-            <a:pPr/>
             <a:fld id="{E8FD0B7A-F5DD-4F40-B4CB-3B2C354B893A}" type="datetimeFigureOut">
               <a:rPr lang="en-US" smtClean="0"/>
-              <a:t>3/4/2014</a:t>
+              <a:t>10/10/2025</a:t>
             </a:fld>
             <a:endParaRPr lang="en-US"/>
           </a:p>
@@ -2011,7 +2172,9 @@
       <p:sp>
         <p:nvSpPr>
           <p:cNvPr id="6" name="Footer Placeholder 5"/>
-          <p:cNvSpPr/>
+          <p:cNvSpPr>
+            <a:spLocks noGrp="1"/>
+          </p:cNvSpPr>
           <p:nvPr>
             <p:ph type="ftr" sz="quarter" idx="11"/>
           </p:nvPr>
@@ -2023,7 +2186,6 @@
             <a:defPPr/>
           </a:lstStyle>
           <a:p>
-            <a:pPr/>
             <a:endParaRPr lang="en-US"/>
           </a:p>
         </p:txBody>
@@ -2031,7 +2193,9 @@
       <p:sp>
         <p:nvSpPr>
           <p:cNvPr id="7" name="Slide Number Placeholder 6"/>
-          <p:cNvSpPr/>
+          <p:cNvSpPr>
+            <a:spLocks noGrp="1"/>
+          </p:cNvSpPr>
           <p:nvPr>
             <p:ph type="sldNum" sz="quarter" idx="12"/>
           </p:nvPr>
@@ -2043,7 +2207,6 @@
             <a:defPPr/>
           </a:lstStyle>
           <a:p>
-            <a:pPr/>
             <a:fld id="{93AE1883-0942-4AA3-9DB2-9C7C3A0314B1}" type="slidenum">
               <a:rPr lang="en-US" smtClean="0"/>
               <a:t>‹#›</a:t>
@@ -2062,7 +2225,12 @@
 
 <file path=ppt/slideMasters/slideMaster1.xml><?xml version="1.0" encoding="utf-8"?>
 <p:sldMaster xmlns:a="http://schemas.openxmlformats.org/drawingml/2006/main" xmlns:r="http://schemas.openxmlformats.org/officeDocument/2006/relationships" xmlns:p="http://schemas.openxmlformats.org/presentationml/2006/main">
-  <p:cSld name="">
+  <p:cSld>
+    <p:bg>
+      <p:bgRef idx="1001">
+        <a:schemeClr val="bg1"/>
+      </p:bgRef>
+    </p:bg>
     <p:spTree>
       <p:nvGrpSpPr>
         <p:cNvPr id="1" name=""/>
@@ -2080,7 +2248,9 @@
       <p:sp>
         <p:nvSpPr>
           <p:cNvPr id="2" name="Title Placeholder 1"/>
-          <p:cNvSpPr/>
+          <p:cNvSpPr>
+            <a:spLocks noGrp="1"/>
+          </p:cNvSpPr>
           <p:nvPr>
             <p:ph type="title"/>
           </p:nvPr>
@@ -2090,7 +2260,9 @@
             <a:off x="457200" y="274638"/>
             <a:ext cx="8229600" cy="1143000"/>
           </a:xfrm>
-          <a:prstGeom prst="rect"/>
+          <a:prstGeom prst="rect">
+            <a:avLst/>
+          </a:prstGeom>
         </p:spPr>
         <p:txBody>
           <a:bodyPr lIns="91440" tIns="45720" rIns="91440" bIns="45720" rtlCol="0" anchor="ctr">
@@ -2100,19 +2272,19 @@
             <a:defPPr/>
           </a:lstStyle>
           <a:p>
-            <a:pPr/>
-            <a:r>
-              <a:rPr lang="en-US" dirty="1" smtClean="0"/>
+            <a:r>
+              <a:rPr lang="en-US"/>
               <a:t>Click to edit Master title style</a:t>
             </a:r>
-            <a:endParaRPr lang="en-US"/>
           </a:p>
         </p:txBody>
       </p:sp>
       <p:sp>
         <p:nvSpPr>
           <p:cNvPr id="3" name="Text Placeholder 2"/>
-          <p:cNvSpPr/>
+          <p:cNvSpPr>
+            <a:spLocks noGrp="1"/>
+          </p:cNvSpPr>
           <p:nvPr>
             <p:ph type="body" idx="1"/>
           </p:nvPr>
@@ -2122,7 +2294,9 @@
             <a:off x="457200" y="1600200"/>
             <a:ext cx="8229600" cy="4525963"/>
           </a:xfrm>
-          <a:prstGeom prst="rect"/>
+          <a:prstGeom prst="rect">
+            <a:avLst/>
+          </a:prstGeom>
         </p:spPr>
         <p:txBody>
           <a:bodyPr lIns="91440" tIns="45720" rIns="91440" bIns="45720" rtlCol="0">
@@ -2134,45 +2308,46 @@
           <a:p>
             <a:pPr lvl="0"/>
             <a:r>
-              <a:rPr lang="en-US" dirty="1" smtClean="0"/>
+              <a:rPr lang="en-US"/>
               <a:t>Click to edit Master text styles</a:t>
             </a:r>
           </a:p>
           <a:p>
             <a:pPr lvl="1"/>
             <a:r>
-              <a:rPr lang="en-US" dirty="1" smtClean="0"/>
+              <a:rPr lang="en-US"/>
               <a:t>Second level</a:t>
             </a:r>
           </a:p>
           <a:p>
             <a:pPr lvl="2"/>
             <a:r>
-              <a:rPr lang="en-US" dirty="1" smtClean="0"/>
+              <a:rPr lang="en-US"/>
               <a:t>Third level</a:t>
             </a:r>
           </a:p>
           <a:p>
             <a:pPr lvl="3"/>
             <a:r>
-              <a:rPr lang="en-US" dirty="1" smtClean="0"/>
+              <a:rPr lang="en-US"/>
               <a:t>Fourth level</a:t>
             </a:r>
           </a:p>
           <a:p>
             <a:pPr lvl="4"/>
             <a:r>
-              <a:rPr lang="en-US" dirty="1" smtClean="0"/>
+              <a:rPr lang="en-US"/>
               <a:t>Fifth level</a:t>
             </a:r>
-            <a:endParaRPr lang="en-US"/>
           </a:p>
         </p:txBody>
       </p:sp>
       <p:sp>
         <p:nvSpPr>
           <p:cNvPr id="4" name="Date Placeholder 3"/>
-          <p:cNvSpPr/>
+          <p:cNvSpPr>
+            <a:spLocks noGrp="1"/>
+          </p:cNvSpPr>
           <p:nvPr>
             <p:ph type="dt" sz="half" idx="2"/>
           </p:nvPr>
@@ -2182,7 +2357,9 @@
             <a:off x="457200" y="6356350"/>
             <a:ext cx="2133600" cy="365125"/>
           </a:xfrm>
-          <a:prstGeom prst="rect"/>
+          <a:prstGeom prst="rect">
+            <a:avLst/>
+          </a:prstGeom>
         </p:spPr>
         <p:txBody>
           <a:bodyPr lIns="91440" tIns="45720" rIns="91440" bIns="45720" rtlCol="0" anchor="ctr"/>
@@ -2191,10 +2368,9 @@
             <a:lvl1pPr/>
           </a:lstStyle>
           <a:p>
-            <a:pPr/>
             <a:fld id="{E8FD0B7A-F5DD-4F40-B4CB-3B2C354B893A}" type="datetimeFigureOut">
               <a:rPr lang="en-US" smtClean="0"/>
-              <a:t>3/4/2014</a:t>
+              <a:t>10/10/2025</a:t>
             </a:fld>
             <a:endParaRPr lang="en-US"/>
           </a:p>
@@ -2203,7 +2379,9 @@
       <p:sp>
         <p:nvSpPr>
           <p:cNvPr id="5" name="Footer Placeholder 4"/>
-          <p:cNvSpPr/>
+          <p:cNvSpPr>
+            <a:spLocks noGrp="1"/>
+          </p:cNvSpPr>
           <p:nvPr>
             <p:ph type="ftr" sz="quarter" idx="3"/>
           </p:nvPr>
@@ -2213,7 +2391,9 @@
             <a:off x="3124200" y="6356350"/>
             <a:ext cx="2895600" cy="365125"/>
           </a:xfrm>
-          <a:prstGeom prst="rect"/>
+          <a:prstGeom prst="rect">
+            <a:avLst/>
+          </a:prstGeom>
         </p:spPr>
         <p:txBody>
           <a:bodyPr lIns="91440" tIns="45720" rIns="91440" bIns="45720" rtlCol="0" anchor="ctr"/>
@@ -2222,7 +2402,6 @@
             <a:lvl1pPr/>
           </a:lstStyle>
           <a:p>
-            <a:pPr/>
             <a:endParaRPr lang="en-US"/>
           </a:p>
         </p:txBody>
@@ -2230,7 +2409,9 @@
       <p:sp>
         <p:nvSpPr>
           <p:cNvPr id="6" name="Slide Number Placeholder 5"/>
-          <p:cNvSpPr/>
+          <p:cNvSpPr>
+            <a:spLocks noGrp="1"/>
+          </p:cNvSpPr>
           <p:nvPr>
             <p:ph type="sldNum" sz="quarter" idx="4"/>
           </p:nvPr>
@@ -2240,7 +2421,9 @@
             <a:off x="6553200" y="6356350"/>
             <a:ext cx="2133600" cy="365125"/>
           </a:xfrm>
-          <a:prstGeom prst="rect"/>
+          <a:prstGeom prst="rect">
+            <a:avLst/>
+          </a:prstGeom>
         </p:spPr>
         <p:txBody>
           <a:bodyPr lIns="91440" tIns="45720" rIns="91440" bIns="45720" rtlCol="0" anchor="ctr"/>
@@ -2249,7 +2432,6 @@
             <a:lvl1pPr/>
           </a:lstStyle>
           <a:p>
-            <a:pPr/>
             <a:fld id="{93AE1883-0942-4AA3-9DB2-9C7C3A0314B1}" type="slidenum">
               <a:rPr lang="en-US" smtClean="0"/>
               <a:t>‹#›</a:t>
@@ -2274,12 +2456,292 @@
     <p:sldLayoutId id="2147483658" r:id="rId10"/>
     <p:sldLayoutId id="2147483659" r:id="rId11"/>
   </p:sldLayoutIdLst>
+  <p:txStyles>
+    <p:titleStyle>
+      <a:lvl1pPr algn="l" defTabSz="914400" rtl="0" eaLnBrk="1" latinLnBrk="0" hangingPunct="1">
+        <a:lnSpc>
+          <a:spcPct val="90000"/>
+        </a:lnSpc>
+        <a:spcBef>
+          <a:spcPct val="0"/>
+        </a:spcBef>
+        <a:buNone/>
+        <a:defRPr sz="4400" kern="1200">
+          <a:solidFill>
+            <a:schemeClr val="tx1"/>
+          </a:solidFill>
+          <a:latin typeface="+mj-lt"/>
+          <a:ea typeface="+mj-ea"/>
+          <a:cs typeface="+mj-cs"/>
+        </a:defRPr>
+      </a:lvl1pPr>
+    </p:titleStyle>
+    <p:bodyStyle>
+      <a:lvl1pPr marL="228600" indent="-228600" algn="l" defTabSz="914400" rtl="0" eaLnBrk="1" latinLnBrk="0" hangingPunct="1">
+        <a:lnSpc>
+          <a:spcPct val="90000"/>
+        </a:lnSpc>
+        <a:spcBef>
+          <a:spcPts val="1000"/>
+        </a:spcBef>
+        <a:buFont typeface="Arial" panose="020B0604020202020204" pitchFamily="34" charset="0"/>
+        <a:buChar char="•"/>
+        <a:defRPr sz="2800" kern="1200">
+          <a:solidFill>
+            <a:schemeClr val="tx1"/>
+          </a:solidFill>
+          <a:latin typeface="+mn-lt"/>
+          <a:ea typeface="+mn-ea"/>
+          <a:cs typeface="+mn-cs"/>
+        </a:defRPr>
+      </a:lvl1pPr>
+      <a:lvl2pPr marL="685800" indent="-228600" algn="l" defTabSz="914400" rtl="0" eaLnBrk="1" latinLnBrk="0" hangingPunct="1">
+        <a:lnSpc>
+          <a:spcPct val="90000"/>
+        </a:lnSpc>
+        <a:spcBef>
+          <a:spcPts val="500"/>
+        </a:spcBef>
+        <a:buFont typeface="Arial" panose="020B0604020202020204" pitchFamily="34" charset="0"/>
+        <a:buChar char="•"/>
+        <a:defRPr sz="2400" kern="1200">
+          <a:solidFill>
+            <a:schemeClr val="tx1"/>
+          </a:solidFill>
+          <a:latin typeface="+mn-lt"/>
+          <a:ea typeface="+mn-ea"/>
+          <a:cs typeface="+mn-cs"/>
+        </a:defRPr>
+      </a:lvl2pPr>
+      <a:lvl3pPr marL="1143000" indent="-228600" algn="l" defTabSz="914400" rtl="0" eaLnBrk="1" latinLnBrk="0" hangingPunct="1">
+        <a:lnSpc>
+          <a:spcPct val="90000"/>
+        </a:lnSpc>
+        <a:spcBef>
+          <a:spcPts val="500"/>
+        </a:spcBef>
+        <a:buFont typeface="Arial" panose="020B0604020202020204" pitchFamily="34" charset="0"/>
+        <a:buChar char="•"/>
+        <a:defRPr sz="2000" kern="1200">
+          <a:solidFill>
+            <a:schemeClr val="tx1"/>
+          </a:solidFill>
+          <a:latin typeface="+mn-lt"/>
+          <a:ea typeface="+mn-ea"/>
+          <a:cs typeface="+mn-cs"/>
+        </a:defRPr>
+      </a:lvl3pPr>
+      <a:lvl4pPr marL="1600200" indent="-228600" algn="l" defTabSz="914400" rtl="0" eaLnBrk="1" latinLnBrk="0" hangingPunct="1">
+        <a:lnSpc>
+          <a:spcPct val="90000"/>
+        </a:lnSpc>
+        <a:spcBef>
+          <a:spcPts val="500"/>
+        </a:spcBef>
+        <a:buFont typeface="Arial" panose="020B0604020202020204" pitchFamily="34" charset="0"/>
+        <a:buChar char="•"/>
+        <a:defRPr sz="1800" kern="1200">
+          <a:solidFill>
+            <a:schemeClr val="tx1"/>
+          </a:solidFill>
+          <a:latin typeface="+mn-lt"/>
+          <a:ea typeface="+mn-ea"/>
+          <a:cs typeface="+mn-cs"/>
+        </a:defRPr>
+      </a:lvl4pPr>
+      <a:lvl5pPr marL="2057400" indent="-228600" algn="l" defTabSz="914400" rtl="0" eaLnBrk="1" latinLnBrk="0" hangingPunct="1">
+        <a:lnSpc>
+          <a:spcPct val="90000"/>
+        </a:lnSpc>
+        <a:spcBef>
+          <a:spcPts val="500"/>
+        </a:spcBef>
+        <a:buFont typeface="Arial" panose="020B0604020202020204" pitchFamily="34" charset="0"/>
+        <a:buChar char="•"/>
+        <a:defRPr sz="1800" kern="1200">
+          <a:solidFill>
+            <a:schemeClr val="tx1"/>
+          </a:solidFill>
+          <a:latin typeface="+mn-lt"/>
+          <a:ea typeface="+mn-ea"/>
+          <a:cs typeface="+mn-cs"/>
+        </a:defRPr>
+      </a:lvl5pPr>
+      <a:lvl6pPr marL="2514600" indent="-228600" algn="l" defTabSz="914400" rtl="0" eaLnBrk="1" latinLnBrk="0" hangingPunct="1">
+        <a:lnSpc>
+          <a:spcPct val="90000"/>
+        </a:lnSpc>
+        <a:spcBef>
+          <a:spcPts val="500"/>
+        </a:spcBef>
+        <a:buFont typeface="Arial" panose="020B0604020202020204" pitchFamily="34" charset="0"/>
+        <a:buChar char="•"/>
+        <a:defRPr sz="1800" kern="1200">
+          <a:solidFill>
+            <a:schemeClr val="tx1"/>
+          </a:solidFill>
+          <a:latin typeface="+mn-lt"/>
+          <a:ea typeface="+mn-ea"/>
+          <a:cs typeface="+mn-cs"/>
+        </a:defRPr>
+      </a:lvl6pPr>
+      <a:lvl7pPr marL="2971800" indent="-228600" algn="l" defTabSz="914400" rtl="0" eaLnBrk="1" latinLnBrk="0" hangingPunct="1">
+        <a:lnSpc>
+          <a:spcPct val="90000"/>
+        </a:lnSpc>
+        <a:spcBef>
+          <a:spcPts val="500"/>
+        </a:spcBef>
+        <a:buFont typeface="Arial" panose="020B0604020202020204" pitchFamily="34" charset="0"/>
+        <a:buChar char="•"/>
+        <a:defRPr sz="1800" kern="1200">
+          <a:solidFill>
+            <a:schemeClr val="tx1"/>
+          </a:solidFill>
+          <a:latin typeface="+mn-lt"/>
+          <a:ea typeface="+mn-ea"/>
+          <a:cs typeface="+mn-cs"/>
+        </a:defRPr>
+      </a:lvl7pPr>
+      <a:lvl8pPr marL="3429000" indent="-228600" algn="l" defTabSz="914400" rtl="0" eaLnBrk="1" latinLnBrk="0" hangingPunct="1">
+        <a:lnSpc>
+          <a:spcPct val="90000"/>
+        </a:lnSpc>
+        <a:spcBef>
+          <a:spcPts val="500"/>
+        </a:spcBef>
+        <a:buFont typeface="Arial" panose="020B0604020202020204" pitchFamily="34" charset="0"/>
+        <a:buChar char="•"/>
+        <a:defRPr sz="1800" kern="1200">
+          <a:solidFill>
+            <a:schemeClr val="tx1"/>
+          </a:solidFill>
+          <a:latin typeface="+mn-lt"/>
+          <a:ea typeface="+mn-ea"/>
+          <a:cs typeface="+mn-cs"/>
+        </a:defRPr>
+      </a:lvl8pPr>
+      <a:lvl9pPr marL="3886200" indent="-228600" algn="l" defTabSz="914400" rtl="0" eaLnBrk="1" latinLnBrk="0" hangingPunct="1">
+        <a:lnSpc>
+          <a:spcPct val="90000"/>
+        </a:lnSpc>
+        <a:spcBef>
+          <a:spcPts val="500"/>
+        </a:spcBef>
+        <a:buFont typeface="Arial" panose="020B0604020202020204" pitchFamily="34" charset="0"/>
+        <a:buChar char="•"/>
+        <a:defRPr sz="1800" kern="1200">
+          <a:solidFill>
+            <a:schemeClr val="tx1"/>
+          </a:solidFill>
+          <a:latin typeface="+mn-lt"/>
+          <a:ea typeface="+mn-ea"/>
+          <a:cs typeface="+mn-cs"/>
+        </a:defRPr>
+      </a:lvl9pPr>
+    </p:bodyStyle>
+    <p:otherStyle>
+      <a:defPPr>
+        <a:defRPr lang="en-US"/>
+      </a:defPPr>
+      <a:lvl1pPr marL="0" algn="l" defTabSz="914400" rtl="0" eaLnBrk="1" latinLnBrk="0" hangingPunct="1">
+        <a:defRPr sz="1800" kern="1200">
+          <a:solidFill>
+            <a:schemeClr val="tx1"/>
+          </a:solidFill>
+          <a:latin typeface="+mn-lt"/>
+          <a:ea typeface="+mn-ea"/>
+          <a:cs typeface="+mn-cs"/>
+        </a:defRPr>
+      </a:lvl1pPr>
+      <a:lvl2pPr marL="457200" algn="l" defTabSz="914400" rtl="0" eaLnBrk="1" latinLnBrk="0" hangingPunct="1">
+        <a:defRPr sz="1800" kern="1200">
+          <a:solidFill>
+            <a:schemeClr val="tx1"/>
+          </a:solidFill>
+          <a:latin typeface="+mn-lt"/>
+          <a:ea typeface="+mn-ea"/>
+          <a:cs typeface="+mn-cs"/>
+        </a:defRPr>
+      </a:lvl2pPr>
+      <a:lvl3pPr marL="914400" algn="l" defTabSz="914400" rtl="0" eaLnBrk="1" latinLnBrk="0" hangingPunct="1">
+        <a:defRPr sz="1800" kern="1200">
+          <a:solidFill>
+            <a:schemeClr val="tx1"/>
+          </a:solidFill>
+          <a:latin typeface="+mn-lt"/>
+          <a:ea typeface="+mn-ea"/>
+          <a:cs typeface="+mn-cs"/>
+        </a:defRPr>
+      </a:lvl3pPr>
+      <a:lvl4pPr marL="1371600" algn="l" defTabSz="914400" rtl="0" eaLnBrk="1" latinLnBrk="0" hangingPunct="1">
+        <a:defRPr sz="1800" kern="1200">
+          <a:solidFill>
+            <a:schemeClr val="tx1"/>
+          </a:solidFill>
+          <a:latin typeface="+mn-lt"/>
+          <a:ea typeface="+mn-ea"/>
+          <a:cs typeface="+mn-cs"/>
+        </a:defRPr>
+      </a:lvl4pPr>
+      <a:lvl5pPr marL="1828800" algn="l" defTabSz="914400" rtl="0" eaLnBrk="1" latinLnBrk="0" hangingPunct="1">
+        <a:defRPr sz="1800" kern="1200">
+          <a:solidFill>
+            <a:schemeClr val="tx1"/>
+          </a:solidFill>
+          <a:latin typeface="+mn-lt"/>
+          <a:ea typeface="+mn-ea"/>
+          <a:cs typeface="+mn-cs"/>
+        </a:defRPr>
+      </a:lvl5pPr>
+      <a:lvl6pPr marL="2286000" algn="l" defTabSz="914400" rtl="0" eaLnBrk="1" latinLnBrk="0" hangingPunct="1">
+        <a:defRPr sz="1800" kern="1200">
+          <a:solidFill>
+            <a:schemeClr val="tx1"/>
+          </a:solidFill>
+          <a:latin typeface="+mn-lt"/>
+          <a:ea typeface="+mn-ea"/>
+          <a:cs typeface="+mn-cs"/>
+        </a:defRPr>
+      </a:lvl6pPr>
+      <a:lvl7pPr marL="2743200" algn="l" defTabSz="914400" rtl="0" eaLnBrk="1" latinLnBrk="0" hangingPunct="1">
+        <a:defRPr sz="1800" kern="1200">
+          <a:solidFill>
+            <a:schemeClr val="tx1"/>
+          </a:solidFill>
+          <a:latin typeface="+mn-lt"/>
+          <a:ea typeface="+mn-ea"/>
+          <a:cs typeface="+mn-cs"/>
+        </a:defRPr>
+      </a:lvl7pPr>
+      <a:lvl8pPr marL="3200400" algn="l" defTabSz="914400" rtl="0" eaLnBrk="1" latinLnBrk="0" hangingPunct="1">
+        <a:defRPr sz="1800" kern="1200">
+          <a:solidFill>
+            <a:schemeClr val="tx1"/>
+          </a:solidFill>
+          <a:latin typeface="+mn-lt"/>
+          <a:ea typeface="+mn-ea"/>
+          <a:cs typeface="+mn-cs"/>
+        </a:defRPr>
+      </a:lvl8pPr>
+      <a:lvl9pPr marL="3657600" algn="l" defTabSz="914400" rtl="0" eaLnBrk="1" latinLnBrk="0" hangingPunct="1">
+        <a:defRPr sz="1800" kern="1200">
+          <a:solidFill>
+            <a:schemeClr val="tx1"/>
+          </a:solidFill>
+          <a:latin typeface="+mn-lt"/>
+          <a:ea typeface="+mn-ea"/>
+          <a:cs typeface="+mn-cs"/>
+        </a:defRPr>
+      </a:lvl9pPr>
+    </p:otherStyle>
+  </p:txStyles>
 </p:sldMaster>
 </file>
 
 <file path=ppt/slides/slide1.xml><?xml version="1.0" encoding="utf-8"?>
 <p:sld xmlns:a="http://schemas.openxmlformats.org/drawingml/2006/main" xmlns:r="http://schemas.openxmlformats.org/officeDocument/2006/relationships" xmlns:p="http://schemas.openxmlformats.org/presentationml/2006/main">
-  <p:cSld name="">
+  <p:cSld>
     <p:spTree>
       <p:nvGrpSpPr>
         <p:cNvPr id="1" name=""/>
@@ -2305,7 +2767,9 @@
             <a:off x="1405" y="771144"/>
             <a:ext cx="10692384" cy="6013704"/>
           </a:xfrm>
-          <a:prstGeom prst="rect"/>
+          <a:prstGeom prst="rect">
+            <a:avLst/>
+          </a:prstGeom>
           <a:solidFill>
             <a:srgbClr val="FFFFFF"/>
           </a:solidFill>
@@ -2335,7 +2799,6 @@
             <a:defPPr/>
           </a:lstStyle>
           <a:p>
-            <a:pPr/>
             <a:endParaRPr lang="en-US"/>
           </a:p>
         </p:txBody>
@@ -2351,7 +2814,9 @@
             <a:off x="1810397" y="1275793"/>
             <a:ext cx="5273167" cy="511335"/>
           </a:xfrm>
-          <a:prstGeom prst="rect"/>
+          <a:prstGeom prst="rect">
+            <a:avLst/>
+          </a:prstGeom>
           <a:noFill/>
         </p:spPr>
         <p:style>
@@ -2378,9 +2843,8 @@
             <a:defPPr/>
           </a:lstStyle>
           <a:p>
-            <a:pPr/>
-            <a:r>
-              <a:rPr lang="en-US" sz="3864" dirty="1">
+            <a:r>
+              <a:rPr lang="en-US" sz="3864">
                 <a:solidFill>
                   <a:srgbClr val="00B0F0"/>
                 </a:solidFill>
@@ -2393,12 +2857,15 @@
       </p:sp>
     </p:spTree>
   </p:cSld>
+  <p:clrMapOvr>
+    <a:masterClrMapping/>
+  </p:clrMapOvr>
 </p:sld>
 </file>
 
 <file path=ppt/slides/slide2.xml><?xml version="1.0" encoding="utf-8"?>
 <p:sld xmlns:a="http://schemas.openxmlformats.org/drawingml/2006/main" xmlns:r="http://schemas.openxmlformats.org/officeDocument/2006/relationships" xmlns:p="http://schemas.openxmlformats.org/presentationml/2006/main">
-  <p:cSld name="">
+  <p:cSld>
     <p:spTree>
       <p:nvGrpSpPr>
         <p:cNvPr id="1" name=""/>
@@ -2424,7 +2891,9 @@
             <a:off x="1405" y="771144"/>
             <a:ext cx="10692384" cy="6013704"/>
           </a:xfrm>
-          <a:prstGeom prst="rect"/>
+          <a:prstGeom prst="rect">
+            <a:avLst/>
+          </a:prstGeom>
           <a:solidFill>
             <a:srgbClr val="FFFFFF"/>
           </a:solidFill>
@@ -2454,7 +2923,6 @@
             <a:defPPr/>
           </a:lstStyle>
           <a:p>
-            <a:pPr/>
             <a:endParaRPr lang="en-US"/>
           </a:p>
         </p:txBody>
@@ -2470,7 +2938,9 @@
             <a:off x="1810397" y="1275793"/>
             <a:ext cx="5273167" cy="511335"/>
           </a:xfrm>
-          <a:prstGeom prst="rect"/>
+          <a:prstGeom prst="rect">
+            <a:avLst/>
+          </a:prstGeom>
           <a:noFill/>
         </p:spPr>
         <p:style>
@@ -2497,9 +2967,8 @@
             <a:defPPr/>
           </a:lstStyle>
           <a:p>
-            <a:pPr/>
-            <a:r>
-              <a:rPr lang="en-US" sz="3864" dirty="1">
+            <a:r>
+              <a:rPr lang="en-US" sz="3864">
                 <a:solidFill>
                   <a:srgbClr val="00B0F0"/>
                 </a:solidFill>
@@ -2521,7 +2990,9 @@
             <a:off x="1895741" y="2336132"/>
             <a:ext cx="84618" cy="146096"/>
           </a:xfrm>
-          <a:prstGeom prst="rect"/>
+          <a:prstGeom prst="rect">
+            <a:avLst/>
+          </a:prstGeom>
           <a:noFill/>
         </p:spPr>
         <p:style>
@@ -2548,9 +3019,8 @@
             <a:defPPr/>
           </a:lstStyle>
           <a:p>
-            <a:pPr/>
-            <a:r>
-              <a:rPr lang="en-US" sz="1104" dirty="1">
+            <a:r>
+              <a:rPr lang="en-US" sz="1104">
                 <a:solidFill>
                   <a:srgbClr val="000000"/>
                 </a:solidFill>
@@ -2572,7 +3042,9 @@
             <a:off x="2153296" y="2210522"/>
             <a:ext cx="6612837" cy="325539"/>
           </a:xfrm>
-          <a:prstGeom prst="rect"/>
+          <a:prstGeom prst="rect">
+            <a:avLst/>
+          </a:prstGeom>
           <a:noFill/>
         </p:spPr>
         <p:style>
@@ -2599,9 +3071,8 @@
             <a:defPPr/>
           </a:lstStyle>
           <a:p>
-            <a:pPr/>
-            <a:r>
-              <a:rPr lang="en-US" sz="2460" dirty="1">
+            <a:r>
+              <a:rPr lang="en-US" sz="2460">
                 <a:solidFill>
                   <a:srgbClr val="000000"/>
                 </a:solidFill>
@@ -2623,7 +3094,9 @@
             <a:off x="2153296" y="2509226"/>
             <a:ext cx="1834552" cy="325539"/>
           </a:xfrm>
-          <a:prstGeom prst="rect"/>
+          <a:prstGeom prst="rect">
+            <a:avLst/>
+          </a:prstGeom>
           <a:noFill/>
         </p:spPr>
         <p:style>
@@ -2650,9 +3123,8 @@
             <a:defPPr/>
           </a:lstStyle>
           <a:p>
-            <a:pPr/>
-            <a:r>
-              <a:rPr lang="en-US" sz="2460" dirty="1">
+            <a:r>
+              <a:rPr lang="en-US" sz="2460">
                 <a:solidFill>
                   <a:srgbClr val="000000"/>
                 </a:solidFill>
@@ -2674,7 +3146,9 @@
             <a:off x="1895740" y="4276183"/>
             <a:ext cx="84618" cy="146096"/>
           </a:xfrm>
-          <a:prstGeom prst="rect"/>
+          <a:prstGeom prst="rect">
+            <a:avLst/>
+          </a:prstGeom>
           <a:noFill/>
         </p:spPr>
         <p:style>
@@ -2701,9 +3175,8 @@
             <a:defPPr/>
           </a:lstStyle>
           <a:p>
-            <a:pPr/>
-            <a:r>
-              <a:rPr lang="en-US" sz="1104" dirty="1">
+            <a:r>
+              <a:rPr lang="en-US" sz="1104">
                 <a:solidFill>
                   <a:srgbClr val="000000"/>
                 </a:solidFill>
@@ -2722,10 +3195,12 @@
         </p:nvSpPr>
         <p:spPr>
           <a:xfrm>
-            <a:off x="2153296" y="4150573"/>
-            <a:ext cx="6262126" cy="325539"/>
-          </a:xfrm>
-          <a:prstGeom prst="rect"/>
+            <a:off x="2153296" y="4100977"/>
+            <a:ext cx="6462603" cy="424732"/>
+          </a:xfrm>
+          <a:prstGeom prst="rect">
+            <a:avLst/>
+          </a:prstGeom>
           <a:noFill/>
         </p:spPr>
         <p:style>
@@ -2752,15 +3227,14 @@
             <a:defPPr/>
           </a:lstStyle>
           <a:p>
-            <a:pPr/>
-            <a:r>
-              <a:rPr lang="en-US" sz="2460" dirty="1">
+            <a:r>
+              <a:rPr lang="en-US" sz="2460" dirty="0">
                 <a:solidFill>
                   <a:srgbClr val="000000"/>
                 </a:solidFill>
                 <a:latin typeface="Calibri"/>
               </a:rPr>
-              <a:t>Since we’ve been collecting user input throughin-</a:t>
+              <a:t>Since we’ve been collecting user input through in-</a:t>
             </a:r>
           </a:p>
         </p:txBody>
@@ -2776,7 +3250,9 @@
             <a:off x="2153296" y="4449276"/>
             <a:ext cx="6120561" cy="325539"/>
           </a:xfrm>
-          <a:prstGeom prst="rect"/>
+          <a:prstGeom prst="rect">
+            <a:avLst/>
+          </a:prstGeom>
           <a:noFill/>
         </p:spPr>
         <p:style>
@@ -2803,9 +3279,8 @@
             <a:defPPr/>
           </a:lstStyle>
           <a:p>
-            <a:pPr/>
-            <a:r>
-              <a:rPr lang="en-US" sz="2460" dirty="1">
+            <a:r>
+              <a:rPr lang="en-US" sz="2460">
                 <a:solidFill>
                   <a:srgbClr val="000000"/>
                 </a:solidFill>
@@ -2827,7 +3302,9 @@
             <a:off x="2153296" y="4749505"/>
             <a:ext cx="2298300" cy="325539"/>
           </a:xfrm>
-          <a:prstGeom prst="rect"/>
+          <a:prstGeom prst="rect">
+            <a:avLst/>
+          </a:prstGeom>
           <a:noFill/>
         </p:spPr>
         <p:style>
@@ -2854,9 +3331,8 @@
             <a:defPPr/>
           </a:lstStyle>
           <a:p>
-            <a:pPr/>
-            <a:r>
-              <a:rPr lang="en-US" sz="2460" dirty="1">
+            <a:r>
+              <a:rPr lang="en-US" sz="2460">
                 <a:solidFill>
                   <a:srgbClr val="000000"/>
                 </a:solidFill>
@@ -2878,7 +3354,9 @@
             <a:off x="4510923" y="4749505"/>
             <a:ext cx="1030620" cy="325539"/>
           </a:xfrm>
-          <a:prstGeom prst="rect"/>
+          <a:prstGeom prst="rect">
+            <a:avLst/>
+          </a:prstGeom>
           <a:noFill/>
         </p:spPr>
         <p:style>
@@ -2905,9 +3383,8 @@
             <a:defPPr/>
           </a:lstStyle>
           <a:p>
-            <a:pPr/>
-            <a:r>
-              <a:rPr lang="en-US" sz="2460" dirty="1">
+            <a:r>
+              <a:rPr lang="en-US" sz="2460">
                 <a:solidFill>
                   <a:srgbClr val="000000"/>
                 </a:solidFill>
@@ -2929,7 +3406,9 @@
             <a:off x="5544195" y="4749505"/>
             <a:ext cx="78715" cy="325539"/>
           </a:xfrm>
-          <a:prstGeom prst="rect"/>
+          <a:prstGeom prst="rect">
+            <a:avLst/>
+          </a:prstGeom>
           <a:noFill/>
         </p:spPr>
         <p:style>
@@ -2956,9 +3435,8 @@
             <a:defPPr/>
           </a:lstStyle>
           <a:p>
-            <a:pPr/>
-            <a:r>
-              <a:rPr lang="en-US" sz="2460" dirty="1">
+            <a:r>
+              <a:rPr lang="en-US" sz="2460">
                 <a:solidFill>
                   <a:srgbClr val="000000"/>
                 </a:solidFill>
@@ -2980,7 +3458,9 @@
             <a:off x="1895740" y="5695026"/>
             <a:ext cx="84618" cy="146096"/>
           </a:xfrm>
-          <a:prstGeom prst="rect"/>
+          <a:prstGeom prst="rect">
+            <a:avLst/>
+          </a:prstGeom>
           <a:noFill/>
         </p:spPr>
         <p:style>
@@ -3007,9 +3487,8 @@
             <a:defPPr/>
           </a:lstStyle>
           <a:p>
-            <a:pPr/>
-            <a:r>
-              <a:rPr lang="en-US" sz="1104" dirty="1">
+            <a:r>
+              <a:rPr lang="en-US" sz="1104">
                 <a:solidFill>
                   <a:srgbClr val="000000"/>
                 </a:solidFill>
@@ -3031,7 +3510,9 @@
             <a:off x="2153296" y="5569416"/>
             <a:ext cx="6479051" cy="325539"/>
           </a:xfrm>
-          <a:prstGeom prst="rect"/>
+          <a:prstGeom prst="rect">
+            <a:avLst/>
+          </a:prstGeom>
           <a:noFill/>
         </p:spPr>
         <p:style>
@@ -3058,9 +3539,8 @@
             <a:defPPr/>
           </a:lstStyle>
           <a:p>
-            <a:pPr/>
-            <a:r>
-              <a:rPr lang="en-US" sz="2460" dirty="1">
+            <a:r>
+              <a:rPr lang="en-US" sz="2460">
                 <a:solidFill>
                   <a:srgbClr val="000000"/>
                 </a:solidFill>
@@ -3079,10 +3559,12 @@
         </p:nvSpPr>
         <p:spPr>
           <a:xfrm>
-            <a:off x="2153296" y="5868120"/>
-            <a:ext cx="6336723" cy="325539"/>
-          </a:xfrm>
-          <a:prstGeom prst="rect"/>
+            <a:off x="2153296" y="5818524"/>
+            <a:ext cx="6525633" cy="424732"/>
+          </a:xfrm>
+          <a:prstGeom prst="rect">
+            <a:avLst/>
+          </a:prstGeom>
           <a:noFill/>
         </p:spPr>
         <p:style>
@@ -3109,15 +3591,14 @@
             <a:defPPr/>
           </a:lstStyle>
           <a:p>
-            <a:pPr/>
-            <a:r>
-              <a:rPr lang="en-US" sz="2460" dirty="1">
+            <a:r>
+              <a:rPr lang="en-US" sz="2460" dirty="0">
                 <a:solidFill>
                   <a:srgbClr val="000000"/>
                 </a:solidFill>
                 <a:latin typeface="Calibri"/>
               </a:rPr>
-              <a:t>before the program starts running,we need a new</a:t>
+              <a:t>before the program starts running, we need a new</a:t>
             </a:r>
           </a:p>
         </p:txBody>
@@ -3133,7 +3614,9 @@
             <a:off x="2153296" y="6166824"/>
             <a:ext cx="696995" cy="325539"/>
           </a:xfrm>
-          <a:prstGeom prst="rect"/>
+          <a:prstGeom prst="rect">
+            <a:avLst/>
+          </a:prstGeom>
           <a:noFill/>
         </p:spPr>
         <p:style>
@@ -3160,9 +3643,8 @@
             <a:defPPr/>
           </a:lstStyle>
           <a:p>
-            <a:pPr/>
-            <a:r>
-              <a:rPr lang="en-US" sz="2460" dirty="1">
+            <a:r>
+              <a:rPr lang="en-US" sz="2460">
                 <a:solidFill>
                   <a:srgbClr val="000000"/>
                 </a:solidFill>
@@ -3184,7 +3666,9 @@
             <a:off x="4251843" y="3086605"/>
             <a:ext cx="2181897" cy="295367"/>
           </a:xfrm>
-          <a:prstGeom prst="rect"/>
+          <a:prstGeom prst="rect">
+            <a:avLst/>
+          </a:prstGeom>
           <a:noFill/>
         </p:spPr>
         <p:style>
@@ -3211,9 +3695,8 @@
             <a:defPPr/>
           </a:lstStyle>
           <a:p>
-            <a:pPr/>
-            <a:r>
-              <a:rPr lang="en-US" sz="2232" dirty="1">
+            <a:r>
+              <a:rPr lang="en-US" sz="2232">
                 <a:solidFill>
                   <a:srgbClr val="000000"/>
                 </a:solidFill>
@@ -3235,7 +3718,9 @@
             <a:off x="4251843" y="3426457"/>
             <a:ext cx="155850" cy="295367"/>
           </a:xfrm>
-          <a:prstGeom prst="rect"/>
+          <a:prstGeom prst="rect">
+            <a:avLst/>
+          </a:prstGeom>
           <a:noFill/>
         </p:spPr>
         <p:style>
@@ -3262,9 +3747,8 @@
             <a:defPPr/>
           </a:lstStyle>
           <a:p>
-            <a:pPr/>
-            <a:r>
-              <a:rPr lang="en-US" sz="2232" dirty="1">
+            <a:r>
+              <a:rPr lang="en-US" sz="2232">
                 <a:solidFill>
                   <a:srgbClr val="000000"/>
                 </a:solidFill>
@@ -3277,12 +3761,15 @@
       </p:sp>
     </p:spTree>
   </p:cSld>
+  <p:clrMapOvr>
+    <a:masterClrMapping/>
+  </p:clrMapOvr>
 </p:sld>
 </file>
 
 <file path=ppt/slides/slide3.xml><?xml version="1.0" encoding="utf-8"?>
 <p:sld xmlns:a="http://schemas.openxmlformats.org/drawingml/2006/main" xmlns:r="http://schemas.openxmlformats.org/officeDocument/2006/relationships" xmlns:p="http://schemas.openxmlformats.org/presentationml/2006/main">
-  <p:cSld name="">
+  <p:cSld>
     <p:spTree>
       <p:nvGrpSpPr>
         <p:cNvPr id="1" name=""/>
@@ -3308,7 +3795,9 @@
             <a:off x="1405" y="771144"/>
             <a:ext cx="10692384" cy="6013704"/>
           </a:xfrm>
-          <a:prstGeom prst="rect"/>
+          <a:prstGeom prst="rect">
+            <a:avLst/>
+          </a:prstGeom>
           <a:solidFill>
             <a:srgbClr val="FFFFFF"/>
           </a:solidFill>
@@ -3338,7 +3827,6 @@
             <a:defPPr/>
           </a:lstStyle>
           <a:p>
-            <a:pPr/>
             <a:endParaRPr lang="en-US"/>
           </a:p>
         </p:txBody>
@@ -3354,7 +3842,9 @@
             <a:off x="1810397" y="1275793"/>
             <a:ext cx="5273167" cy="511335"/>
           </a:xfrm>
-          <a:prstGeom prst="rect"/>
+          <a:prstGeom prst="rect">
+            <a:avLst/>
+          </a:prstGeom>
           <a:noFill/>
         </p:spPr>
         <p:style>
@@ -3381,9 +3871,8 @@
             <a:defPPr/>
           </a:lstStyle>
           <a:p>
-            <a:pPr/>
-            <a:r>
-              <a:rPr lang="en-US" sz="3864" dirty="1">
+            <a:r>
+              <a:rPr lang="en-US" sz="3864">
                 <a:solidFill>
                   <a:srgbClr val="00B0F0"/>
                 </a:solidFill>
@@ -3405,7 +3894,9 @@
             <a:off x="1895741" y="2366612"/>
             <a:ext cx="84618" cy="146096"/>
           </a:xfrm>
-          <a:prstGeom prst="rect"/>
+          <a:prstGeom prst="rect">
+            <a:avLst/>
+          </a:prstGeom>
           <a:noFill/>
         </p:spPr>
         <p:style>
@@ -3432,9 +3923,8 @@
             <a:defPPr/>
           </a:lstStyle>
           <a:p>
-            <a:pPr/>
-            <a:r>
-              <a:rPr lang="en-US" sz="1104" dirty="1">
+            <a:r>
+              <a:rPr lang="en-US" sz="1104">
                 <a:solidFill>
                   <a:srgbClr val="000000"/>
                 </a:solidFill>
@@ -3456,7 +3946,9 @@
             <a:off x="2153296" y="2241002"/>
             <a:ext cx="2390287" cy="325539"/>
           </a:xfrm>
-          <a:prstGeom prst="rect"/>
+          <a:prstGeom prst="rect">
+            <a:avLst/>
+          </a:prstGeom>
           <a:noFill/>
         </p:spPr>
         <p:style>
@@ -3483,9 +3975,8 @@
             <a:defPPr/>
           </a:lstStyle>
           <a:p>
-            <a:pPr/>
-            <a:r>
-              <a:rPr lang="en-US" sz="2460" dirty="1">
+            <a:r>
+              <a:rPr lang="en-US" sz="2460">
                 <a:solidFill>
                   <a:srgbClr val="000000"/>
                 </a:solidFill>
@@ -3507,7 +3998,9 @@
             <a:off x="4579504" y="2241002"/>
             <a:ext cx="3332733" cy="325539"/>
           </a:xfrm>
-          <a:prstGeom prst="rect"/>
+          <a:prstGeom prst="rect">
+            <a:avLst/>
+          </a:prstGeom>
           <a:noFill/>
         </p:spPr>
         <p:style>
@@ -3534,9 +4027,8 @@
             <a:defPPr/>
           </a:lstStyle>
           <a:p>
-            <a:pPr/>
-            <a:r>
-              <a:rPr lang="en-US" sz="2460" b="1" dirty="1">
+            <a:r>
+              <a:rPr lang="en-US" sz="2460" b="1">
                 <a:solidFill>
                   <a:srgbClr val="000000"/>
                 </a:solidFill>
@@ -3558,7 +4050,9 @@
             <a:off x="7965831" y="2241002"/>
             <a:ext cx="618280" cy="325539"/>
           </a:xfrm>
-          <a:prstGeom prst="rect"/>
+          <a:prstGeom prst="rect">
+            <a:avLst/>
+          </a:prstGeom>
           <a:noFill/>
         </p:spPr>
         <p:style>
@@ -3585,9 +4079,8 @@
             <a:defPPr/>
           </a:lstStyle>
           <a:p>
-            <a:pPr/>
-            <a:r>
-              <a:rPr lang="en-US" sz="2460" dirty="1">
+            <a:r>
+              <a:rPr lang="en-US" sz="2460">
                 <a:solidFill>
                   <a:srgbClr val="000000"/>
                 </a:solidFill>
@@ -3609,7 +4102,9 @@
             <a:off x="2153297" y="2577805"/>
             <a:ext cx="3260883" cy="325539"/>
           </a:xfrm>
-          <a:prstGeom prst="rect"/>
+          <a:prstGeom prst="rect">
+            <a:avLst/>
+          </a:prstGeom>
           <a:noFill/>
         </p:spPr>
         <p:style>
@@ -3636,9 +4131,8 @@
             <a:defPPr/>
           </a:lstStyle>
           <a:p>
-            <a:pPr/>
-            <a:r>
-              <a:rPr lang="en-US" sz="2460" dirty="1">
+            <a:r>
+              <a:rPr lang="en-US" sz="2460">
                 <a:solidFill>
                   <a:srgbClr val="000000"/>
                 </a:solidFill>
@@ -3660,7 +4154,9 @@
             <a:off x="1895741" y="4492591"/>
             <a:ext cx="84618" cy="146096"/>
           </a:xfrm>
-          <a:prstGeom prst="rect"/>
+          <a:prstGeom prst="rect">
+            <a:avLst/>
+          </a:prstGeom>
           <a:noFill/>
         </p:spPr>
         <p:style>
@@ -3687,9 +4183,8 @@
             <a:defPPr/>
           </a:lstStyle>
           <a:p>
-            <a:pPr/>
-            <a:r>
-              <a:rPr lang="en-US" sz="1104" dirty="1">
+            <a:r>
+              <a:rPr lang="en-US" sz="1104">
                 <a:solidFill>
                   <a:srgbClr val="000000"/>
                 </a:solidFill>
@@ -3711,7 +4206,9 @@
             <a:off x="2153297" y="4366981"/>
             <a:ext cx="6258923" cy="325539"/>
           </a:xfrm>
-          <a:prstGeom prst="rect"/>
+          <a:prstGeom prst="rect">
+            <a:avLst/>
+          </a:prstGeom>
           <a:noFill/>
         </p:spPr>
         <p:style>
@@ -3738,9 +4235,8 @@
             <a:defPPr/>
           </a:lstStyle>
           <a:p>
-            <a:pPr/>
-            <a:r>
-              <a:rPr lang="en-US" sz="2460" dirty="1">
+            <a:r>
+              <a:rPr lang="en-US" sz="2460">
                 <a:solidFill>
                   <a:srgbClr val="000000"/>
                 </a:solidFill>
@@ -3762,7 +4258,9 @@
             <a:off x="2153297" y="4703784"/>
             <a:ext cx="6294619" cy="325539"/>
           </a:xfrm>
-          <a:prstGeom prst="rect"/>
+          <a:prstGeom prst="rect">
+            <a:avLst/>
+          </a:prstGeom>
           <a:noFill/>
         </p:spPr>
         <p:style>
@@ -3789,9 +4287,8 @@
             <a:defPPr/>
           </a:lstStyle>
           <a:p>
-            <a:pPr/>
-            <a:r>
-              <a:rPr lang="en-US" sz="2460" dirty="1">
+            <a:r>
+              <a:rPr lang="en-US" sz="2460">
                 <a:solidFill>
                   <a:srgbClr val="000000"/>
                 </a:solidFill>
@@ -3813,7 +4310,9 @@
             <a:off x="2153297" y="5040588"/>
             <a:ext cx="4436729" cy="325539"/>
           </a:xfrm>
-          <a:prstGeom prst="rect"/>
+          <a:prstGeom prst="rect">
+            <a:avLst/>
+          </a:prstGeom>
           <a:noFill/>
         </p:spPr>
         <p:style>
@@ -3840,9 +4339,8 @@
             <a:defPPr/>
           </a:lstStyle>
           <a:p>
-            <a:pPr/>
-            <a:r>
-              <a:rPr lang="en-US" sz="2460" dirty="1">
+            <a:r>
+              <a:rPr lang="en-US" sz="2460">
                 <a:solidFill>
                   <a:srgbClr val="000000"/>
                 </a:solidFill>
@@ -3864,7 +4362,9 @@
             <a:off x="2782709" y="3296917"/>
             <a:ext cx="1402648" cy="295367"/>
           </a:xfrm>
-          <a:prstGeom prst="rect"/>
+          <a:prstGeom prst="rect">
+            <a:avLst/>
+          </a:prstGeom>
           <a:noFill/>
         </p:spPr>
         <p:style>
@@ -3891,9 +4391,8 @@
             <a:defPPr/>
           </a:lstStyle>
           <a:p>
-            <a:pPr/>
-            <a:r>
-              <a:rPr lang="en-US" sz="2232" dirty="1">
+            <a:r>
+              <a:rPr lang="en-US" sz="2232">
                 <a:solidFill>
                   <a:srgbClr val="000000"/>
                 </a:solidFill>
@@ -3915,7 +4414,9 @@
             <a:off x="4181740" y="3296918"/>
             <a:ext cx="1246798" cy="295367"/>
           </a:xfrm>
-          <a:prstGeom prst="rect"/>
+          <a:prstGeom prst="rect">
+            <a:avLst/>
+          </a:prstGeom>
           <a:noFill/>
         </p:spPr>
         <p:style>
@@ -3942,9 +4443,8 @@
             <a:defPPr/>
           </a:lstStyle>
           <a:p>
-            <a:pPr/>
-            <a:r>
-              <a:rPr lang="en-US" sz="2232" dirty="1">
+            <a:r>
+              <a:rPr lang="en-US" sz="2232">
                 <a:solidFill>
                   <a:srgbClr val="009900"/>
                 </a:solidFill>
@@ -3966,7 +4466,9 @@
             <a:off x="5423800" y="3296918"/>
             <a:ext cx="155850" cy="295367"/>
           </a:xfrm>
-          <a:prstGeom prst="rect"/>
+          <a:prstGeom prst="rect">
+            <a:avLst/>
+          </a:prstGeom>
           <a:noFill/>
         </p:spPr>
         <p:style>
@@ -3993,9 +4495,8 @@
             <a:defPPr/>
           </a:lstStyle>
           <a:p>
-            <a:pPr/>
-            <a:r>
-              <a:rPr lang="en-US" sz="2232" dirty="1">
+            <a:r>
+              <a:rPr lang="en-US" sz="2232">
                 <a:solidFill>
                   <a:srgbClr val="000000"/>
                 </a:solidFill>
@@ -4017,7 +4518,9 @@
             <a:off x="5734696" y="3296918"/>
             <a:ext cx="2026047" cy="295367"/>
           </a:xfrm>
-          <a:prstGeom prst="rect"/>
+          <a:prstGeom prst="rect">
+            <a:avLst/>
+          </a:prstGeom>
           <a:noFill/>
         </p:spPr>
         <p:style>
@@ -4044,9 +4547,8 @@
             <a:defPPr/>
           </a:lstStyle>
           <a:p>
-            <a:pPr/>
-            <a:r>
-              <a:rPr lang="en-US" sz="2232" dirty="1">
+            <a:r>
+              <a:rPr lang="en-US" sz="2232">
                 <a:solidFill>
                   <a:srgbClr val="009900"/>
                 </a:solidFill>
@@ -4068,7 +4570,9 @@
             <a:off x="7752471" y="3296918"/>
             <a:ext cx="155850" cy="295367"/>
           </a:xfrm>
-          <a:prstGeom prst="rect"/>
+          <a:prstGeom prst="rect">
+            <a:avLst/>
+          </a:prstGeom>
           <a:noFill/>
         </p:spPr>
         <p:style>
@@ -4095,9 +4599,8 @@
             <a:defPPr/>
           </a:lstStyle>
           <a:p>
-            <a:pPr/>
-            <a:r>
-              <a:rPr lang="en-US" sz="2232" dirty="1">
+            <a:r>
+              <a:rPr lang="en-US" sz="2232">
                 <a:solidFill>
                   <a:srgbClr val="000000"/>
                 </a:solidFill>
@@ -4119,7 +4622,9 @@
             <a:off x="2782709" y="3636770"/>
             <a:ext cx="155850" cy="295367"/>
           </a:xfrm>
-          <a:prstGeom prst="rect"/>
+          <a:prstGeom prst="rect">
+            <a:avLst/>
+          </a:prstGeom>
           <a:noFill/>
         </p:spPr>
         <p:style>
@@ -4146,9 +4651,8 @@
             <a:defPPr/>
           </a:lstStyle>
           <a:p>
-            <a:pPr/>
-            <a:r>
-              <a:rPr lang="en-US" sz="2232" dirty="1">
+            <a:r>
+              <a:rPr lang="en-US" sz="2232">
                 <a:solidFill>
                   <a:srgbClr val="000000"/>
                 </a:solidFill>
@@ -4161,12 +4665,15 @@
       </p:sp>
     </p:spTree>
   </p:cSld>
+  <p:clrMapOvr>
+    <a:masterClrMapping/>
+  </p:clrMapOvr>
 </p:sld>
 </file>
 
 <file path=ppt/slides/slide4.xml><?xml version="1.0" encoding="utf-8"?>
 <p:sld xmlns:a="http://schemas.openxmlformats.org/drawingml/2006/main" xmlns:r="http://schemas.openxmlformats.org/officeDocument/2006/relationships" xmlns:p="http://schemas.openxmlformats.org/presentationml/2006/main">
-  <p:cSld name="">
+  <p:cSld>
     <p:spTree>
       <p:nvGrpSpPr>
         <p:cNvPr id="1" name=""/>
@@ -4192,7 +4699,9 @@
             <a:off x="1405" y="771144"/>
             <a:ext cx="10692384" cy="6013704"/>
           </a:xfrm>
-          <a:prstGeom prst="rect"/>
+          <a:prstGeom prst="rect">
+            <a:avLst/>
+          </a:prstGeom>
           <a:solidFill>
             <a:srgbClr val="FFFFFF"/>
           </a:solidFill>
@@ -4222,7 +4731,6 @@
             <a:defPPr/>
           </a:lstStyle>
           <a:p>
-            <a:pPr/>
             <a:endParaRPr lang="en-US"/>
           </a:p>
         </p:txBody>
@@ -4238,7 +4746,9 @@
             <a:off x="1889638" y="3960876"/>
             <a:ext cx="3457956" cy="339852"/>
           </a:xfrm>
-          <a:prstGeom prst="rect"/>
+          <a:prstGeom prst="rect">
+            <a:avLst/>
+          </a:prstGeom>
           <a:solidFill>
             <a:srgbClr val="5A9AD5"/>
           </a:solidFill>
@@ -4268,7 +4778,6 @@
             <a:defPPr/>
           </a:lstStyle>
           <a:p>
-            <a:pPr/>
             <a:endParaRPr lang="en-US"/>
           </a:p>
         </p:txBody>
@@ -4284,7 +4793,9 @@
             <a:off x="5347594" y="3960876"/>
             <a:ext cx="3457956" cy="339852"/>
           </a:xfrm>
-          <a:prstGeom prst="rect"/>
+          <a:prstGeom prst="rect">
+            <a:avLst/>
+          </a:prstGeom>
           <a:solidFill>
             <a:srgbClr val="5A9AD5"/>
           </a:solidFill>
@@ -4314,7 +4825,6 @@
             <a:defPPr/>
           </a:lstStyle>
           <a:p>
-            <a:pPr/>
             <a:endParaRPr lang="en-US"/>
           </a:p>
         </p:txBody>
@@ -4330,7 +4840,9 @@
             <a:off x="1889638" y="4300728"/>
             <a:ext cx="3457956" cy="338328"/>
           </a:xfrm>
-          <a:prstGeom prst="rect"/>
+          <a:prstGeom prst="rect">
+            <a:avLst/>
+          </a:prstGeom>
           <a:solidFill>
             <a:srgbClr val="D2DEEF"/>
           </a:solidFill>
@@ -4360,7 +4872,6 @@
             <a:defPPr/>
           </a:lstStyle>
           <a:p>
-            <a:pPr/>
             <a:endParaRPr lang="en-US"/>
           </a:p>
         </p:txBody>
@@ -4376,7 +4887,9 @@
             <a:off x="5347594" y="4300728"/>
             <a:ext cx="3457956" cy="338328"/>
           </a:xfrm>
-          <a:prstGeom prst="rect"/>
+          <a:prstGeom prst="rect">
+            <a:avLst/>
+          </a:prstGeom>
           <a:solidFill>
             <a:srgbClr val="D2DEEF"/>
           </a:solidFill>
@@ -4406,7 +4919,6 @@
             <a:defPPr/>
           </a:lstStyle>
           <a:p>
-            <a:pPr/>
             <a:endParaRPr lang="en-US"/>
           </a:p>
         </p:txBody>
@@ -4422,7 +4934,9 @@
             <a:off x="1889638" y="4639056"/>
             <a:ext cx="3457956" cy="339852"/>
           </a:xfrm>
-          <a:prstGeom prst="rect"/>
+          <a:prstGeom prst="rect">
+            <a:avLst/>
+          </a:prstGeom>
           <a:solidFill>
             <a:srgbClr val="EAEFF7"/>
           </a:solidFill>
@@ -4452,7 +4966,6 @@
             <a:defPPr/>
           </a:lstStyle>
           <a:p>
-            <a:pPr/>
             <a:endParaRPr lang="en-US"/>
           </a:p>
         </p:txBody>
@@ -4468,7 +4981,9 @@
             <a:off x="5347594" y="4639056"/>
             <a:ext cx="3457956" cy="339852"/>
           </a:xfrm>
-          <a:prstGeom prst="rect"/>
+          <a:prstGeom prst="rect">
+            <a:avLst/>
+          </a:prstGeom>
           <a:solidFill>
             <a:srgbClr val="EAEFF7"/>
           </a:solidFill>
@@ -4498,7 +5013,6 @@
             <a:defPPr/>
           </a:lstStyle>
           <a:p>
-            <a:pPr/>
             <a:endParaRPr lang="en-US"/>
           </a:p>
         </p:txBody>
@@ -4514,7 +5028,9 @@
             <a:off x="5347594" y="3956304"/>
             <a:ext cx="0" cy="1027176"/>
           </a:xfrm>
-          <a:prstGeom prst="line"/>
+          <a:prstGeom prst="line">
+            <a:avLst/>
+          </a:prstGeom>
           <a:ln w="10103">
             <a:solidFill>
               <a:srgbClr val="FFFFFF"/>
@@ -4541,7 +5057,6 @@
             <a:defPPr/>
           </a:lstStyle>
           <a:p>
-            <a:pPr/>
             <a:endParaRPr lang="en-US"/>
           </a:p>
         </p:txBody>
@@ -4557,7 +5072,9 @@
             <a:off x="1885066" y="4300728"/>
             <a:ext cx="6926580" cy="0"/>
           </a:xfrm>
-          <a:prstGeom prst="line"/>
+          <a:prstGeom prst="line">
+            <a:avLst/>
+          </a:prstGeom>
           <a:ln w="30310">
             <a:solidFill>
               <a:srgbClr val="FFFFFF"/>
@@ -4584,7 +5101,6 @@
             <a:defPPr/>
           </a:lstStyle>
           <a:p>
-            <a:pPr/>
             <a:endParaRPr lang="en-US"/>
           </a:p>
         </p:txBody>
@@ -4600,7 +5116,9 @@
             <a:off x="1885066" y="4639056"/>
             <a:ext cx="6926580" cy="0"/>
           </a:xfrm>
-          <a:prstGeom prst="line"/>
+          <a:prstGeom prst="line">
+            <a:avLst/>
+          </a:prstGeom>
           <a:ln w="10103">
             <a:solidFill>
               <a:srgbClr val="FFFFFF"/>
@@ -4627,7 +5145,6 @@
             <a:defPPr/>
           </a:lstStyle>
           <a:p>
-            <a:pPr/>
             <a:endParaRPr lang="en-US"/>
           </a:p>
         </p:txBody>
@@ -4643,7 +5160,9 @@
             <a:off x="1889638" y="3956304"/>
             <a:ext cx="0" cy="1027176"/>
           </a:xfrm>
-          <a:prstGeom prst="line"/>
+          <a:prstGeom prst="line">
+            <a:avLst/>
+          </a:prstGeom>
           <a:ln w="10103">
             <a:solidFill>
               <a:srgbClr val="FFFFFF"/>
@@ -4670,7 +5189,6 @@
             <a:defPPr/>
           </a:lstStyle>
           <a:p>
-            <a:pPr/>
             <a:endParaRPr lang="en-US"/>
           </a:p>
         </p:txBody>
@@ -4686,7 +5204,9 @@
             <a:off x="8805550" y="3956304"/>
             <a:ext cx="0" cy="1027176"/>
           </a:xfrm>
-          <a:prstGeom prst="line"/>
+          <a:prstGeom prst="line">
+            <a:avLst/>
+          </a:prstGeom>
           <a:ln w="10103">
             <a:solidFill>
               <a:srgbClr val="FFFFFF"/>
@@ -4713,7 +5233,6 @@
             <a:defPPr/>
           </a:lstStyle>
           <a:p>
-            <a:pPr/>
             <a:endParaRPr lang="en-US"/>
           </a:p>
         </p:txBody>
@@ -4729,7 +5248,9 @@
             <a:off x="1885066" y="3960876"/>
             <a:ext cx="6926580" cy="0"/>
           </a:xfrm>
-          <a:prstGeom prst="line"/>
+          <a:prstGeom prst="line">
+            <a:avLst/>
+          </a:prstGeom>
           <a:ln w="10103">
             <a:solidFill>
               <a:srgbClr val="FFFFFF"/>
@@ -4756,7 +5277,6 @@
             <a:defPPr/>
           </a:lstStyle>
           <a:p>
-            <a:pPr/>
             <a:endParaRPr lang="en-US"/>
           </a:p>
         </p:txBody>
@@ -4772,7 +5292,9 @@
             <a:off x="1885066" y="4978908"/>
             <a:ext cx="6926580" cy="0"/>
           </a:xfrm>
-          <a:prstGeom prst="line"/>
+          <a:prstGeom prst="line">
+            <a:avLst/>
+          </a:prstGeom>
           <a:ln w="10103">
             <a:solidFill>
               <a:srgbClr val="FFFFFF"/>
@@ -4799,7 +5321,6 @@
             <a:defPPr/>
           </a:lstStyle>
           <a:p>
-            <a:pPr/>
             <a:endParaRPr lang="en-US"/>
           </a:p>
         </p:txBody>
@@ -4815,7 +5336,9 @@
             <a:off x="1810397" y="1275793"/>
             <a:ext cx="5273167" cy="511335"/>
           </a:xfrm>
-          <a:prstGeom prst="rect"/>
+          <a:prstGeom prst="rect">
+            <a:avLst/>
+          </a:prstGeom>
           <a:noFill/>
         </p:spPr>
         <p:style>
@@ -4842,9 +5365,8 @@
             <a:defPPr/>
           </a:lstStyle>
           <a:p>
-            <a:pPr/>
-            <a:r>
-              <a:rPr lang="en-US" sz="3864" dirty="1">
+            <a:r>
+              <a:rPr lang="en-US" sz="3864">
                 <a:solidFill>
                   <a:srgbClr val="00B0F0"/>
                 </a:solidFill>
@@ -4866,7 +5388,9 @@
             <a:off x="1895741" y="2366612"/>
             <a:ext cx="84618" cy="146096"/>
           </a:xfrm>
-          <a:prstGeom prst="rect"/>
+          <a:prstGeom prst="rect">
+            <a:avLst/>
+          </a:prstGeom>
           <a:noFill/>
         </p:spPr>
         <p:style>
@@ -4893,9 +5417,8 @@
             <a:defPPr/>
           </a:lstStyle>
           <a:p>
-            <a:pPr/>
-            <a:r>
-              <a:rPr lang="en-US" sz="1104" dirty="1">
+            <a:r>
+              <a:rPr lang="en-US" sz="1104">
                 <a:solidFill>
                   <a:srgbClr val="000000"/>
                 </a:solidFill>
@@ -4917,7 +5440,9 @@
             <a:off x="2153297" y="2241002"/>
             <a:ext cx="687080" cy="325539"/>
           </a:xfrm>
-          <a:prstGeom prst="rect"/>
+          <a:prstGeom prst="rect">
+            <a:avLst/>
+          </a:prstGeom>
           <a:noFill/>
         </p:spPr>
         <p:style>
@@ -4944,9 +5469,8 @@
             <a:defPPr/>
           </a:lstStyle>
           <a:p>
-            <a:pPr/>
-            <a:r>
-              <a:rPr lang="en-US" sz="2460" dirty="1">
+            <a:r>
+              <a:rPr lang="en-US" sz="2460">
                 <a:solidFill>
                   <a:srgbClr val="000000"/>
                 </a:solidFill>
@@ -4968,7 +5492,9 @@
             <a:off x="2910724" y="2241002"/>
             <a:ext cx="2232094" cy="325539"/>
           </a:xfrm>
-          <a:prstGeom prst="rect"/>
+          <a:prstGeom prst="rect">
+            <a:avLst/>
+          </a:prstGeom>
           <a:noFill/>
         </p:spPr>
         <p:style>
@@ -4995,9 +5521,8 @@
             <a:defPPr/>
           </a:lstStyle>
           <a:p>
-            <a:pPr/>
-            <a:r>
-              <a:rPr lang="en-US" sz="2460" dirty="1">
+            <a:r>
+              <a:rPr lang="en-US" sz="2460">
                 <a:solidFill>
                   <a:srgbClr val="000000"/>
                 </a:solidFill>
@@ -5019,7 +5544,9 @@
             <a:off x="2195969" y="2798352"/>
             <a:ext cx="75420" cy="130216"/>
           </a:xfrm>
-          <a:prstGeom prst="rect"/>
+          <a:prstGeom prst="rect">
+            <a:avLst/>
+          </a:prstGeom>
           <a:noFill/>
         </p:spPr>
         <p:style>
@@ -5046,9 +5573,8 @@
             <a:defPPr/>
           </a:lstStyle>
           <a:p>
-            <a:pPr/>
-            <a:r>
-              <a:rPr lang="en-US" sz="984" dirty="1">
+            <a:r>
+              <a:rPr lang="en-US" sz="984">
                 <a:solidFill>
                   <a:srgbClr val="000000"/>
                 </a:solidFill>
@@ -5070,7 +5596,9 @@
             <a:off x="2453525" y="2686080"/>
             <a:ext cx="4426183" cy="290603"/>
           </a:xfrm>
-          <a:prstGeom prst="rect"/>
+          <a:prstGeom prst="rect">
+            <a:avLst/>
+          </a:prstGeom>
           <a:noFill/>
         </p:spPr>
         <p:style>
@@ -5097,9 +5625,8 @@
             <a:defPPr/>
           </a:lstStyle>
           <a:p>
-            <a:pPr/>
-            <a:r>
-              <a:rPr lang="en-US" sz="2196" dirty="1">
+            <a:r>
+              <a:rPr lang="en-US" sz="2196">
                 <a:solidFill>
                   <a:srgbClr val="000000"/>
                 </a:solidFill>
@@ -5121,7 +5648,9 @@
             <a:off x="6924939" y="2686080"/>
             <a:ext cx="914978" cy="290603"/>
           </a:xfrm>
-          <a:prstGeom prst="rect"/>
+          <a:prstGeom prst="rect">
+            <a:avLst/>
+          </a:prstGeom>
           <a:noFill/>
         </p:spPr>
         <p:style>
@@ -5148,9 +5677,8 @@
             <a:defPPr/>
           </a:lstStyle>
           <a:p>
-            <a:pPr/>
-            <a:r>
-              <a:rPr lang="en-US" sz="2196" b="1" dirty="1">
+            <a:r>
+              <a:rPr lang="en-US" sz="2196" b="1">
                 <a:solidFill>
                   <a:srgbClr val="000000"/>
                 </a:solidFill>
@@ -5172,7 +5700,9 @@
             <a:off x="7898774" y="2686080"/>
             <a:ext cx="231911" cy="290603"/>
           </a:xfrm>
-          <a:prstGeom prst="rect"/>
+          <a:prstGeom prst="rect">
+            <a:avLst/>
+          </a:prstGeom>
           <a:noFill/>
         </p:spPr>
         <p:style>
@@ -5199,9 +5729,8 @@
             <a:defPPr/>
           </a:lstStyle>
           <a:p>
-            <a:pPr/>
-            <a:r>
-              <a:rPr lang="en-US" sz="2196" dirty="1">
+            <a:r>
+              <a:rPr lang="en-US" sz="2196">
                 <a:solidFill>
                   <a:srgbClr val="000000"/>
                 </a:solidFill>
@@ -5223,7 +5752,9 @@
             <a:off x="2453525" y="2986308"/>
             <a:ext cx="5761270" cy="290603"/>
           </a:xfrm>
-          <a:prstGeom prst="rect"/>
+          <a:prstGeom prst="rect">
+            <a:avLst/>
+          </a:prstGeom>
           <a:noFill/>
         </p:spPr>
         <p:style>
@@ -5250,9 +5781,8 @@
             <a:defPPr/>
           </a:lstStyle>
           <a:p>
-            <a:pPr/>
-            <a:r>
-              <a:rPr lang="en-US" sz="2196" dirty="1">
+            <a:r>
+              <a:rPr lang="en-US" sz="2196">
                 <a:solidFill>
                   <a:srgbClr val="000000"/>
                 </a:solidFill>
@@ -5271,10 +5801,12 @@
         </p:nvSpPr>
         <p:spPr>
           <a:xfrm>
-            <a:off x="2453524" y="3286537"/>
-            <a:ext cx="2528411" cy="290603"/>
-          </a:xfrm>
-          <a:prstGeom prst="rect"/>
+            <a:off x="2453524" y="3239799"/>
+            <a:ext cx="2741200" cy="384080"/>
+          </a:xfrm>
+          <a:prstGeom prst="rect">
+            <a:avLst/>
+          </a:prstGeom>
           <a:noFill/>
         </p:spPr>
         <p:style>
@@ -5301,15 +5833,14 @@
             <a:defPPr/>
           </a:lstStyle>
           <a:p>
-            <a:pPr/>
-            <a:r>
-              <a:rPr lang="en-US" sz="2196" dirty="1">
+            <a:r>
+              <a:rPr lang="en-US" sz="2196" dirty="0">
                 <a:solidFill>
                   <a:srgbClr val="000000"/>
                 </a:solidFill>
                 <a:latin typeface="Calibri"/>
               </a:rPr>
-              <a:t>programwasexecuted.</a:t>
+              <a:t>Program was executed.</a:t>
             </a:r>
           </a:p>
         </p:txBody>
@@ -5325,7 +5856,9 @@
             <a:off x="3156088" y="4040896"/>
             <a:ext cx="923044" cy="231847"/>
           </a:xfrm>
-          <a:prstGeom prst="rect"/>
+          <a:prstGeom prst="rect">
+            <a:avLst/>
+          </a:prstGeom>
           <a:noFill/>
         </p:spPr>
         <p:style>
@@ -5352,9 +5885,8 @@
             <a:defPPr/>
           </a:lstStyle>
           <a:p>
-            <a:pPr/>
-            <a:r>
-              <a:rPr lang="en-US" sz="1752" b="1" dirty="1">
+            <a:r>
+              <a:rPr lang="en-US" sz="1752" b="1">
                 <a:solidFill>
                   <a:srgbClr val="FFFFFF"/>
                 </a:solidFill>
@@ -5376,7 +5908,9 @@
             <a:off x="6830451" y="4042421"/>
             <a:ext cx="489335" cy="231847"/>
           </a:xfrm>
-          <a:prstGeom prst="rect"/>
+          <a:prstGeom prst="rect">
+            <a:avLst/>
+          </a:prstGeom>
           <a:noFill/>
         </p:spPr>
         <p:style>
@@ -5403,9 +5937,8 @@
             <a:defPPr/>
           </a:lstStyle>
           <a:p>
-            <a:pPr/>
-            <a:r>
-              <a:rPr lang="en-US" sz="1752" b="1" dirty="1">
+            <a:r>
+              <a:rPr lang="en-US" sz="1752" b="1">
                 <a:solidFill>
                   <a:srgbClr val="FFFFFF"/>
                 </a:solidFill>
@@ -5427,7 +5960,9 @@
             <a:off x="3127132" y="4382273"/>
             <a:ext cx="978670" cy="231847"/>
           </a:xfrm>
-          <a:prstGeom prst="rect"/>
+          <a:prstGeom prst="rect">
+            <a:avLst/>
+          </a:prstGeom>
           <a:noFill/>
         </p:spPr>
         <p:style>
@@ -5454,9 +5989,8 @@
             <a:defPPr/>
           </a:lstStyle>
           <a:p>
-            <a:pPr/>
-            <a:r>
-              <a:rPr lang="en-US" sz="1752" dirty="1">
+            <a:r>
+              <a:rPr lang="en-US" sz="1752">
                 <a:solidFill>
                   <a:srgbClr val="000000"/>
                 </a:solidFill>
@@ -5478,7 +6012,9 @@
             <a:off x="7017903" y="4380749"/>
             <a:ext cx="112773" cy="231847"/>
           </a:xfrm>
-          <a:prstGeom prst="rect"/>
+          <a:prstGeom prst="rect">
+            <a:avLst/>
+          </a:prstGeom>
           <a:noFill/>
         </p:spPr>
         <p:style>
@@ -5505,9 +6041,8 @@
             <a:defPPr/>
           </a:lstStyle>
           <a:p>
-            <a:pPr/>
-            <a:r>
-              <a:rPr lang="en-US" sz="1752" dirty="1">
+            <a:r>
+              <a:rPr lang="en-US" sz="1752">
                 <a:solidFill>
                   <a:srgbClr val="000000"/>
                 </a:solidFill>
@@ -5529,7 +6064,9 @@
             <a:off x="2514485" y="4722125"/>
             <a:ext cx="2202006" cy="231847"/>
           </a:xfrm>
-          <a:prstGeom prst="rect"/>
+          <a:prstGeom prst="rect">
+            <a:avLst/>
+          </a:prstGeom>
           <a:noFill/>
         </p:spPr>
         <p:style>
@@ -5556,9 +6093,8 @@
             <a:defPPr/>
           </a:lstStyle>
           <a:p>
-            <a:pPr/>
-            <a:r>
-              <a:rPr lang="en-US" sz="1752" dirty="1">
+            <a:r>
+              <a:rPr lang="en-US" sz="1752">
                 <a:solidFill>
                   <a:srgbClr val="000000"/>
                 </a:solidFill>
@@ -5580,7 +6116,9 @@
             <a:off x="7017903" y="4720601"/>
             <a:ext cx="112773" cy="231847"/>
           </a:xfrm>
-          <a:prstGeom prst="rect"/>
+          <a:prstGeom prst="rect">
+            <a:avLst/>
+          </a:prstGeom>
           <a:noFill/>
         </p:spPr>
         <p:style>
@@ -5607,9 +6145,8 @@
             <a:defPPr/>
           </a:lstStyle>
           <a:p>
-            <a:pPr/>
-            <a:r>
-              <a:rPr lang="en-US" sz="1752" dirty="1">
+            <a:r>
+              <a:rPr lang="en-US" sz="1752">
                 <a:solidFill>
                   <a:srgbClr val="000000"/>
                 </a:solidFill>
@@ -5622,12 +6159,15 @@
       </p:sp>
     </p:spTree>
   </p:cSld>
+  <p:clrMapOvr>
+    <a:masterClrMapping/>
+  </p:clrMapOvr>
 </p:sld>
 </file>
 
 <file path=ppt/slides/slide5.xml><?xml version="1.0" encoding="utf-8"?>
 <p:sld xmlns:a="http://schemas.openxmlformats.org/drawingml/2006/main" xmlns:r="http://schemas.openxmlformats.org/officeDocument/2006/relationships" xmlns:p="http://schemas.openxmlformats.org/presentationml/2006/main">
-  <p:cSld name="">
+  <p:cSld>
     <p:spTree>
       <p:nvGrpSpPr>
         <p:cNvPr id="1" name=""/>
@@ -5653,7 +6193,9 @@
             <a:off x="1405" y="771144"/>
             <a:ext cx="10692384" cy="6013704"/>
           </a:xfrm>
-          <a:prstGeom prst="rect"/>
+          <a:prstGeom prst="rect">
+            <a:avLst/>
+          </a:prstGeom>
           <a:solidFill>
             <a:srgbClr val="FFFFFF"/>
           </a:solidFill>
@@ -5683,7 +6225,6 @@
             <a:defPPr/>
           </a:lstStyle>
           <a:p>
-            <a:pPr/>
             <a:endParaRPr lang="en-US"/>
           </a:p>
         </p:txBody>
@@ -5699,7 +6240,9 @@
             <a:off x="1810397" y="1275793"/>
             <a:ext cx="5273167" cy="511335"/>
           </a:xfrm>
-          <a:prstGeom prst="rect"/>
+          <a:prstGeom prst="rect">
+            <a:avLst/>
+          </a:prstGeom>
           <a:noFill/>
         </p:spPr>
         <p:style>
@@ -5726,9 +6269,8 @@
             <a:defPPr/>
           </a:lstStyle>
           <a:p>
-            <a:pPr/>
-            <a:r>
-              <a:rPr lang="en-US" sz="3864" dirty="1">
+            <a:r>
+              <a:rPr lang="en-US" sz="3864">
                 <a:solidFill>
                   <a:srgbClr val="00B0F0"/>
                 </a:solidFill>
@@ -5750,7 +6292,9 @@
             <a:off x="1895741" y="2366612"/>
             <a:ext cx="84618" cy="146096"/>
           </a:xfrm>
-          <a:prstGeom prst="rect"/>
+          <a:prstGeom prst="rect">
+            <a:avLst/>
+          </a:prstGeom>
           <a:noFill/>
         </p:spPr>
         <p:style>
@@ -5777,9 +6321,8 @@
             <a:defPPr/>
           </a:lstStyle>
           <a:p>
-            <a:pPr/>
-            <a:r>
-              <a:rPr lang="en-US" sz="1104" dirty="1">
+            <a:r>
+              <a:rPr lang="en-US" sz="1104">
                 <a:solidFill>
                   <a:srgbClr val="000000"/>
                 </a:solidFill>
@@ -5801,7 +6344,9 @@
             <a:off x="2153297" y="2241002"/>
             <a:ext cx="687080" cy="325539"/>
           </a:xfrm>
-          <a:prstGeom prst="rect"/>
+          <a:prstGeom prst="rect">
+            <a:avLst/>
+          </a:prstGeom>
           <a:noFill/>
         </p:spPr>
         <p:style>
@@ -5828,9 +6373,8 @@
             <a:defPPr/>
           </a:lstStyle>
           <a:p>
-            <a:pPr/>
-            <a:r>
-              <a:rPr lang="en-US" sz="2460" dirty="1">
+            <a:r>
+              <a:rPr lang="en-US" sz="2460">
                 <a:solidFill>
                   <a:srgbClr val="000000"/>
                 </a:solidFill>
@@ -5852,7 +6396,9 @@
             <a:off x="2910724" y="2241002"/>
             <a:ext cx="2309588" cy="325539"/>
           </a:xfrm>
-          <a:prstGeom prst="rect"/>
+          <a:prstGeom prst="rect">
+            <a:avLst/>
+          </a:prstGeom>
           <a:noFill/>
         </p:spPr>
         <p:style>
@@ -5879,9 +6425,8 @@
             <a:defPPr/>
           </a:lstStyle>
           <a:p>
-            <a:pPr/>
-            <a:r>
-              <a:rPr lang="en-US" sz="2460" dirty="1">
+            <a:r>
+              <a:rPr lang="en-US" sz="2460">
                 <a:solidFill>
                   <a:srgbClr val="000000"/>
                 </a:solidFill>
@@ -5903,7 +6448,9 @@
             <a:off x="2195969" y="2798352"/>
             <a:ext cx="75420" cy="130216"/>
           </a:xfrm>
-          <a:prstGeom prst="rect"/>
+          <a:prstGeom prst="rect">
+            <a:avLst/>
+          </a:prstGeom>
           <a:noFill/>
         </p:spPr>
         <p:style>
@@ -5930,9 +6477,8 @@
             <a:defPPr/>
           </a:lstStyle>
           <a:p>
-            <a:pPr/>
-            <a:r>
-              <a:rPr lang="en-US" sz="984" dirty="1">
+            <a:r>
+              <a:rPr lang="en-US" sz="984">
                 <a:solidFill>
                   <a:srgbClr val="000000"/>
                 </a:solidFill>
@@ -5954,7 +6500,9 @@
             <a:off x="2453525" y="2686080"/>
             <a:ext cx="6075023" cy="290603"/>
           </a:xfrm>
-          <a:prstGeom prst="rect"/>
+          <a:prstGeom prst="rect">
+            <a:avLst/>
+          </a:prstGeom>
           <a:noFill/>
         </p:spPr>
         <p:style>
@@ -5981,9 +6529,8 @@
             <a:defPPr/>
           </a:lstStyle>
           <a:p>
-            <a:pPr/>
-            <a:r>
-              <a:rPr lang="en-US" sz="2196" dirty="1">
+            <a:r>
+              <a:rPr lang="en-US" sz="2196">
                 <a:solidFill>
                   <a:srgbClr val="000000"/>
                 </a:solidFill>
@@ -6002,10 +6549,12 @@
         </p:nvSpPr>
         <p:spPr>
           <a:xfrm>
-            <a:off x="2453524" y="2986308"/>
-            <a:ext cx="5904120" cy="290603"/>
-          </a:xfrm>
-          <a:prstGeom prst="rect"/>
+            <a:off x="2453524" y="2939570"/>
+            <a:ext cx="6196440" cy="384080"/>
+          </a:xfrm>
+          <a:prstGeom prst="rect">
+            <a:avLst/>
+          </a:prstGeom>
           <a:noFill/>
         </p:spPr>
         <p:style>
@@ -6032,15 +6581,14 @@
             <a:defPPr/>
           </a:lstStyle>
           <a:p>
-            <a:pPr/>
-            <a:r>
-              <a:rPr lang="en-US" sz="2196" dirty="1">
+            <a:r>
+              <a:rPr lang="en-US" sz="2196" dirty="0">
                 <a:solidFill>
                   <a:srgbClr val="000000"/>
                 </a:solidFill>
                 <a:latin typeface="Calibri"/>
               </a:rPr>
-              <a:t>actualtextthe user typed at the command-line when</a:t>
+              <a:t>Actual text the user typed at the command-line when</a:t>
             </a:r>
           </a:p>
         </p:txBody>
@@ -6053,10 +6601,12 @@
         </p:nvSpPr>
         <p:spPr>
           <a:xfrm>
-            <a:off x="2453525" y="3286537"/>
-            <a:ext cx="2969899" cy="290603"/>
-          </a:xfrm>
-          <a:prstGeom prst="rect"/>
+            <a:off x="2453525" y="3239799"/>
+            <a:ext cx="3188437" cy="384080"/>
+          </a:xfrm>
+          <a:prstGeom prst="rect">
+            <a:avLst/>
+          </a:prstGeom>
           <a:noFill/>
         </p:spPr>
         <p:style>
@@ -6083,15 +6633,14 @@
             <a:defPPr/>
           </a:lstStyle>
           <a:p>
-            <a:pPr/>
-            <a:r>
-              <a:rPr lang="en-US" sz="2196" dirty="1">
+            <a:r>
+              <a:rPr lang="en-US" sz="2196" dirty="0">
                 <a:solidFill>
                   <a:srgbClr val="000000"/>
                 </a:solidFill>
                 <a:latin typeface="Calibri"/>
               </a:rPr>
-              <a:t>the programwasexecuted.</a:t>
+              <a:t>the program was executed.</a:t>
             </a:r>
           </a:p>
         </p:txBody>
@@ -6107,7 +6656,9 @@
             <a:off x="2195968" y="4221766"/>
             <a:ext cx="75420" cy="130216"/>
           </a:xfrm>
-          <a:prstGeom prst="rect"/>
+          <a:prstGeom prst="rect">
+            <a:avLst/>
+          </a:prstGeom>
           <a:noFill/>
         </p:spPr>
         <p:style>
@@ -6134,9 +6685,8 @@
             <a:defPPr/>
           </a:lstStyle>
           <a:p>
-            <a:pPr/>
-            <a:r>
-              <a:rPr lang="en-US" sz="984" dirty="1">
+            <a:r>
+              <a:rPr lang="en-US" sz="984">
                 <a:solidFill>
                   <a:srgbClr val="000000"/>
                 </a:solidFill>
@@ -6158,7 +6708,9 @@
             <a:off x="2453524" y="4109495"/>
             <a:ext cx="2232497" cy="290603"/>
           </a:xfrm>
-          <a:prstGeom prst="rect"/>
+          <a:prstGeom prst="rect">
+            <a:avLst/>
+          </a:prstGeom>
           <a:noFill/>
         </p:spPr>
         <p:style>
@@ -6185,9 +6737,8 @@
             <a:defPPr/>
           </a:lstStyle>
           <a:p>
-            <a:pPr/>
-            <a:r>
-              <a:rPr lang="en-US" sz="2196" dirty="1">
+            <a:r>
+              <a:rPr lang="en-US" sz="2196">
                 <a:solidFill>
                   <a:srgbClr val="000000"/>
                 </a:solidFill>
@@ -6209,7 +6760,9 @@
             <a:off x="4738000" y="4109495"/>
             <a:ext cx="613344" cy="290603"/>
           </a:xfrm>
-          <a:prstGeom prst="rect"/>
+          <a:prstGeom prst="rect">
+            <a:avLst/>
+          </a:prstGeom>
           <a:noFill/>
         </p:spPr>
         <p:style>
@@ -6236,9 +6789,8 @@
             <a:defPPr/>
           </a:lstStyle>
           <a:p>
-            <a:pPr/>
-            <a:r>
-              <a:rPr lang="en-US" sz="2196" dirty="1">
+            <a:r>
+              <a:rPr lang="en-US" sz="2196">
                 <a:solidFill>
                   <a:srgbClr val="000000"/>
                 </a:solidFill>
@@ -6260,7 +6812,9 @@
             <a:off x="5414655" y="4109495"/>
             <a:ext cx="2024553" cy="290603"/>
           </a:xfrm>
-          <a:prstGeom prst="rect"/>
+          <a:prstGeom prst="rect">
+            <a:avLst/>
+          </a:prstGeom>
           <a:noFill/>
         </p:spPr>
         <p:style>
@@ -6287,9 +6841,8 @@
             <a:defPPr/>
           </a:lstStyle>
           <a:p>
-            <a:pPr/>
-            <a:r>
-              <a:rPr lang="en-US" sz="2196" dirty="1">
+            <a:r>
+              <a:rPr lang="en-US" sz="2196">
                 <a:solidFill>
                   <a:srgbClr val="000000"/>
                 </a:solidFill>
@@ -6311,7 +6864,9 @@
             <a:off x="7481198" y="4109495"/>
             <a:ext cx="1073353" cy="290603"/>
           </a:xfrm>
-          <a:prstGeom prst="rect"/>
+          <a:prstGeom prst="rect">
+            <a:avLst/>
+          </a:prstGeom>
           <a:noFill/>
         </p:spPr>
         <p:style>
@@ -6338,9 +6893,8 @@
             <a:defPPr/>
           </a:lstStyle>
           <a:p>
-            <a:pPr/>
-            <a:r>
-              <a:rPr lang="en-US" sz="2196" dirty="1">
+            <a:r>
+              <a:rPr lang="en-US" sz="2196">
                 <a:solidFill>
                   <a:srgbClr val="000000"/>
                 </a:solidFill>
@@ -6362,7 +6916,9 @@
             <a:off x="8554093" y="4109495"/>
             <a:ext cx="70268" cy="290603"/>
           </a:xfrm>
-          <a:prstGeom prst="rect"/>
+          <a:prstGeom prst="rect">
+            <a:avLst/>
+          </a:prstGeom>
           <a:noFill/>
         </p:spPr>
         <p:style>
@@ -6389,9 +6945,8 @@
             <a:defPPr/>
           </a:lstStyle>
           <a:p>
-            <a:pPr/>
-            <a:r>
-              <a:rPr lang="en-US" sz="2196" dirty="1">
+            <a:r>
+              <a:rPr lang="en-US" sz="2196">
                 <a:solidFill>
                   <a:srgbClr val="000000"/>
                 </a:solidFill>
@@ -6413,7 +6968,9 @@
             <a:off x="2453524" y="4409723"/>
             <a:ext cx="2183745" cy="290603"/>
           </a:xfrm>
-          <a:prstGeom prst="rect"/>
+          <a:prstGeom prst="rect">
+            <a:avLst/>
+          </a:prstGeom>
           <a:noFill/>
         </p:spPr>
         <p:style>
@@ -6440,9 +6997,8 @@
             <a:defPPr/>
           </a:lstStyle>
           <a:p>
-            <a:pPr/>
-            <a:r>
-              <a:rPr lang="en-US" sz="2196" dirty="1">
+            <a:r>
+              <a:rPr lang="en-US" sz="2196">
                 <a:solidFill>
                   <a:srgbClr val="000000"/>
                 </a:solidFill>
@@ -6464,7 +7020,9 @@
             <a:off x="4693803" y="4409723"/>
             <a:ext cx="613344" cy="290603"/>
           </a:xfrm>
-          <a:prstGeom prst="rect"/>
+          <a:prstGeom prst="rect">
+            <a:avLst/>
+          </a:prstGeom>
           <a:noFill/>
         </p:spPr>
         <p:style>
@@ -6491,9 +7049,8 @@
             <a:defPPr/>
           </a:lstStyle>
           <a:p>
-            <a:pPr/>
-            <a:r>
-              <a:rPr lang="en-US" sz="2196" dirty="1">
+            <a:r>
+              <a:rPr lang="en-US" sz="2196">
                 <a:solidFill>
                   <a:srgbClr val="000000"/>
                 </a:solidFill>
@@ -6515,7 +7072,9 @@
             <a:off x="5368935" y="4409723"/>
             <a:ext cx="2024553" cy="290603"/>
           </a:xfrm>
-          <a:prstGeom prst="rect"/>
+          <a:prstGeom prst="rect">
+            <a:avLst/>
+          </a:prstGeom>
           <a:noFill/>
         </p:spPr>
         <p:style>
@@ -6542,9 +7101,8 @@
             <a:defPPr/>
           </a:lstStyle>
           <a:p>
-            <a:pPr/>
-            <a:r>
-              <a:rPr lang="en-US" sz="2196" dirty="1">
+            <a:r>
+              <a:rPr lang="en-US" sz="2196">
                 <a:solidFill>
                   <a:srgbClr val="000000"/>
                 </a:solidFill>
@@ -6566,7 +7124,9 @@
             <a:off x="2453525" y="4709952"/>
             <a:ext cx="1840033" cy="290603"/>
           </a:xfrm>
-          <a:prstGeom prst="rect"/>
+          <a:prstGeom prst="rect">
+            <a:avLst/>
+          </a:prstGeom>
           <a:noFill/>
         </p:spPr>
         <p:style>
@@ -6593,9 +7153,8 @@
             <a:defPPr/>
           </a:lstStyle>
           <a:p>
-            <a:pPr/>
-            <a:r>
-              <a:rPr lang="en-US" sz="2196" dirty="1">
+            <a:r>
+              <a:rPr lang="en-US" sz="2196">
                 <a:solidFill>
                   <a:srgbClr val="000000"/>
                 </a:solidFill>
@@ -6617,7 +7176,9 @@
             <a:off x="4289944" y="4709952"/>
             <a:ext cx="70268" cy="290603"/>
           </a:xfrm>
-          <a:prstGeom prst="rect"/>
+          <a:prstGeom prst="rect">
+            <a:avLst/>
+          </a:prstGeom>
           <a:noFill/>
         </p:spPr>
         <p:style>
@@ -6644,9 +7205,8 @@
             <a:defPPr/>
           </a:lstStyle>
           <a:p>
-            <a:pPr/>
-            <a:r>
-              <a:rPr lang="en-US" sz="2196" dirty="1">
+            <a:r>
+              <a:rPr lang="en-US" sz="2196">
                 <a:solidFill>
                   <a:srgbClr val="000000"/>
                 </a:solidFill>
@@ -6668,7 +7228,9 @@
             <a:off x="2497720" y="5217387"/>
             <a:ext cx="66223" cy="114336"/>
           </a:xfrm>
-          <a:prstGeom prst="rect"/>
+          <a:prstGeom prst="rect">
+            <a:avLst/>
+          </a:prstGeom>
           <a:noFill/>
         </p:spPr>
         <p:style>
@@ -6695,9 +7257,8 @@
             <a:defPPr/>
           </a:lstStyle>
           <a:p>
-            <a:pPr/>
-            <a:r>
-              <a:rPr lang="en-US" sz="864" dirty="1">
+            <a:r>
+              <a:rPr lang="en-US" sz="864">
                 <a:solidFill>
                   <a:srgbClr val="000000"/>
                 </a:solidFill>
@@ -6719,7 +7280,9 @@
             <a:off x="2755276" y="5118454"/>
             <a:ext cx="1684121" cy="255667"/>
           </a:xfrm>
-          <a:prstGeom prst="rect"/>
+          <a:prstGeom prst="rect">
+            <a:avLst/>
+          </a:prstGeom>
           <a:noFill/>
         </p:spPr>
         <p:style>
@@ -6746,9 +7309,8 @@
             <a:defPPr/>
           </a:lstStyle>
           <a:p>
-            <a:pPr/>
-            <a:r>
-              <a:rPr lang="en-US" sz="1932" dirty="1">
+            <a:r>
+              <a:rPr lang="en-US" sz="1932">
                 <a:solidFill>
                   <a:srgbClr val="000000"/>
                 </a:solidFill>
@@ -6761,12 +7323,15 @@
       </p:sp>
     </p:spTree>
   </p:cSld>
+  <p:clrMapOvr>
+    <a:masterClrMapping/>
+  </p:clrMapOvr>
 </p:sld>
 </file>
 
 <file path=ppt/slides/slide6.xml><?xml version="1.0" encoding="utf-8"?>
 <p:sld xmlns:a="http://schemas.openxmlformats.org/drawingml/2006/main" xmlns:r="http://schemas.openxmlformats.org/officeDocument/2006/relationships" xmlns:p="http://schemas.openxmlformats.org/presentationml/2006/main">
-  <p:cSld name="">
+  <p:cSld>
     <p:spTree>
       <p:nvGrpSpPr>
         <p:cNvPr id="1" name=""/>
@@ -6792,7 +7357,9 @@
             <a:off x="1405" y="771144"/>
             <a:ext cx="10692384" cy="6013704"/>
           </a:xfrm>
-          <a:prstGeom prst="rect"/>
+          <a:prstGeom prst="rect">
+            <a:avLst/>
+          </a:prstGeom>
           <a:solidFill>
             <a:srgbClr val="FFFFFF"/>
           </a:solidFill>
@@ -6822,7 +7389,6 @@
             <a:defPPr/>
           </a:lstStyle>
           <a:p>
-            <a:pPr/>
             <a:endParaRPr lang="en-US"/>
           </a:p>
         </p:txBody>
@@ -6838,7 +7404,9 @@
             <a:off x="1889638" y="4567428"/>
             <a:ext cx="3457956" cy="338328"/>
           </a:xfrm>
-          <a:prstGeom prst="rect"/>
+          <a:prstGeom prst="rect">
+            <a:avLst/>
+          </a:prstGeom>
           <a:solidFill>
             <a:srgbClr val="5A9AD5"/>
           </a:solidFill>
@@ -6868,7 +7436,6 @@
             <a:defPPr/>
           </a:lstStyle>
           <a:p>
-            <a:pPr/>
             <a:endParaRPr lang="en-US"/>
           </a:p>
         </p:txBody>
@@ -6884,7 +7451,9 @@
             <a:off x="5347594" y="4567428"/>
             <a:ext cx="3457956" cy="338328"/>
           </a:xfrm>
-          <a:prstGeom prst="rect"/>
+          <a:prstGeom prst="rect">
+            <a:avLst/>
+          </a:prstGeom>
           <a:solidFill>
             <a:srgbClr val="5A9AD5"/>
           </a:solidFill>
@@ -6914,7 +7483,6 @@
             <a:defPPr/>
           </a:lstStyle>
           <a:p>
-            <a:pPr/>
             <a:endParaRPr lang="en-US"/>
           </a:p>
         </p:txBody>
@@ -6930,7 +7498,9 @@
             <a:off x="1889638" y="4905756"/>
             <a:ext cx="3457956" cy="339852"/>
           </a:xfrm>
-          <a:prstGeom prst="rect"/>
+          <a:prstGeom prst="rect">
+            <a:avLst/>
+          </a:prstGeom>
           <a:solidFill>
             <a:srgbClr val="D2DEEF"/>
           </a:solidFill>
@@ -6960,7 +7530,6 @@
             <a:defPPr/>
           </a:lstStyle>
           <a:p>
-            <a:pPr/>
             <a:endParaRPr lang="en-US"/>
           </a:p>
         </p:txBody>
@@ -6976,7 +7545,9 @@
             <a:off x="5347594" y="4905756"/>
             <a:ext cx="3457956" cy="339852"/>
           </a:xfrm>
-          <a:prstGeom prst="rect"/>
+          <a:prstGeom prst="rect">
+            <a:avLst/>
+          </a:prstGeom>
           <a:solidFill>
             <a:srgbClr val="D2DEEF"/>
           </a:solidFill>
@@ -7006,7 +7577,6 @@
             <a:defPPr/>
           </a:lstStyle>
           <a:p>
-            <a:pPr/>
             <a:endParaRPr lang="en-US"/>
           </a:p>
         </p:txBody>
@@ -7022,7 +7592,9 @@
             <a:off x="1889638" y="5245608"/>
             <a:ext cx="3457956" cy="339852"/>
           </a:xfrm>
-          <a:prstGeom prst="rect"/>
+          <a:prstGeom prst="rect">
+            <a:avLst/>
+          </a:prstGeom>
           <a:solidFill>
             <a:srgbClr val="EAEFF7"/>
           </a:solidFill>
@@ -7052,7 +7624,6 @@
             <a:defPPr/>
           </a:lstStyle>
           <a:p>
-            <a:pPr/>
             <a:endParaRPr lang="en-US"/>
           </a:p>
         </p:txBody>
@@ -7068,7 +7639,9 @@
             <a:off x="5347594" y="5245608"/>
             <a:ext cx="3457956" cy="339852"/>
           </a:xfrm>
-          <a:prstGeom prst="rect"/>
+          <a:prstGeom prst="rect">
+            <a:avLst/>
+          </a:prstGeom>
           <a:solidFill>
             <a:srgbClr val="EAEFF7"/>
           </a:solidFill>
@@ -7098,7 +7671,6 @@
             <a:defPPr/>
           </a:lstStyle>
           <a:p>
-            <a:pPr/>
             <a:endParaRPr lang="en-US"/>
           </a:p>
         </p:txBody>
@@ -7114,7 +7686,9 @@
             <a:off x="1889638" y="5585460"/>
             <a:ext cx="3457956" cy="339852"/>
           </a:xfrm>
-          <a:prstGeom prst="rect"/>
+          <a:prstGeom prst="rect">
+            <a:avLst/>
+          </a:prstGeom>
           <a:solidFill>
             <a:srgbClr val="D2DEEF"/>
           </a:solidFill>
@@ -7144,7 +7718,6 @@
             <a:defPPr/>
           </a:lstStyle>
           <a:p>
-            <a:pPr/>
             <a:endParaRPr lang="en-US"/>
           </a:p>
         </p:txBody>
@@ -7160,7 +7733,9 @@
             <a:off x="5347594" y="5585460"/>
             <a:ext cx="3457956" cy="339852"/>
           </a:xfrm>
-          <a:prstGeom prst="rect"/>
+          <a:prstGeom prst="rect">
+            <a:avLst/>
+          </a:prstGeom>
           <a:solidFill>
             <a:srgbClr val="D2DEEF"/>
           </a:solidFill>
@@ -7190,7 +7765,6 @@
             <a:defPPr/>
           </a:lstStyle>
           <a:p>
-            <a:pPr/>
             <a:endParaRPr lang="en-US"/>
           </a:p>
         </p:txBody>
@@ -7206,7 +7780,9 @@
             <a:off x="1889638" y="5925312"/>
             <a:ext cx="3457956" cy="338328"/>
           </a:xfrm>
-          <a:prstGeom prst="rect"/>
+          <a:prstGeom prst="rect">
+            <a:avLst/>
+          </a:prstGeom>
           <a:solidFill>
             <a:srgbClr val="EAEFF7"/>
           </a:solidFill>
@@ -7236,7 +7812,6 @@
             <a:defPPr/>
           </a:lstStyle>
           <a:p>
-            <a:pPr/>
             <a:endParaRPr lang="en-US"/>
           </a:p>
         </p:txBody>
@@ -7252,7 +7827,9 @@
             <a:off x="5347594" y="5925312"/>
             <a:ext cx="3457956" cy="338328"/>
           </a:xfrm>
-          <a:prstGeom prst="rect"/>
+          <a:prstGeom prst="rect">
+            <a:avLst/>
+          </a:prstGeom>
           <a:solidFill>
             <a:srgbClr val="EAEFF7"/>
           </a:solidFill>
@@ -7282,7 +7859,6 @@
             <a:defPPr/>
           </a:lstStyle>
           <a:p>
-            <a:pPr/>
             <a:endParaRPr lang="en-US"/>
           </a:p>
         </p:txBody>
@@ -7298,7 +7874,9 @@
             <a:off x="5347594" y="4561332"/>
             <a:ext cx="0" cy="1708404"/>
           </a:xfrm>
-          <a:prstGeom prst="line"/>
+          <a:prstGeom prst="line">
+            <a:avLst/>
+          </a:prstGeom>
           <a:ln w="10103">
             <a:solidFill>
               <a:srgbClr val="FFFFFF"/>
@@ -7325,7 +7903,6 @@
             <a:defPPr/>
           </a:lstStyle>
           <a:p>
-            <a:pPr/>
             <a:endParaRPr lang="en-US"/>
           </a:p>
         </p:txBody>
@@ -7341,7 +7918,9 @@
             <a:off x="1885066" y="4905756"/>
             <a:ext cx="6926580" cy="0"/>
           </a:xfrm>
-          <a:prstGeom prst="line"/>
+          <a:prstGeom prst="line">
+            <a:avLst/>
+          </a:prstGeom>
           <a:ln w="30310">
             <a:solidFill>
               <a:srgbClr val="FFFFFF"/>
@@ -7368,7 +7947,6 @@
             <a:defPPr/>
           </a:lstStyle>
           <a:p>
-            <a:pPr/>
             <a:endParaRPr lang="en-US"/>
           </a:p>
         </p:txBody>
@@ -7384,7 +7962,9 @@
             <a:off x="1885066" y="5245608"/>
             <a:ext cx="6926580" cy="0"/>
           </a:xfrm>
-          <a:prstGeom prst="line"/>
+          <a:prstGeom prst="line">
+            <a:avLst/>
+          </a:prstGeom>
           <a:ln w="10103">
             <a:solidFill>
               <a:srgbClr val="FFFFFF"/>
@@ -7411,7 +7991,6 @@
             <a:defPPr/>
           </a:lstStyle>
           <a:p>
-            <a:pPr/>
             <a:endParaRPr lang="en-US"/>
           </a:p>
         </p:txBody>
@@ -7427,7 +8006,9 @@
             <a:off x="1885066" y="5585460"/>
             <a:ext cx="6926580" cy="0"/>
           </a:xfrm>
-          <a:prstGeom prst="line"/>
+          <a:prstGeom prst="line">
+            <a:avLst/>
+          </a:prstGeom>
           <a:ln w="10103">
             <a:solidFill>
               <a:srgbClr val="FFFFFF"/>
@@ -7454,7 +8035,6 @@
             <a:defPPr/>
           </a:lstStyle>
           <a:p>
-            <a:pPr/>
             <a:endParaRPr lang="en-US"/>
           </a:p>
         </p:txBody>
@@ -7470,7 +8050,9 @@
             <a:off x="1885066" y="5925312"/>
             <a:ext cx="6926580" cy="0"/>
           </a:xfrm>
-          <a:prstGeom prst="line"/>
+          <a:prstGeom prst="line">
+            <a:avLst/>
+          </a:prstGeom>
           <a:ln w="10103">
             <a:solidFill>
               <a:srgbClr val="FFFFFF"/>
@@ -7497,7 +8079,6 @@
             <a:defPPr/>
           </a:lstStyle>
           <a:p>
-            <a:pPr/>
             <a:endParaRPr lang="en-US"/>
           </a:p>
         </p:txBody>
@@ -7513,7 +8094,9 @@
             <a:off x="1889638" y="4561332"/>
             <a:ext cx="0" cy="1708404"/>
           </a:xfrm>
-          <a:prstGeom prst="line"/>
+          <a:prstGeom prst="line">
+            <a:avLst/>
+          </a:prstGeom>
           <a:ln w="10103">
             <a:solidFill>
               <a:srgbClr val="FFFFFF"/>
@@ -7540,7 +8123,6 @@
             <a:defPPr/>
           </a:lstStyle>
           <a:p>
-            <a:pPr/>
             <a:endParaRPr lang="en-US"/>
           </a:p>
         </p:txBody>
@@ -7556,7 +8138,9 @@
             <a:off x="8805550" y="4561332"/>
             <a:ext cx="0" cy="1708404"/>
           </a:xfrm>
-          <a:prstGeom prst="line"/>
+          <a:prstGeom prst="line">
+            <a:avLst/>
+          </a:prstGeom>
           <a:ln w="10103">
             <a:solidFill>
               <a:srgbClr val="FFFFFF"/>
@@ -7583,7 +8167,6 @@
             <a:defPPr/>
           </a:lstStyle>
           <a:p>
-            <a:pPr/>
             <a:endParaRPr lang="en-US"/>
           </a:p>
         </p:txBody>
@@ -7599,7 +8182,9 @@
             <a:off x="1885066" y="4567428"/>
             <a:ext cx="6926580" cy="0"/>
           </a:xfrm>
-          <a:prstGeom prst="line"/>
+          <a:prstGeom prst="line">
+            <a:avLst/>
+          </a:prstGeom>
           <a:ln w="10103">
             <a:solidFill>
               <a:srgbClr val="FFFFFF"/>
@@ -7626,7 +8211,6 @@
             <a:defPPr/>
           </a:lstStyle>
           <a:p>
-            <a:pPr/>
             <a:endParaRPr lang="en-US"/>
           </a:p>
         </p:txBody>
@@ -7642,7 +8226,9 @@
             <a:off x="1885066" y="6263640"/>
             <a:ext cx="6926580" cy="0"/>
           </a:xfrm>
-          <a:prstGeom prst="line"/>
+          <a:prstGeom prst="line">
+            <a:avLst/>
+          </a:prstGeom>
           <a:ln w="10103">
             <a:solidFill>
               <a:srgbClr val="FFFFFF"/>
@@ -7669,7 +8255,6 @@
             <a:defPPr/>
           </a:lstStyle>
           <a:p>
-            <a:pPr/>
             <a:endParaRPr lang="en-US"/>
           </a:p>
         </p:txBody>
@@ -7685,7 +8270,9 @@
             <a:off x="1810397" y="1275793"/>
             <a:ext cx="5273167" cy="511335"/>
           </a:xfrm>
-          <a:prstGeom prst="rect"/>
+          <a:prstGeom prst="rect">
+            <a:avLst/>
+          </a:prstGeom>
           <a:noFill/>
         </p:spPr>
         <p:style>
@@ -7712,9 +8299,8 @@
             <a:defPPr/>
           </a:lstStyle>
           <a:p>
-            <a:pPr/>
-            <a:r>
-              <a:rPr lang="en-US" sz="3864" dirty="1">
+            <a:r>
+              <a:rPr lang="en-US" sz="3864">
                 <a:solidFill>
                   <a:srgbClr val="00B0F0"/>
                 </a:solidFill>
@@ -7736,7 +8322,9 @@
             <a:off x="1895741" y="2366612"/>
             <a:ext cx="84618" cy="146096"/>
           </a:xfrm>
-          <a:prstGeom prst="rect"/>
+          <a:prstGeom prst="rect">
+            <a:avLst/>
+          </a:prstGeom>
           <a:noFill/>
         </p:spPr>
         <p:style>
@@ -7763,9 +8351,8 @@
             <a:defPPr/>
           </a:lstStyle>
           <a:p>
-            <a:pPr/>
-            <a:r>
-              <a:rPr lang="en-US" sz="1104" dirty="1">
+            <a:r>
+              <a:rPr lang="en-US" sz="1104">
                 <a:solidFill>
                   <a:srgbClr val="000000"/>
                 </a:solidFill>
@@ -7787,7 +8374,9 @@
             <a:off x="2153297" y="2241002"/>
             <a:ext cx="687080" cy="325539"/>
           </a:xfrm>
-          <a:prstGeom prst="rect"/>
+          <a:prstGeom prst="rect">
+            <a:avLst/>
+          </a:prstGeom>
           <a:noFill/>
         </p:spPr>
         <p:style>
@@ -7814,9 +8403,8 @@
             <a:defPPr/>
           </a:lstStyle>
           <a:p>
-            <a:pPr/>
-            <a:r>
-              <a:rPr lang="en-US" sz="2460" dirty="1">
+            <a:r>
+              <a:rPr lang="en-US" sz="2460">
                 <a:solidFill>
                   <a:srgbClr val="000000"/>
                 </a:solidFill>
@@ -7838,7 +8426,9 @@
             <a:off x="2910724" y="2241002"/>
             <a:ext cx="2309588" cy="325539"/>
           </a:xfrm>
-          <a:prstGeom prst="rect"/>
+          <a:prstGeom prst="rect">
+            <a:avLst/>
+          </a:prstGeom>
           <a:noFill/>
         </p:spPr>
         <p:style>
@@ -7865,9 +8455,8 @@
             <a:defPPr/>
           </a:lstStyle>
           <a:p>
-            <a:pPr/>
-            <a:r>
-              <a:rPr lang="en-US" sz="2460" dirty="1">
+            <a:r>
+              <a:rPr lang="en-US" sz="2460">
                 <a:solidFill>
                   <a:srgbClr val="000000"/>
                 </a:solidFill>
@@ -7889,7 +8478,9 @@
             <a:off x="2195969" y="2798352"/>
             <a:ext cx="75420" cy="130216"/>
           </a:xfrm>
-          <a:prstGeom prst="rect"/>
+          <a:prstGeom prst="rect">
+            <a:avLst/>
+          </a:prstGeom>
           <a:noFill/>
         </p:spPr>
         <p:style>
@@ -7916,9 +8507,8 @@
             <a:defPPr/>
           </a:lstStyle>
           <a:p>
-            <a:pPr/>
-            <a:r>
-              <a:rPr lang="en-US" sz="984" dirty="1">
+            <a:r>
+              <a:rPr lang="en-US" sz="984">
                 <a:solidFill>
                   <a:srgbClr val="000000"/>
                 </a:solidFill>
@@ -7937,10 +8527,12 @@
         </p:nvSpPr>
         <p:spPr>
           <a:xfrm>
-            <a:off x="2453525" y="2686080"/>
-            <a:ext cx="6076113" cy="290603"/>
-          </a:xfrm>
-          <a:prstGeom prst="rect"/>
+            <a:off x="2453525" y="2639342"/>
+            <a:ext cx="6253443" cy="384080"/>
+          </a:xfrm>
+          <a:prstGeom prst="rect">
+            <a:avLst/>
+          </a:prstGeom>
           <a:noFill/>
         </p:spPr>
         <p:style>
@@ -7967,15 +8559,14 @@
             <a:defPPr/>
           </a:lstStyle>
           <a:p>
-            <a:pPr/>
-            <a:r>
-              <a:rPr lang="en-US" sz="2196" dirty="1">
+            <a:r>
+              <a:rPr lang="en-US" sz="2196" dirty="0">
                 <a:solidFill>
                   <a:srgbClr val="000000"/>
                 </a:solidFill>
                 <a:latin typeface="Calibri"/>
               </a:rPr>
-              <a:t>Let’s assume the user executes the greedy programas</a:t>
+              <a:t>Let’s assume the user executes the greedy program as</a:t>
             </a:r>
           </a:p>
         </p:txBody>
@@ -7991,7 +8582,9 @@
             <a:off x="2453525" y="2986308"/>
             <a:ext cx="814615" cy="290603"/>
           </a:xfrm>
-          <a:prstGeom prst="rect"/>
+          <a:prstGeom prst="rect">
+            <a:avLst/>
+          </a:prstGeom>
           <a:noFill/>
         </p:spPr>
         <p:style>
@@ -8018,9 +8611,8 @@
             <a:defPPr/>
           </a:lstStyle>
           <a:p>
-            <a:pPr/>
-            <a:r>
-              <a:rPr lang="en-US" sz="2196" dirty="1">
+            <a:r>
+              <a:rPr lang="en-US" sz="2196">
                 <a:solidFill>
                   <a:srgbClr val="000000"/>
                 </a:solidFill>
@@ -8042,7 +8634,9 @@
             <a:off x="3026548" y="4648973"/>
             <a:ext cx="489335" cy="231847"/>
           </a:xfrm>
-          <a:prstGeom prst="rect"/>
+          <a:prstGeom prst="rect">
+            <a:avLst/>
+          </a:prstGeom>
           <a:noFill/>
         </p:spPr>
         <p:style>
@@ -8069,9 +8663,8 @@
             <a:defPPr/>
           </a:lstStyle>
           <a:p>
-            <a:pPr/>
-            <a:r>
-              <a:rPr lang="en-US" sz="1752" b="1" dirty="1">
+            <a:r>
+              <a:rPr lang="en-US" sz="1752" b="1">
                 <a:solidFill>
                   <a:srgbClr val="FFFFFF"/>
                 </a:solidFill>
@@ -8093,7 +8686,9 @@
             <a:off x="3566044" y="4648973"/>
             <a:ext cx="641763" cy="231847"/>
           </a:xfrm>
-          <a:prstGeom prst="rect"/>
+          <a:prstGeom prst="rect">
+            <a:avLst/>
+          </a:prstGeom>
           <a:noFill/>
         </p:spPr>
         <p:style>
@@ -8120,9 +8715,8 @@
             <a:defPPr/>
           </a:lstStyle>
           <a:p>
-            <a:pPr/>
-            <a:r>
-              <a:rPr lang="en-US" sz="1752" b="1" dirty="1">
+            <a:r>
+              <a:rPr lang="en-US" sz="1752" b="1">
                 <a:solidFill>
                   <a:srgbClr val="FFFFFF"/>
                 </a:solidFill>
@@ -8144,7 +8738,9 @@
             <a:off x="6405256" y="4648973"/>
             <a:ext cx="489335" cy="231847"/>
           </a:xfrm>
-          <a:prstGeom prst="rect"/>
+          <a:prstGeom prst="rect">
+            <a:avLst/>
+          </a:prstGeom>
           <a:noFill/>
         </p:spPr>
         <p:style>
@@ -8171,9 +8767,8 @@
             <a:defPPr/>
           </a:lstStyle>
           <a:p>
-            <a:pPr/>
-            <a:r>
-              <a:rPr lang="en-US" sz="1752" b="1" dirty="1">
+            <a:r>
+              <a:rPr lang="en-US" sz="1752" b="1">
                 <a:solidFill>
                   <a:srgbClr val="FFFFFF"/>
                 </a:solidFill>
@@ -8195,7 +8790,9 @@
             <a:off x="6944751" y="4648973"/>
             <a:ext cx="806359" cy="231847"/>
           </a:xfrm>
-          <a:prstGeom prst="rect"/>
+          <a:prstGeom prst="rect">
+            <a:avLst/>
+          </a:prstGeom>
           <a:noFill/>
         </p:spPr>
         <p:style>
@@ -8222,9 +8819,8 @@
             <a:defPPr/>
           </a:lstStyle>
           <a:p>
-            <a:pPr/>
-            <a:r>
-              <a:rPr lang="en-US" sz="1752" b="1" dirty="1">
+            <a:r>
+              <a:rPr lang="en-US" sz="1752" b="1">
                 <a:solidFill>
                   <a:srgbClr val="FFFFFF"/>
                 </a:solidFill>
@@ -8246,7 +8842,9 @@
             <a:off x="3188092" y="4988825"/>
             <a:ext cx="856336" cy="231847"/>
           </a:xfrm>
-          <a:prstGeom prst="rect"/>
+          <a:prstGeom prst="rect">
+            <a:avLst/>
+          </a:prstGeom>
           <a:noFill/>
         </p:spPr>
         <p:style>
@@ -8273,9 +8871,8 @@
             <a:defPPr/>
           </a:lstStyle>
           <a:p>
-            <a:pPr/>
-            <a:r>
-              <a:rPr lang="en-US" sz="1752" dirty="1">
+            <a:r>
+              <a:rPr lang="en-US" sz="1752">
                 <a:solidFill>
                   <a:srgbClr val="000000"/>
                 </a:solidFill>
@@ -8297,7 +8894,9 @@
             <a:off x="6463176" y="4988825"/>
             <a:ext cx="1223337" cy="231847"/>
           </a:xfrm>
-          <a:prstGeom prst="rect"/>
+          <a:prstGeom prst="rect">
+            <a:avLst/>
+          </a:prstGeom>
           <a:noFill/>
         </p:spPr>
         <p:style>
@@ -8324,9 +8923,8 @@
             <a:defPPr/>
           </a:lstStyle>
           <a:p>
-            <a:pPr/>
-            <a:r>
-              <a:rPr lang="en-US" sz="1752" dirty="1">
+            <a:r>
+              <a:rPr lang="en-US" sz="1752">
                 <a:solidFill>
                   <a:srgbClr val="000000"/>
                 </a:solidFill>
@@ -8348,7 +8946,9 @@
             <a:off x="3188092" y="5328677"/>
             <a:ext cx="856336" cy="231847"/>
           </a:xfrm>
-          <a:prstGeom prst="rect"/>
+          <a:prstGeom prst="rect">
+            <a:avLst/>
+          </a:prstGeom>
           <a:noFill/>
         </p:spPr>
         <p:style>
@@ -8375,9 +8975,8 @@
             <a:defPPr/>
           </a:lstStyle>
           <a:p>
-            <a:pPr/>
-            <a:r>
-              <a:rPr lang="en-US" sz="1752" dirty="1">
+            <a:r>
+              <a:rPr lang="en-US" sz="1752">
                 <a:solidFill>
                   <a:srgbClr val="000000"/>
                 </a:solidFill>
@@ -8399,7 +8998,9 @@
             <a:off x="3188092" y="5667004"/>
             <a:ext cx="856336" cy="231847"/>
           </a:xfrm>
-          <a:prstGeom prst="rect"/>
+          <a:prstGeom prst="rect">
+            <a:avLst/>
+          </a:prstGeom>
           <a:noFill/>
         </p:spPr>
         <p:style>
@@ -8426,9 +9027,8 @@
             <a:defPPr/>
           </a:lstStyle>
           <a:p>
-            <a:pPr/>
-            <a:r>
-              <a:rPr lang="en-US" sz="1752" dirty="1">
+            <a:r>
+              <a:rPr lang="en-US" sz="1752">
                 <a:solidFill>
                   <a:srgbClr val="000000"/>
                 </a:solidFill>
@@ -8450,7 +9050,9 @@
             <a:off x="3188092" y="6006857"/>
             <a:ext cx="856336" cy="231847"/>
           </a:xfrm>
-          <a:prstGeom prst="rect"/>
+          <a:prstGeom prst="rect">
+            <a:avLst/>
+          </a:prstGeom>
           <a:noFill/>
         </p:spPr>
         <p:style>
@@ -8477,9 +9079,8 @@
             <a:defPPr/>
           </a:lstStyle>
           <a:p>
-            <a:pPr/>
-            <a:r>
-              <a:rPr lang="en-US" sz="1752" dirty="1">
+            <a:r>
+              <a:rPr lang="en-US" sz="1752">
                 <a:solidFill>
                   <a:srgbClr val="000000"/>
                 </a:solidFill>
@@ -8501,7 +9102,9 @@
             <a:off x="3919612" y="3600194"/>
             <a:ext cx="2805296" cy="295367"/>
           </a:xfrm>
-          <a:prstGeom prst="rect"/>
+          <a:prstGeom prst="rect">
+            <a:avLst/>
+          </a:prstGeom>
           <a:noFill/>
         </p:spPr>
         <p:style>
@@ -8528,9 +9131,8 @@
             <a:defPPr/>
           </a:lstStyle>
           <a:p>
-            <a:pPr/>
-            <a:r>
-              <a:rPr lang="en-US" sz="2232" dirty="1">
+            <a:r>
+              <a:rPr lang="en-US" sz="2232">
                 <a:solidFill>
                   <a:srgbClr val="000000"/>
                 </a:solidFill>
@@ -8543,12 +9145,15 @@
       </p:sp>
     </p:spTree>
   </p:cSld>
+  <p:clrMapOvr>
+    <a:masterClrMapping/>
+  </p:clrMapOvr>
 </p:sld>
 </file>
 
 <file path=ppt/slides/slide7.xml><?xml version="1.0" encoding="utf-8"?>
 <p:sld xmlns:a="http://schemas.openxmlformats.org/drawingml/2006/main" xmlns:r="http://schemas.openxmlformats.org/officeDocument/2006/relationships" xmlns:p="http://schemas.openxmlformats.org/presentationml/2006/main">
-  <p:cSld name="">
+  <p:cSld>
     <p:spTree>
       <p:nvGrpSpPr>
         <p:cNvPr id="1" name=""/>
@@ -8574,7 +9179,9 @@
             <a:off x="1405" y="771144"/>
             <a:ext cx="10692384" cy="6013704"/>
           </a:xfrm>
-          <a:prstGeom prst="rect"/>
+          <a:prstGeom prst="rect">
+            <a:avLst/>
+          </a:prstGeom>
           <a:solidFill>
             <a:srgbClr val="FFFFFF"/>
           </a:solidFill>
@@ -8604,7 +9211,6 @@
             <a:defPPr/>
           </a:lstStyle>
           <a:p>
-            <a:pPr/>
             <a:endParaRPr lang="en-US"/>
           </a:p>
         </p:txBody>
@@ -8620,7 +9226,9 @@
             <a:off x="1889638" y="4567428"/>
             <a:ext cx="3457956" cy="338328"/>
           </a:xfrm>
-          <a:prstGeom prst="rect"/>
+          <a:prstGeom prst="rect">
+            <a:avLst/>
+          </a:prstGeom>
           <a:solidFill>
             <a:srgbClr val="5A9AD5"/>
           </a:solidFill>
@@ -8650,7 +9258,6 @@
             <a:defPPr/>
           </a:lstStyle>
           <a:p>
-            <a:pPr/>
             <a:endParaRPr lang="en-US"/>
           </a:p>
         </p:txBody>
@@ -8666,7 +9273,9 @@
             <a:off x="5347594" y="4567428"/>
             <a:ext cx="3457956" cy="338328"/>
           </a:xfrm>
-          <a:prstGeom prst="rect"/>
+          <a:prstGeom prst="rect">
+            <a:avLst/>
+          </a:prstGeom>
           <a:solidFill>
             <a:srgbClr val="5A9AD5"/>
           </a:solidFill>
@@ -8696,7 +9305,6 @@
             <a:defPPr/>
           </a:lstStyle>
           <a:p>
-            <a:pPr/>
             <a:endParaRPr lang="en-US"/>
           </a:p>
         </p:txBody>
@@ -8712,7 +9320,9 @@
             <a:off x="1889638" y="4905756"/>
             <a:ext cx="3457956" cy="339852"/>
           </a:xfrm>
-          <a:prstGeom prst="rect"/>
+          <a:prstGeom prst="rect">
+            <a:avLst/>
+          </a:prstGeom>
           <a:solidFill>
             <a:srgbClr val="D2DEEF"/>
           </a:solidFill>
@@ -8742,7 +9352,6 @@
             <a:defPPr/>
           </a:lstStyle>
           <a:p>
-            <a:pPr/>
             <a:endParaRPr lang="en-US"/>
           </a:p>
         </p:txBody>
@@ -8758,7 +9367,9 @@
             <a:off x="5347594" y="4905756"/>
             <a:ext cx="3457956" cy="339852"/>
           </a:xfrm>
-          <a:prstGeom prst="rect"/>
+          <a:prstGeom prst="rect">
+            <a:avLst/>
+          </a:prstGeom>
           <a:solidFill>
             <a:srgbClr val="D2DEEF"/>
           </a:solidFill>
@@ -8788,7 +9399,6 @@
             <a:defPPr/>
           </a:lstStyle>
           <a:p>
-            <a:pPr/>
             <a:endParaRPr lang="en-US"/>
           </a:p>
         </p:txBody>
@@ -8804,7 +9414,9 @@
             <a:off x="1889638" y="5245608"/>
             <a:ext cx="3457956" cy="339852"/>
           </a:xfrm>
-          <a:prstGeom prst="rect"/>
+          <a:prstGeom prst="rect">
+            <a:avLst/>
+          </a:prstGeom>
           <a:solidFill>
             <a:srgbClr val="EAEFF7"/>
           </a:solidFill>
@@ -8834,7 +9446,6 @@
             <a:defPPr/>
           </a:lstStyle>
           <a:p>
-            <a:pPr/>
             <a:endParaRPr lang="en-US"/>
           </a:p>
         </p:txBody>
@@ -8850,7 +9461,9 @@
             <a:off x="5347594" y="5245608"/>
             <a:ext cx="3457956" cy="339852"/>
           </a:xfrm>
-          <a:prstGeom prst="rect"/>
+          <a:prstGeom prst="rect">
+            <a:avLst/>
+          </a:prstGeom>
           <a:solidFill>
             <a:srgbClr val="EAEFF7"/>
           </a:solidFill>
@@ -8880,7 +9493,6 @@
             <a:defPPr/>
           </a:lstStyle>
           <a:p>
-            <a:pPr/>
             <a:endParaRPr lang="en-US"/>
           </a:p>
         </p:txBody>
@@ -8896,7 +9508,9 @@
             <a:off x="1889638" y="5585460"/>
             <a:ext cx="3457956" cy="339852"/>
           </a:xfrm>
-          <a:prstGeom prst="rect"/>
+          <a:prstGeom prst="rect">
+            <a:avLst/>
+          </a:prstGeom>
           <a:solidFill>
             <a:srgbClr val="D2DEEF"/>
           </a:solidFill>
@@ -8926,7 +9540,6 @@
             <a:defPPr/>
           </a:lstStyle>
           <a:p>
-            <a:pPr/>
             <a:endParaRPr lang="en-US"/>
           </a:p>
         </p:txBody>
@@ -8942,7 +9555,9 @@
             <a:off x="5347594" y="5585460"/>
             <a:ext cx="3457956" cy="339852"/>
           </a:xfrm>
-          <a:prstGeom prst="rect"/>
+          <a:prstGeom prst="rect">
+            <a:avLst/>
+          </a:prstGeom>
           <a:solidFill>
             <a:srgbClr val="D2DEEF"/>
           </a:solidFill>
@@ -8972,7 +9587,6 @@
             <a:defPPr/>
           </a:lstStyle>
           <a:p>
-            <a:pPr/>
             <a:endParaRPr lang="en-US"/>
           </a:p>
         </p:txBody>
@@ -8988,7 +9602,9 @@
             <a:off x="1889638" y="5925312"/>
             <a:ext cx="3457956" cy="338328"/>
           </a:xfrm>
-          <a:prstGeom prst="rect"/>
+          <a:prstGeom prst="rect">
+            <a:avLst/>
+          </a:prstGeom>
           <a:solidFill>
             <a:srgbClr val="EAEFF7"/>
           </a:solidFill>
@@ -9018,7 +9634,6 @@
             <a:defPPr/>
           </a:lstStyle>
           <a:p>
-            <a:pPr/>
             <a:endParaRPr lang="en-US"/>
           </a:p>
         </p:txBody>
@@ -9034,7 +9649,9 @@
             <a:off x="5347594" y="5925312"/>
             <a:ext cx="3457956" cy="338328"/>
           </a:xfrm>
-          <a:prstGeom prst="rect"/>
+          <a:prstGeom prst="rect">
+            <a:avLst/>
+          </a:prstGeom>
           <a:solidFill>
             <a:srgbClr val="EAEFF7"/>
           </a:solidFill>
@@ -9064,7 +9681,6 @@
             <a:defPPr/>
           </a:lstStyle>
           <a:p>
-            <a:pPr/>
             <a:endParaRPr lang="en-US"/>
           </a:p>
         </p:txBody>
@@ -9080,7 +9696,9 @@
             <a:off x="5347594" y="4561332"/>
             <a:ext cx="0" cy="1708404"/>
           </a:xfrm>
-          <a:prstGeom prst="line"/>
+          <a:prstGeom prst="line">
+            <a:avLst/>
+          </a:prstGeom>
           <a:ln w="10103">
             <a:solidFill>
               <a:srgbClr val="FFFFFF"/>
@@ -9107,7 +9725,6 @@
             <a:defPPr/>
           </a:lstStyle>
           <a:p>
-            <a:pPr/>
             <a:endParaRPr lang="en-US"/>
           </a:p>
         </p:txBody>
@@ -9123,7 +9740,9 @@
             <a:off x="1885066" y="4905756"/>
             <a:ext cx="6926580" cy="0"/>
           </a:xfrm>
-          <a:prstGeom prst="line"/>
+          <a:prstGeom prst="line">
+            <a:avLst/>
+          </a:prstGeom>
           <a:ln w="30310">
             <a:solidFill>
               <a:srgbClr val="FFFFFF"/>
@@ -9150,7 +9769,6 @@
             <a:defPPr/>
           </a:lstStyle>
           <a:p>
-            <a:pPr/>
             <a:endParaRPr lang="en-US"/>
           </a:p>
         </p:txBody>
@@ -9166,7 +9784,9 @@
             <a:off x="1885066" y="5245608"/>
             <a:ext cx="6926580" cy="0"/>
           </a:xfrm>
-          <a:prstGeom prst="line"/>
+          <a:prstGeom prst="line">
+            <a:avLst/>
+          </a:prstGeom>
           <a:ln w="10103">
             <a:solidFill>
               <a:srgbClr val="FFFFFF"/>
@@ -9193,7 +9813,6 @@
             <a:defPPr/>
           </a:lstStyle>
           <a:p>
-            <a:pPr/>
             <a:endParaRPr lang="en-US"/>
           </a:p>
         </p:txBody>
@@ -9209,7 +9828,9 @@
             <a:off x="1885066" y="5585460"/>
             <a:ext cx="6926580" cy="0"/>
           </a:xfrm>
-          <a:prstGeom prst="line"/>
+          <a:prstGeom prst="line">
+            <a:avLst/>
+          </a:prstGeom>
           <a:ln w="10103">
             <a:solidFill>
               <a:srgbClr val="FFFFFF"/>
@@ -9236,7 +9857,6 @@
             <a:defPPr/>
           </a:lstStyle>
           <a:p>
-            <a:pPr/>
             <a:endParaRPr lang="en-US"/>
           </a:p>
         </p:txBody>
@@ -9252,7 +9872,9 @@
             <a:off x="1885066" y="5925312"/>
             <a:ext cx="6926580" cy="0"/>
           </a:xfrm>
-          <a:prstGeom prst="line"/>
+          <a:prstGeom prst="line">
+            <a:avLst/>
+          </a:prstGeom>
           <a:ln w="10103">
             <a:solidFill>
               <a:srgbClr val="FFFFFF"/>
@@ -9279,7 +9901,6 @@
             <a:defPPr/>
           </a:lstStyle>
           <a:p>
-            <a:pPr/>
             <a:endParaRPr lang="en-US"/>
           </a:p>
         </p:txBody>
@@ -9295,7 +9916,9 @@
             <a:off x="1889638" y="4561332"/>
             <a:ext cx="0" cy="1708404"/>
           </a:xfrm>
-          <a:prstGeom prst="line"/>
+          <a:prstGeom prst="line">
+            <a:avLst/>
+          </a:prstGeom>
           <a:ln w="10103">
             <a:solidFill>
               <a:srgbClr val="FFFFFF"/>
@@ -9322,7 +9945,6 @@
             <a:defPPr/>
           </a:lstStyle>
           <a:p>
-            <a:pPr/>
             <a:endParaRPr lang="en-US"/>
           </a:p>
         </p:txBody>
@@ -9338,7 +9960,9 @@
             <a:off x="8805550" y="4561332"/>
             <a:ext cx="0" cy="1708404"/>
           </a:xfrm>
-          <a:prstGeom prst="line"/>
+          <a:prstGeom prst="line">
+            <a:avLst/>
+          </a:prstGeom>
           <a:ln w="10103">
             <a:solidFill>
               <a:srgbClr val="FFFFFF"/>
@@ -9365,7 +9989,6 @@
             <a:defPPr/>
           </a:lstStyle>
           <a:p>
-            <a:pPr/>
             <a:endParaRPr lang="en-US"/>
           </a:p>
         </p:txBody>
@@ -9381,7 +10004,9 @@
             <a:off x="1885066" y="4567428"/>
             <a:ext cx="6926580" cy="0"/>
           </a:xfrm>
-          <a:prstGeom prst="line"/>
+          <a:prstGeom prst="line">
+            <a:avLst/>
+          </a:prstGeom>
           <a:ln w="10103">
             <a:solidFill>
               <a:srgbClr val="FFFFFF"/>
@@ -9408,7 +10033,6 @@
             <a:defPPr/>
           </a:lstStyle>
           <a:p>
-            <a:pPr/>
             <a:endParaRPr lang="en-US"/>
           </a:p>
         </p:txBody>
@@ -9424,7 +10048,9 @@
             <a:off x="1885066" y="6263640"/>
             <a:ext cx="6926580" cy="0"/>
           </a:xfrm>
-          <a:prstGeom prst="line"/>
+          <a:prstGeom prst="line">
+            <a:avLst/>
+          </a:prstGeom>
           <a:ln w="10103">
             <a:solidFill>
               <a:srgbClr val="FFFFFF"/>
@@ -9451,7 +10077,6 @@
             <a:defPPr/>
           </a:lstStyle>
           <a:p>
-            <a:pPr/>
             <a:endParaRPr lang="en-US"/>
           </a:p>
         </p:txBody>
@@ -9467,7 +10092,9 @@
             <a:off x="1810397" y="1275793"/>
             <a:ext cx="5273167" cy="511335"/>
           </a:xfrm>
-          <a:prstGeom prst="rect"/>
+          <a:prstGeom prst="rect">
+            <a:avLst/>
+          </a:prstGeom>
           <a:noFill/>
         </p:spPr>
         <p:style>
@@ -9494,9 +10121,8 @@
             <a:defPPr/>
           </a:lstStyle>
           <a:p>
-            <a:pPr/>
-            <a:r>
-              <a:rPr lang="en-US" sz="3864" dirty="1">
+            <a:r>
+              <a:rPr lang="en-US" sz="3864">
                 <a:solidFill>
                   <a:srgbClr val="00B0F0"/>
                 </a:solidFill>
@@ -9518,7 +10144,9 @@
             <a:off x="1895741" y="2366612"/>
             <a:ext cx="84618" cy="146096"/>
           </a:xfrm>
-          <a:prstGeom prst="rect"/>
+          <a:prstGeom prst="rect">
+            <a:avLst/>
+          </a:prstGeom>
           <a:noFill/>
         </p:spPr>
         <p:style>
@@ -9545,9 +10173,8 @@
             <a:defPPr/>
           </a:lstStyle>
           <a:p>
-            <a:pPr/>
-            <a:r>
-              <a:rPr lang="en-US" sz="1104" dirty="1">
+            <a:r>
+              <a:rPr lang="en-US" sz="1104">
                 <a:solidFill>
                   <a:srgbClr val="000000"/>
                 </a:solidFill>
@@ -9569,7 +10196,9 @@
             <a:off x="2153297" y="2241002"/>
             <a:ext cx="687080" cy="325539"/>
           </a:xfrm>
-          <a:prstGeom prst="rect"/>
+          <a:prstGeom prst="rect">
+            <a:avLst/>
+          </a:prstGeom>
           <a:noFill/>
         </p:spPr>
         <p:style>
@@ -9596,9 +10225,8 @@
             <a:defPPr/>
           </a:lstStyle>
           <a:p>
-            <a:pPr/>
-            <a:r>
-              <a:rPr lang="en-US" sz="2460" dirty="1">
+            <a:r>
+              <a:rPr lang="en-US" sz="2460">
                 <a:solidFill>
                   <a:srgbClr val="000000"/>
                 </a:solidFill>
@@ -9620,7 +10248,9 @@
             <a:off x="2910724" y="2241002"/>
             <a:ext cx="2309588" cy="325539"/>
           </a:xfrm>
-          <a:prstGeom prst="rect"/>
+          <a:prstGeom prst="rect">
+            <a:avLst/>
+          </a:prstGeom>
           <a:noFill/>
         </p:spPr>
         <p:style>
@@ -9647,9 +10277,8 @@
             <a:defPPr/>
           </a:lstStyle>
           <a:p>
-            <a:pPr/>
-            <a:r>
-              <a:rPr lang="en-US" sz="2460" dirty="1">
+            <a:r>
+              <a:rPr lang="en-US" sz="2460">
                 <a:solidFill>
                   <a:srgbClr val="000000"/>
                 </a:solidFill>
@@ -9671,7 +10300,9 @@
             <a:off x="2195969" y="2798352"/>
             <a:ext cx="75420" cy="130216"/>
           </a:xfrm>
-          <a:prstGeom prst="rect"/>
+          <a:prstGeom prst="rect">
+            <a:avLst/>
+          </a:prstGeom>
           <a:noFill/>
         </p:spPr>
         <p:style>
@@ -9698,9 +10329,8 @@
             <a:defPPr/>
           </a:lstStyle>
           <a:p>
-            <a:pPr/>
-            <a:r>
-              <a:rPr lang="en-US" sz="984" dirty="1">
+            <a:r>
+              <a:rPr lang="en-US" sz="984">
                 <a:solidFill>
                   <a:srgbClr val="000000"/>
                 </a:solidFill>
@@ -9719,10 +10349,12 @@
         </p:nvSpPr>
         <p:spPr>
           <a:xfrm>
-            <a:off x="2453525" y="2686080"/>
-            <a:ext cx="6076113" cy="290603"/>
-          </a:xfrm>
-          <a:prstGeom prst="rect"/>
+            <a:off x="2453525" y="2639342"/>
+            <a:ext cx="6253443" cy="384080"/>
+          </a:xfrm>
+          <a:prstGeom prst="rect">
+            <a:avLst/>
+          </a:prstGeom>
           <a:noFill/>
         </p:spPr>
         <p:style>
@@ -9749,15 +10381,14 @@
             <a:defPPr/>
           </a:lstStyle>
           <a:p>
-            <a:pPr/>
-            <a:r>
-              <a:rPr lang="en-US" sz="2196" dirty="1">
+            <a:r>
+              <a:rPr lang="en-US" sz="2196" dirty="0">
                 <a:solidFill>
                   <a:srgbClr val="000000"/>
                 </a:solidFill>
                 <a:latin typeface="Calibri"/>
               </a:rPr>
-              <a:t>Let’s assume the user executes the greedy programas</a:t>
+              <a:t>Let’s assume the user executes the greedy program as</a:t>
             </a:r>
           </a:p>
         </p:txBody>
@@ -9773,7 +10404,9 @@
             <a:off x="2453525" y="2986308"/>
             <a:ext cx="814615" cy="290603"/>
           </a:xfrm>
-          <a:prstGeom prst="rect"/>
+          <a:prstGeom prst="rect">
+            <a:avLst/>
+          </a:prstGeom>
           <a:noFill/>
         </p:spPr>
         <p:style>
@@ -9800,9 +10433,8 @@
             <a:defPPr/>
           </a:lstStyle>
           <a:p>
-            <a:pPr/>
-            <a:r>
-              <a:rPr lang="en-US" sz="2196" dirty="1">
+            <a:r>
+              <a:rPr lang="en-US" sz="2196">
                 <a:solidFill>
                   <a:srgbClr val="000000"/>
                 </a:solidFill>
@@ -9824,7 +10456,9 @@
             <a:off x="3026548" y="4648973"/>
             <a:ext cx="489335" cy="231847"/>
           </a:xfrm>
-          <a:prstGeom prst="rect"/>
+          <a:prstGeom prst="rect">
+            <a:avLst/>
+          </a:prstGeom>
           <a:noFill/>
         </p:spPr>
         <p:style>
@@ -9851,9 +10485,8 @@
             <a:defPPr/>
           </a:lstStyle>
           <a:p>
-            <a:pPr/>
-            <a:r>
-              <a:rPr lang="en-US" sz="1752" b="1" dirty="1">
+            <a:r>
+              <a:rPr lang="en-US" sz="1752" b="1">
                 <a:solidFill>
                   <a:srgbClr val="FFFFFF"/>
                 </a:solidFill>
@@ -9875,7 +10508,9 @@
             <a:off x="3566044" y="4648973"/>
             <a:ext cx="641763" cy="231847"/>
           </a:xfrm>
-          <a:prstGeom prst="rect"/>
+          <a:prstGeom prst="rect">
+            <a:avLst/>
+          </a:prstGeom>
           <a:noFill/>
         </p:spPr>
         <p:style>
@@ -9902,9 +10537,8 @@
             <a:defPPr/>
           </a:lstStyle>
           <a:p>
-            <a:pPr/>
-            <a:r>
-              <a:rPr lang="en-US" sz="1752" b="1" dirty="1">
+            <a:r>
+              <a:rPr lang="en-US" sz="1752" b="1">
                 <a:solidFill>
                   <a:srgbClr val="FFFFFF"/>
                 </a:solidFill>
@@ -9926,7 +10560,9 @@
             <a:off x="6405256" y="4648973"/>
             <a:ext cx="489335" cy="231847"/>
           </a:xfrm>
-          <a:prstGeom prst="rect"/>
+          <a:prstGeom prst="rect">
+            <a:avLst/>
+          </a:prstGeom>
           <a:noFill/>
         </p:spPr>
         <p:style>
@@ -9953,9 +10589,8 @@
             <a:defPPr/>
           </a:lstStyle>
           <a:p>
-            <a:pPr/>
-            <a:r>
-              <a:rPr lang="en-US" sz="1752" b="1" dirty="1">
+            <a:r>
+              <a:rPr lang="en-US" sz="1752" b="1">
                 <a:solidFill>
                   <a:srgbClr val="FFFFFF"/>
                 </a:solidFill>
@@ -9977,7 +10612,9 @@
             <a:off x="6944751" y="4648973"/>
             <a:ext cx="806359" cy="231847"/>
           </a:xfrm>
-          <a:prstGeom prst="rect"/>
+          <a:prstGeom prst="rect">
+            <a:avLst/>
+          </a:prstGeom>
           <a:noFill/>
         </p:spPr>
         <p:style>
@@ -10004,9 +10641,8 @@
             <a:defPPr/>
           </a:lstStyle>
           <a:p>
-            <a:pPr/>
-            <a:r>
-              <a:rPr lang="en-US" sz="1752" b="1" dirty="1">
+            <a:r>
+              <a:rPr lang="en-US" sz="1752" b="1">
                 <a:solidFill>
                   <a:srgbClr val="FFFFFF"/>
                 </a:solidFill>
@@ -10028,7 +10664,9 @@
             <a:off x="3188092" y="4988825"/>
             <a:ext cx="856336" cy="231847"/>
           </a:xfrm>
-          <a:prstGeom prst="rect"/>
+          <a:prstGeom prst="rect">
+            <a:avLst/>
+          </a:prstGeom>
           <a:noFill/>
         </p:spPr>
         <p:style>
@@ -10055,9 +10693,8 @@
             <a:defPPr/>
           </a:lstStyle>
           <a:p>
-            <a:pPr/>
-            <a:r>
-              <a:rPr lang="en-US" sz="1752" dirty="1">
+            <a:r>
+              <a:rPr lang="en-US" sz="1752">
                 <a:solidFill>
                   <a:srgbClr val="000000"/>
                 </a:solidFill>
@@ -10079,7 +10716,9 @@
             <a:off x="6463176" y="4988825"/>
             <a:ext cx="1223337" cy="231847"/>
           </a:xfrm>
-          <a:prstGeom prst="rect"/>
+          <a:prstGeom prst="rect">
+            <a:avLst/>
+          </a:prstGeom>
           <a:noFill/>
         </p:spPr>
         <p:style>
@@ -10106,9 +10745,8 @@
             <a:defPPr/>
           </a:lstStyle>
           <a:p>
-            <a:pPr/>
-            <a:r>
-              <a:rPr lang="en-US" sz="1752" dirty="1">
+            <a:r>
+              <a:rPr lang="en-US" sz="1752">
                 <a:solidFill>
                   <a:srgbClr val="000000"/>
                 </a:solidFill>
@@ -10130,7 +10768,9 @@
             <a:off x="3188092" y="5328677"/>
             <a:ext cx="856336" cy="231847"/>
           </a:xfrm>
-          <a:prstGeom prst="rect"/>
+          <a:prstGeom prst="rect">
+            <a:avLst/>
+          </a:prstGeom>
           <a:noFill/>
         </p:spPr>
         <p:style>
@@ -10157,9 +10797,8 @@
             <a:defPPr/>
           </a:lstStyle>
           <a:p>
-            <a:pPr/>
-            <a:r>
-              <a:rPr lang="en-US" sz="1752" dirty="1">
+            <a:r>
+              <a:rPr lang="en-US" sz="1752">
                 <a:solidFill>
                   <a:srgbClr val="000000"/>
                 </a:solidFill>
@@ -10181,7 +10820,9 @@
             <a:off x="6706996" y="5328677"/>
             <a:ext cx="734002" cy="231847"/>
           </a:xfrm>
-          <a:prstGeom prst="rect"/>
+          <a:prstGeom prst="rect">
+            <a:avLst/>
+          </a:prstGeom>
           <a:noFill/>
         </p:spPr>
         <p:style>
@@ -10208,9 +10849,8 @@
             <a:defPPr/>
           </a:lstStyle>
           <a:p>
-            <a:pPr/>
-            <a:r>
-              <a:rPr lang="en-US" sz="1752" dirty="1">
+            <a:r>
+              <a:rPr lang="en-US" sz="1752">
                 <a:solidFill>
                   <a:srgbClr val="000000"/>
                 </a:solidFill>
@@ -10232,7 +10872,9 @@
             <a:off x="3188092" y="5667004"/>
             <a:ext cx="856336" cy="231847"/>
           </a:xfrm>
-          <a:prstGeom prst="rect"/>
+          <a:prstGeom prst="rect">
+            <a:avLst/>
+          </a:prstGeom>
           <a:noFill/>
         </p:spPr>
         <p:style>
@@ -10259,9 +10901,8 @@
             <a:defPPr/>
           </a:lstStyle>
           <a:p>
-            <a:pPr/>
-            <a:r>
-              <a:rPr lang="en-US" sz="1752" dirty="1">
+            <a:r>
+              <a:rPr lang="en-US" sz="1752">
                 <a:solidFill>
                   <a:srgbClr val="000000"/>
                 </a:solidFill>
@@ -10283,7 +10924,9 @@
             <a:off x="3188092" y="6006857"/>
             <a:ext cx="856336" cy="231847"/>
           </a:xfrm>
-          <a:prstGeom prst="rect"/>
+          <a:prstGeom prst="rect">
+            <a:avLst/>
+          </a:prstGeom>
           <a:noFill/>
         </p:spPr>
         <p:style>
@@ -10310,9 +10953,8 @@
             <a:defPPr/>
           </a:lstStyle>
           <a:p>
-            <a:pPr/>
-            <a:r>
-              <a:rPr lang="en-US" sz="1752" dirty="1">
+            <a:r>
+              <a:rPr lang="en-US" sz="1752">
                 <a:solidFill>
                   <a:srgbClr val="000000"/>
                 </a:solidFill>
@@ -10334,7 +10976,9 @@
             <a:off x="3919612" y="3600194"/>
             <a:ext cx="2805296" cy="295367"/>
           </a:xfrm>
-          <a:prstGeom prst="rect"/>
+          <a:prstGeom prst="rect">
+            <a:avLst/>
+          </a:prstGeom>
           <a:noFill/>
         </p:spPr>
         <p:style>
@@ -10361,9 +11005,8 @@
             <a:defPPr/>
           </a:lstStyle>
           <a:p>
-            <a:pPr/>
-            <a:r>
-              <a:rPr lang="en-US" sz="2232" dirty="1">
+            <a:r>
+              <a:rPr lang="en-US" sz="2232">
                 <a:solidFill>
                   <a:srgbClr val="000000"/>
                 </a:solidFill>
@@ -10376,12 +11019,15 @@
       </p:sp>
     </p:spTree>
   </p:cSld>
+  <p:clrMapOvr>
+    <a:masterClrMapping/>
+  </p:clrMapOvr>
 </p:sld>
 </file>
 
 <file path=ppt/slides/slide8.xml><?xml version="1.0" encoding="utf-8"?>
 <p:sld xmlns:a="http://schemas.openxmlformats.org/drawingml/2006/main" xmlns:r="http://schemas.openxmlformats.org/officeDocument/2006/relationships" xmlns:p="http://schemas.openxmlformats.org/presentationml/2006/main">
-  <p:cSld name="">
+  <p:cSld>
     <p:spTree>
       <p:nvGrpSpPr>
         <p:cNvPr id="1" name=""/>
@@ -10407,7 +11053,9 @@
             <a:off x="1405" y="771144"/>
             <a:ext cx="10692384" cy="6013704"/>
           </a:xfrm>
-          <a:prstGeom prst="rect"/>
+          <a:prstGeom prst="rect">
+            <a:avLst/>
+          </a:prstGeom>
           <a:solidFill>
             <a:srgbClr val="FFFFFF"/>
           </a:solidFill>
@@ -10437,7 +11085,6 @@
             <a:defPPr/>
           </a:lstStyle>
           <a:p>
-            <a:pPr/>
             <a:endParaRPr lang="en-US"/>
           </a:p>
         </p:txBody>
@@ -10453,7 +11100,9 @@
             <a:off x="1889638" y="4567428"/>
             <a:ext cx="3457956" cy="338328"/>
           </a:xfrm>
-          <a:prstGeom prst="rect"/>
+          <a:prstGeom prst="rect">
+            <a:avLst/>
+          </a:prstGeom>
           <a:solidFill>
             <a:srgbClr val="5A9AD5"/>
           </a:solidFill>
@@ -10483,7 +11132,6 @@
             <a:defPPr/>
           </a:lstStyle>
           <a:p>
-            <a:pPr/>
             <a:endParaRPr lang="en-US"/>
           </a:p>
         </p:txBody>
@@ -10499,7 +11147,9 @@
             <a:off x="5347594" y="4567428"/>
             <a:ext cx="3457956" cy="338328"/>
           </a:xfrm>
-          <a:prstGeom prst="rect"/>
+          <a:prstGeom prst="rect">
+            <a:avLst/>
+          </a:prstGeom>
           <a:solidFill>
             <a:srgbClr val="5A9AD5"/>
           </a:solidFill>
@@ -10529,7 +11179,6 @@
             <a:defPPr/>
           </a:lstStyle>
           <a:p>
-            <a:pPr/>
             <a:endParaRPr lang="en-US"/>
           </a:p>
         </p:txBody>
@@ -10545,7 +11194,9 @@
             <a:off x="1889638" y="4905756"/>
             <a:ext cx="3457956" cy="339852"/>
           </a:xfrm>
-          <a:prstGeom prst="rect"/>
+          <a:prstGeom prst="rect">
+            <a:avLst/>
+          </a:prstGeom>
           <a:solidFill>
             <a:srgbClr val="D2DEEF"/>
           </a:solidFill>
@@ -10575,7 +11226,6 @@
             <a:defPPr/>
           </a:lstStyle>
           <a:p>
-            <a:pPr/>
             <a:endParaRPr lang="en-US"/>
           </a:p>
         </p:txBody>
@@ -10591,7 +11241,9 @@
             <a:off x="5347594" y="4905756"/>
             <a:ext cx="3457956" cy="339852"/>
           </a:xfrm>
-          <a:prstGeom prst="rect"/>
+          <a:prstGeom prst="rect">
+            <a:avLst/>
+          </a:prstGeom>
           <a:solidFill>
             <a:srgbClr val="D2DEEF"/>
           </a:solidFill>
@@ -10621,7 +11273,6 @@
             <a:defPPr/>
           </a:lstStyle>
           <a:p>
-            <a:pPr/>
             <a:endParaRPr lang="en-US"/>
           </a:p>
         </p:txBody>
@@ -10637,7 +11288,9 @@
             <a:off x="1889638" y="5245608"/>
             <a:ext cx="3457956" cy="339852"/>
           </a:xfrm>
-          <a:prstGeom prst="rect"/>
+          <a:prstGeom prst="rect">
+            <a:avLst/>
+          </a:prstGeom>
           <a:solidFill>
             <a:srgbClr val="EAEFF7"/>
           </a:solidFill>
@@ -10667,7 +11320,6 @@
             <a:defPPr/>
           </a:lstStyle>
           <a:p>
-            <a:pPr/>
             <a:endParaRPr lang="en-US"/>
           </a:p>
         </p:txBody>
@@ -10683,7 +11335,9 @@
             <a:off x="5347594" y="5245608"/>
             <a:ext cx="3457956" cy="339852"/>
           </a:xfrm>
-          <a:prstGeom prst="rect"/>
+          <a:prstGeom prst="rect">
+            <a:avLst/>
+          </a:prstGeom>
           <a:solidFill>
             <a:srgbClr val="EAEFF7"/>
           </a:solidFill>
@@ -10713,7 +11367,6 @@
             <a:defPPr/>
           </a:lstStyle>
           <a:p>
-            <a:pPr/>
             <a:endParaRPr lang="en-US"/>
           </a:p>
         </p:txBody>
@@ -10729,7 +11382,9 @@
             <a:off x="1889638" y="5585460"/>
             <a:ext cx="3457956" cy="339852"/>
           </a:xfrm>
-          <a:prstGeom prst="rect"/>
+          <a:prstGeom prst="rect">
+            <a:avLst/>
+          </a:prstGeom>
           <a:solidFill>
             <a:srgbClr val="D2DEEF"/>
           </a:solidFill>
@@ -10759,7 +11414,6 @@
             <a:defPPr/>
           </a:lstStyle>
           <a:p>
-            <a:pPr/>
             <a:endParaRPr lang="en-US"/>
           </a:p>
         </p:txBody>
@@ -10775,7 +11429,9 @@
             <a:off x="5347594" y="5585460"/>
             <a:ext cx="3457956" cy="339852"/>
           </a:xfrm>
-          <a:prstGeom prst="rect"/>
+          <a:prstGeom prst="rect">
+            <a:avLst/>
+          </a:prstGeom>
           <a:solidFill>
             <a:srgbClr val="D2DEEF"/>
           </a:solidFill>
@@ -10805,7 +11461,6 @@
             <a:defPPr/>
           </a:lstStyle>
           <a:p>
-            <a:pPr/>
             <a:endParaRPr lang="en-US"/>
           </a:p>
         </p:txBody>
@@ -10821,7 +11476,9 @@
             <a:off x="1889638" y="5925312"/>
             <a:ext cx="3457956" cy="338328"/>
           </a:xfrm>
-          <a:prstGeom prst="rect"/>
+          <a:prstGeom prst="rect">
+            <a:avLst/>
+          </a:prstGeom>
           <a:solidFill>
             <a:srgbClr val="EAEFF7"/>
           </a:solidFill>
@@ -10851,7 +11508,6 @@
             <a:defPPr/>
           </a:lstStyle>
           <a:p>
-            <a:pPr/>
             <a:endParaRPr lang="en-US"/>
           </a:p>
         </p:txBody>
@@ -10867,7 +11523,9 @@
             <a:off x="5347594" y="5925312"/>
             <a:ext cx="3457956" cy="338328"/>
           </a:xfrm>
-          <a:prstGeom prst="rect"/>
+          <a:prstGeom prst="rect">
+            <a:avLst/>
+          </a:prstGeom>
           <a:solidFill>
             <a:srgbClr val="EAEFF7"/>
           </a:solidFill>
@@ -10897,7 +11555,6 @@
             <a:defPPr/>
           </a:lstStyle>
           <a:p>
-            <a:pPr/>
             <a:endParaRPr lang="en-US"/>
           </a:p>
         </p:txBody>
@@ -10913,7 +11570,9 @@
             <a:off x="5347594" y="4561332"/>
             <a:ext cx="0" cy="1708404"/>
           </a:xfrm>
-          <a:prstGeom prst="line"/>
+          <a:prstGeom prst="line">
+            <a:avLst/>
+          </a:prstGeom>
           <a:ln w="10103">
             <a:solidFill>
               <a:srgbClr val="FFFFFF"/>
@@ -10940,7 +11599,6 @@
             <a:defPPr/>
           </a:lstStyle>
           <a:p>
-            <a:pPr/>
             <a:endParaRPr lang="en-US"/>
           </a:p>
         </p:txBody>
@@ -10956,7 +11614,9 @@
             <a:off x="1885066" y="4905756"/>
             <a:ext cx="6926580" cy="0"/>
           </a:xfrm>
-          <a:prstGeom prst="line"/>
+          <a:prstGeom prst="line">
+            <a:avLst/>
+          </a:prstGeom>
           <a:ln w="30310">
             <a:solidFill>
               <a:srgbClr val="FFFFFF"/>
@@ -10983,7 +11643,6 @@
             <a:defPPr/>
           </a:lstStyle>
           <a:p>
-            <a:pPr/>
             <a:endParaRPr lang="en-US"/>
           </a:p>
         </p:txBody>
@@ -10999,7 +11658,9 @@
             <a:off x="1885066" y="5245608"/>
             <a:ext cx="6926580" cy="0"/>
           </a:xfrm>
-          <a:prstGeom prst="line"/>
+          <a:prstGeom prst="line">
+            <a:avLst/>
+          </a:prstGeom>
           <a:ln w="10103">
             <a:solidFill>
               <a:srgbClr val="FFFFFF"/>
@@ -11026,7 +11687,6 @@
             <a:defPPr/>
           </a:lstStyle>
           <a:p>
-            <a:pPr/>
             <a:endParaRPr lang="en-US"/>
           </a:p>
         </p:txBody>
@@ -11042,7 +11702,9 @@
             <a:off x="1885066" y="5585460"/>
             <a:ext cx="6926580" cy="0"/>
           </a:xfrm>
-          <a:prstGeom prst="line"/>
+          <a:prstGeom prst="line">
+            <a:avLst/>
+          </a:prstGeom>
           <a:ln w="10103">
             <a:solidFill>
               <a:srgbClr val="FFFFFF"/>
@@ -11069,7 +11731,6 @@
             <a:defPPr/>
           </a:lstStyle>
           <a:p>
-            <a:pPr/>
             <a:endParaRPr lang="en-US"/>
           </a:p>
         </p:txBody>
@@ -11085,7 +11746,9 @@
             <a:off x="1885066" y="5925312"/>
             <a:ext cx="6926580" cy="0"/>
           </a:xfrm>
-          <a:prstGeom prst="line"/>
+          <a:prstGeom prst="line">
+            <a:avLst/>
+          </a:prstGeom>
           <a:ln w="10103">
             <a:solidFill>
               <a:srgbClr val="FFFFFF"/>
@@ -11112,7 +11775,6 @@
             <a:defPPr/>
           </a:lstStyle>
           <a:p>
-            <a:pPr/>
             <a:endParaRPr lang="en-US"/>
           </a:p>
         </p:txBody>
@@ -11128,7 +11790,9 @@
             <a:off x="1889638" y="4561332"/>
             <a:ext cx="0" cy="1708404"/>
           </a:xfrm>
-          <a:prstGeom prst="line"/>
+          <a:prstGeom prst="line">
+            <a:avLst/>
+          </a:prstGeom>
           <a:ln w="10103">
             <a:solidFill>
               <a:srgbClr val="FFFFFF"/>
@@ -11155,7 +11819,6 @@
             <a:defPPr/>
           </a:lstStyle>
           <a:p>
-            <a:pPr/>
             <a:endParaRPr lang="en-US"/>
           </a:p>
         </p:txBody>
@@ -11171,7 +11834,9 @@
             <a:off x="8805550" y="4561332"/>
             <a:ext cx="0" cy="1708404"/>
           </a:xfrm>
-          <a:prstGeom prst="line"/>
+          <a:prstGeom prst="line">
+            <a:avLst/>
+          </a:prstGeom>
           <a:ln w="10103">
             <a:solidFill>
               <a:srgbClr val="FFFFFF"/>
@@ -11198,7 +11863,6 @@
             <a:defPPr/>
           </a:lstStyle>
           <a:p>
-            <a:pPr/>
             <a:endParaRPr lang="en-US"/>
           </a:p>
         </p:txBody>
@@ -11214,7 +11878,9 @@
             <a:off x="1885066" y="4567428"/>
             <a:ext cx="6926580" cy="0"/>
           </a:xfrm>
-          <a:prstGeom prst="line"/>
+          <a:prstGeom prst="line">
+            <a:avLst/>
+          </a:prstGeom>
           <a:ln w="10103">
             <a:solidFill>
               <a:srgbClr val="FFFFFF"/>
@@ -11241,7 +11907,6 @@
             <a:defPPr/>
           </a:lstStyle>
           <a:p>
-            <a:pPr/>
             <a:endParaRPr lang="en-US"/>
           </a:p>
         </p:txBody>
@@ -11257,7 +11922,9 @@
             <a:off x="1885066" y="6263640"/>
             <a:ext cx="6926580" cy="0"/>
           </a:xfrm>
-          <a:prstGeom prst="line"/>
+          <a:prstGeom prst="line">
+            <a:avLst/>
+          </a:prstGeom>
           <a:ln w="10103">
             <a:solidFill>
               <a:srgbClr val="FFFFFF"/>
@@ -11284,7 +11951,6 @@
             <a:defPPr/>
           </a:lstStyle>
           <a:p>
-            <a:pPr/>
             <a:endParaRPr lang="en-US"/>
           </a:p>
         </p:txBody>
@@ -11300,7 +11966,9 @@
             <a:off x="1810397" y="1275793"/>
             <a:ext cx="5273167" cy="511335"/>
           </a:xfrm>
-          <a:prstGeom prst="rect"/>
+          <a:prstGeom prst="rect">
+            <a:avLst/>
+          </a:prstGeom>
           <a:noFill/>
         </p:spPr>
         <p:style>
@@ -11327,9 +11995,8 @@
             <a:defPPr/>
           </a:lstStyle>
           <a:p>
-            <a:pPr/>
-            <a:r>
-              <a:rPr lang="en-US" sz="3864" dirty="1">
+            <a:r>
+              <a:rPr lang="en-US" sz="3864">
                 <a:solidFill>
                   <a:srgbClr val="00B0F0"/>
                 </a:solidFill>
@@ -11351,7 +12018,9 @@
             <a:off x="1895741" y="2366612"/>
             <a:ext cx="84618" cy="146096"/>
           </a:xfrm>
-          <a:prstGeom prst="rect"/>
+          <a:prstGeom prst="rect">
+            <a:avLst/>
+          </a:prstGeom>
           <a:noFill/>
         </p:spPr>
         <p:style>
@@ -11378,9 +12047,8 @@
             <a:defPPr/>
           </a:lstStyle>
           <a:p>
-            <a:pPr/>
-            <a:r>
-              <a:rPr lang="en-US" sz="1104" dirty="1">
+            <a:r>
+              <a:rPr lang="en-US" sz="1104">
                 <a:solidFill>
                   <a:srgbClr val="000000"/>
                 </a:solidFill>
@@ -11402,7 +12070,9 @@
             <a:off x="2153297" y="2241002"/>
             <a:ext cx="687080" cy="325539"/>
           </a:xfrm>
-          <a:prstGeom prst="rect"/>
+          <a:prstGeom prst="rect">
+            <a:avLst/>
+          </a:prstGeom>
           <a:noFill/>
         </p:spPr>
         <p:style>
@@ -11429,9 +12099,8 @@
             <a:defPPr/>
           </a:lstStyle>
           <a:p>
-            <a:pPr/>
-            <a:r>
-              <a:rPr lang="en-US" sz="2460" dirty="1">
+            <a:r>
+              <a:rPr lang="en-US" sz="2460">
                 <a:solidFill>
                   <a:srgbClr val="000000"/>
                 </a:solidFill>
@@ -11453,7 +12122,9 @@
             <a:off x="2910724" y="2241002"/>
             <a:ext cx="2309588" cy="325539"/>
           </a:xfrm>
-          <a:prstGeom prst="rect"/>
+          <a:prstGeom prst="rect">
+            <a:avLst/>
+          </a:prstGeom>
           <a:noFill/>
         </p:spPr>
         <p:style>
@@ -11480,9 +12151,8 @@
             <a:defPPr/>
           </a:lstStyle>
           <a:p>
-            <a:pPr/>
-            <a:r>
-              <a:rPr lang="en-US" sz="2460" dirty="1">
+            <a:r>
+              <a:rPr lang="en-US" sz="2460">
                 <a:solidFill>
                   <a:srgbClr val="000000"/>
                 </a:solidFill>
@@ -11504,7 +12174,9 @@
             <a:off x="2195969" y="2798352"/>
             <a:ext cx="75420" cy="130216"/>
           </a:xfrm>
-          <a:prstGeom prst="rect"/>
+          <a:prstGeom prst="rect">
+            <a:avLst/>
+          </a:prstGeom>
           <a:noFill/>
         </p:spPr>
         <p:style>
@@ -11531,9 +12203,8 @@
             <a:defPPr/>
           </a:lstStyle>
           <a:p>
-            <a:pPr/>
-            <a:r>
-              <a:rPr lang="en-US" sz="984" dirty="1">
+            <a:r>
+              <a:rPr lang="en-US" sz="984">
                 <a:solidFill>
                   <a:srgbClr val="000000"/>
                 </a:solidFill>
@@ -11552,10 +12223,12 @@
         </p:nvSpPr>
         <p:spPr>
           <a:xfrm>
-            <a:off x="2453525" y="2686080"/>
-            <a:ext cx="6076113" cy="290603"/>
-          </a:xfrm>
-          <a:prstGeom prst="rect"/>
+            <a:off x="2453525" y="2639342"/>
+            <a:ext cx="6253443" cy="384080"/>
+          </a:xfrm>
+          <a:prstGeom prst="rect">
+            <a:avLst/>
+          </a:prstGeom>
           <a:noFill/>
         </p:spPr>
         <p:style>
@@ -11582,15 +12255,14 @@
             <a:defPPr/>
           </a:lstStyle>
           <a:p>
-            <a:pPr/>
-            <a:r>
-              <a:rPr lang="en-US" sz="2196" dirty="1">
+            <a:r>
+              <a:rPr lang="en-US" sz="2196" dirty="0">
                 <a:solidFill>
                   <a:srgbClr val="000000"/>
                 </a:solidFill>
                 <a:latin typeface="Calibri"/>
               </a:rPr>
-              <a:t>Let’s assume the user executes the greedy programas</a:t>
+              <a:t>Let’s assume the user executes the greedy program as</a:t>
             </a:r>
           </a:p>
         </p:txBody>
@@ -11606,7 +12278,9 @@
             <a:off x="2453525" y="2986308"/>
             <a:ext cx="814615" cy="290603"/>
           </a:xfrm>
-          <a:prstGeom prst="rect"/>
+          <a:prstGeom prst="rect">
+            <a:avLst/>
+          </a:prstGeom>
           <a:noFill/>
         </p:spPr>
         <p:style>
@@ -11633,9 +12307,8 @@
             <a:defPPr/>
           </a:lstStyle>
           <a:p>
-            <a:pPr/>
-            <a:r>
-              <a:rPr lang="en-US" sz="2196" dirty="1">
+            <a:r>
+              <a:rPr lang="en-US" sz="2196">
                 <a:solidFill>
                   <a:srgbClr val="000000"/>
                 </a:solidFill>
@@ -11657,7 +12330,9 @@
             <a:off x="3026548" y="4648973"/>
             <a:ext cx="489335" cy="231847"/>
           </a:xfrm>
-          <a:prstGeom prst="rect"/>
+          <a:prstGeom prst="rect">
+            <a:avLst/>
+          </a:prstGeom>
           <a:noFill/>
         </p:spPr>
         <p:style>
@@ -11684,9 +12359,8 @@
             <a:defPPr/>
           </a:lstStyle>
           <a:p>
-            <a:pPr/>
-            <a:r>
-              <a:rPr lang="en-US" sz="1752" b="1" dirty="1">
+            <a:r>
+              <a:rPr lang="en-US" sz="1752" b="1">
                 <a:solidFill>
                   <a:srgbClr val="FFFFFF"/>
                 </a:solidFill>
@@ -11708,7 +12382,9 @@
             <a:off x="3566044" y="4648973"/>
             <a:ext cx="641763" cy="231847"/>
           </a:xfrm>
-          <a:prstGeom prst="rect"/>
+          <a:prstGeom prst="rect">
+            <a:avLst/>
+          </a:prstGeom>
           <a:noFill/>
         </p:spPr>
         <p:style>
@@ -11735,9 +12411,8 @@
             <a:defPPr/>
           </a:lstStyle>
           <a:p>
-            <a:pPr/>
-            <a:r>
-              <a:rPr lang="en-US" sz="1752" b="1" dirty="1">
+            <a:r>
+              <a:rPr lang="en-US" sz="1752" b="1">
                 <a:solidFill>
                   <a:srgbClr val="FFFFFF"/>
                 </a:solidFill>
@@ -11759,7 +12434,9 @@
             <a:off x="6405256" y="4648973"/>
             <a:ext cx="489335" cy="231847"/>
           </a:xfrm>
-          <a:prstGeom prst="rect"/>
+          <a:prstGeom prst="rect">
+            <a:avLst/>
+          </a:prstGeom>
           <a:noFill/>
         </p:spPr>
         <p:style>
@@ -11786,9 +12463,8 @@
             <a:defPPr/>
           </a:lstStyle>
           <a:p>
-            <a:pPr/>
-            <a:r>
-              <a:rPr lang="en-US" sz="1752" b="1" dirty="1">
+            <a:r>
+              <a:rPr lang="en-US" sz="1752" b="1">
                 <a:solidFill>
                   <a:srgbClr val="FFFFFF"/>
                 </a:solidFill>
@@ -11810,7 +12486,9 @@
             <a:off x="6944751" y="4648973"/>
             <a:ext cx="806359" cy="231847"/>
           </a:xfrm>
-          <a:prstGeom prst="rect"/>
+          <a:prstGeom prst="rect">
+            <a:avLst/>
+          </a:prstGeom>
           <a:noFill/>
         </p:spPr>
         <p:style>
@@ -11837,9 +12515,8 @@
             <a:defPPr/>
           </a:lstStyle>
           <a:p>
-            <a:pPr/>
-            <a:r>
-              <a:rPr lang="en-US" sz="1752" b="1" dirty="1">
+            <a:r>
+              <a:rPr lang="en-US" sz="1752" b="1">
                 <a:solidFill>
                   <a:srgbClr val="FFFFFF"/>
                 </a:solidFill>
@@ -11861,7 +12538,9 @@
             <a:off x="3188092" y="4988825"/>
             <a:ext cx="856336" cy="231847"/>
           </a:xfrm>
-          <a:prstGeom prst="rect"/>
+          <a:prstGeom prst="rect">
+            <a:avLst/>
+          </a:prstGeom>
           <a:noFill/>
         </p:spPr>
         <p:style>
@@ -11888,9 +12567,8 @@
             <a:defPPr/>
           </a:lstStyle>
           <a:p>
-            <a:pPr/>
-            <a:r>
-              <a:rPr lang="en-US" sz="1752" dirty="1">
+            <a:r>
+              <a:rPr lang="en-US" sz="1752">
                 <a:solidFill>
                   <a:srgbClr val="000000"/>
                 </a:solidFill>
@@ -11912,7 +12590,9 @@
             <a:off x="6463176" y="4988825"/>
             <a:ext cx="1223337" cy="231847"/>
           </a:xfrm>
-          <a:prstGeom prst="rect"/>
+          <a:prstGeom prst="rect">
+            <a:avLst/>
+          </a:prstGeom>
           <a:noFill/>
         </p:spPr>
         <p:style>
@@ -11939,9 +12619,8 @@
             <a:defPPr/>
           </a:lstStyle>
           <a:p>
-            <a:pPr/>
-            <a:r>
-              <a:rPr lang="en-US" sz="1752" dirty="1">
+            <a:r>
+              <a:rPr lang="en-US" sz="1752">
                 <a:solidFill>
                   <a:srgbClr val="000000"/>
                 </a:solidFill>
@@ -11963,7 +12642,9 @@
             <a:off x="3188092" y="5328677"/>
             <a:ext cx="856336" cy="231847"/>
           </a:xfrm>
-          <a:prstGeom prst="rect"/>
+          <a:prstGeom prst="rect">
+            <a:avLst/>
+          </a:prstGeom>
           <a:noFill/>
         </p:spPr>
         <p:style>
@@ -11990,9 +12671,8 @@
             <a:defPPr/>
           </a:lstStyle>
           <a:p>
-            <a:pPr/>
-            <a:r>
-              <a:rPr lang="en-US" sz="1752" dirty="1">
+            <a:r>
+              <a:rPr lang="en-US" sz="1752">
                 <a:solidFill>
                   <a:srgbClr val="000000"/>
                 </a:solidFill>
@@ -12014,7 +12694,9 @@
             <a:off x="6706996" y="5328677"/>
             <a:ext cx="734002" cy="231847"/>
           </a:xfrm>
-          <a:prstGeom prst="rect"/>
+          <a:prstGeom prst="rect">
+            <a:avLst/>
+          </a:prstGeom>
           <a:noFill/>
         </p:spPr>
         <p:style>
@@ -12041,9 +12723,8 @@
             <a:defPPr/>
           </a:lstStyle>
           <a:p>
-            <a:pPr/>
-            <a:r>
-              <a:rPr lang="en-US" sz="1752" dirty="1">
+            <a:r>
+              <a:rPr lang="en-US" sz="1752">
                 <a:solidFill>
                   <a:srgbClr val="000000"/>
                 </a:solidFill>
@@ -12065,7 +12746,9 @@
             <a:off x="3188092" y="5667004"/>
             <a:ext cx="856336" cy="231847"/>
           </a:xfrm>
-          <a:prstGeom prst="rect"/>
+          <a:prstGeom prst="rect">
+            <a:avLst/>
+          </a:prstGeom>
           <a:noFill/>
         </p:spPr>
         <p:style>
@@ -12092,9 +12775,8 @@
             <a:defPPr/>
           </a:lstStyle>
           <a:p>
-            <a:pPr/>
-            <a:r>
-              <a:rPr lang="en-US" sz="1752" dirty="1">
+            <a:r>
+              <a:rPr lang="en-US" sz="1752">
                 <a:solidFill>
                   <a:srgbClr val="000000"/>
                 </a:solidFill>
@@ -12116,7 +12798,9 @@
             <a:off x="6706996" y="5667004"/>
             <a:ext cx="734002" cy="231847"/>
           </a:xfrm>
-          <a:prstGeom prst="rect"/>
+          <a:prstGeom prst="rect">
+            <a:avLst/>
+          </a:prstGeom>
           <a:noFill/>
         </p:spPr>
         <p:style>
@@ -12143,9 +12827,8 @@
             <a:defPPr/>
           </a:lstStyle>
           <a:p>
-            <a:pPr/>
-            <a:r>
-              <a:rPr lang="en-US" sz="1752" dirty="1">
+            <a:r>
+              <a:rPr lang="en-US" sz="1752">
                 <a:solidFill>
                   <a:srgbClr val="000000"/>
                 </a:solidFill>
@@ -12167,7 +12850,9 @@
             <a:off x="3188092" y="6006857"/>
             <a:ext cx="856336" cy="231847"/>
           </a:xfrm>
-          <a:prstGeom prst="rect"/>
+          <a:prstGeom prst="rect">
+            <a:avLst/>
+          </a:prstGeom>
           <a:noFill/>
         </p:spPr>
         <p:style>
@@ -12194,9 +12879,8 @@
             <a:defPPr/>
           </a:lstStyle>
           <a:p>
-            <a:pPr/>
-            <a:r>
-              <a:rPr lang="en-US" sz="1752" dirty="1">
+            <a:r>
+              <a:rPr lang="en-US" sz="1752">
                 <a:solidFill>
                   <a:srgbClr val="000000"/>
                 </a:solidFill>
@@ -12218,7 +12902,9 @@
             <a:off x="3919612" y="3600194"/>
             <a:ext cx="2805296" cy="295367"/>
           </a:xfrm>
-          <a:prstGeom prst="rect"/>
+          <a:prstGeom prst="rect">
+            <a:avLst/>
+          </a:prstGeom>
           <a:noFill/>
         </p:spPr>
         <p:style>
@@ -12245,9 +12931,8 @@
             <a:defPPr/>
           </a:lstStyle>
           <a:p>
-            <a:pPr/>
-            <a:r>
-              <a:rPr lang="en-US" sz="2232" dirty="1">
+            <a:r>
+              <a:rPr lang="en-US" sz="2232">
                 <a:solidFill>
                   <a:srgbClr val="000000"/>
                 </a:solidFill>
@@ -12260,12 +12945,15 @@
       </p:sp>
     </p:spTree>
   </p:cSld>
+  <p:clrMapOvr>
+    <a:masterClrMapping/>
+  </p:clrMapOvr>
 </p:sld>
 </file>
 
 <file path=ppt/slides/slide9.xml><?xml version="1.0" encoding="utf-8"?>
 <p:sld xmlns:a="http://schemas.openxmlformats.org/drawingml/2006/main" xmlns:r="http://schemas.openxmlformats.org/officeDocument/2006/relationships" xmlns:p="http://schemas.openxmlformats.org/presentationml/2006/main">
-  <p:cSld name="">
+  <p:cSld>
     <p:spTree>
       <p:nvGrpSpPr>
         <p:cNvPr id="1" name=""/>
@@ -12291,7 +12979,9 @@
             <a:off x="1405" y="771144"/>
             <a:ext cx="10692384" cy="6013704"/>
           </a:xfrm>
-          <a:prstGeom prst="rect"/>
+          <a:prstGeom prst="rect">
+            <a:avLst/>
+          </a:prstGeom>
           <a:solidFill>
             <a:srgbClr val="FFFFFF"/>
           </a:solidFill>
@@ -12321,7 +13011,6 @@
             <a:defPPr/>
           </a:lstStyle>
           <a:p>
-            <a:pPr/>
             <a:endParaRPr lang="en-US"/>
           </a:p>
         </p:txBody>
@@ -12337,7 +13026,9 @@
             <a:off x="1889638" y="4567428"/>
             <a:ext cx="3457956" cy="338328"/>
           </a:xfrm>
-          <a:prstGeom prst="rect"/>
+          <a:prstGeom prst="rect">
+            <a:avLst/>
+          </a:prstGeom>
           <a:solidFill>
             <a:srgbClr val="5A9AD5"/>
           </a:solidFill>
@@ -12367,7 +13058,6 @@
             <a:defPPr/>
           </a:lstStyle>
           <a:p>
-            <a:pPr/>
             <a:endParaRPr lang="en-US"/>
           </a:p>
         </p:txBody>
@@ -12383,7 +13073,9 @@
             <a:off x="5347594" y="4567428"/>
             <a:ext cx="3457956" cy="338328"/>
           </a:xfrm>
-          <a:prstGeom prst="rect"/>
+          <a:prstGeom prst="rect">
+            <a:avLst/>
+          </a:prstGeom>
           <a:solidFill>
             <a:srgbClr val="5A9AD5"/>
           </a:solidFill>
@@ -12413,7 +13105,6 @@
             <a:defPPr/>
           </a:lstStyle>
           <a:p>
-            <a:pPr/>
             <a:endParaRPr lang="en-US"/>
           </a:p>
         </p:txBody>
@@ -12429,7 +13120,9 @@
             <a:off x="1889638" y="4905756"/>
             <a:ext cx="3457956" cy="339852"/>
           </a:xfrm>
-          <a:prstGeom prst="rect"/>
+          <a:prstGeom prst="rect">
+            <a:avLst/>
+          </a:prstGeom>
           <a:solidFill>
             <a:srgbClr val="D2DEEF"/>
           </a:solidFill>
@@ -12459,7 +13152,6 @@
             <a:defPPr/>
           </a:lstStyle>
           <a:p>
-            <a:pPr/>
             <a:endParaRPr lang="en-US"/>
           </a:p>
         </p:txBody>
@@ -12475,7 +13167,9 @@
             <a:off x="5347594" y="4905756"/>
             <a:ext cx="3457956" cy="339852"/>
           </a:xfrm>
-          <a:prstGeom prst="rect"/>
+          <a:prstGeom prst="rect">
+            <a:avLst/>
+          </a:prstGeom>
           <a:solidFill>
             <a:srgbClr val="D2DEEF"/>
           </a:solidFill>
@@ -12505,7 +13199,6 @@
             <a:defPPr/>
           </a:lstStyle>
           <a:p>
-            <a:pPr/>
             <a:endParaRPr lang="en-US"/>
           </a:p>
         </p:txBody>
@@ -12521,7 +13214,9 @@
             <a:off x="1889638" y="5245608"/>
             <a:ext cx="3457956" cy="339852"/>
           </a:xfrm>
-          <a:prstGeom prst="rect"/>
+          <a:prstGeom prst="rect">
+            <a:avLst/>
+          </a:prstGeom>
           <a:solidFill>
             <a:srgbClr val="EAEFF7"/>
           </a:solidFill>
@@ -12551,7 +13246,6 @@
             <a:defPPr/>
           </a:lstStyle>
           <a:p>
-            <a:pPr/>
             <a:endParaRPr lang="en-US"/>
           </a:p>
         </p:txBody>
@@ -12567,7 +13261,9 @@
             <a:off x="5347594" y="5245608"/>
             <a:ext cx="3457956" cy="339852"/>
           </a:xfrm>
-          <a:prstGeom prst="rect"/>
+          <a:prstGeom prst="rect">
+            <a:avLst/>
+          </a:prstGeom>
           <a:solidFill>
             <a:srgbClr val="EAEFF7"/>
           </a:solidFill>
@@ -12597,7 +13293,6 @@
             <a:defPPr/>
           </a:lstStyle>
           <a:p>
-            <a:pPr/>
             <a:endParaRPr lang="en-US"/>
           </a:p>
         </p:txBody>
@@ -12613,7 +13308,9 @@
             <a:off x="1889638" y="5585460"/>
             <a:ext cx="3457956" cy="339852"/>
           </a:xfrm>
-          <a:prstGeom prst="rect"/>
+          <a:prstGeom prst="rect">
+            <a:avLst/>
+          </a:prstGeom>
           <a:solidFill>
             <a:srgbClr val="D2DEEF"/>
           </a:solidFill>
@@ -12643,7 +13340,6 @@
             <a:defPPr/>
           </a:lstStyle>
           <a:p>
-            <a:pPr/>
             <a:endParaRPr lang="en-US"/>
           </a:p>
         </p:txBody>
@@ -12659,7 +13355,9 @@
             <a:off x="5347594" y="5585460"/>
             <a:ext cx="3457956" cy="339852"/>
           </a:xfrm>
-          <a:prstGeom prst="rect"/>
+          <a:prstGeom prst="rect">
+            <a:avLst/>
+          </a:prstGeom>
           <a:solidFill>
             <a:srgbClr val="D2DEEF"/>
           </a:solidFill>
@@ -12689,7 +13387,6 @@
             <a:defPPr/>
           </a:lstStyle>
           <a:p>
-            <a:pPr/>
             <a:endParaRPr lang="en-US"/>
           </a:p>
         </p:txBody>
@@ -12705,7 +13402,9 @@
             <a:off x="1889638" y="5925312"/>
             <a:ext cx="3457956" cy="338328"/>
           </a:xfrm>
-          <a:prstGeom prst="rect"/>
+          <a:prstGeom prst="rect">
+            <a:avLst/>
+          </a:prstGeom>
           <a:solidFill>
             <a:srgbClr val="EAEFF7"/>
           </a:solidFill>
@@ -12735,7 +13434,6 @@
             <a:defPPr/>
           </a:lstStyle>
           <a:p>
-            <a:pPr/>
             <a:endParaRPr lang="en-US"/>
           </a:p>
         </p:txBody>
@@ -12751,7 +13449,9 @@
             <a:off x="5347594" y="5925312"/>
             <a:ext cx="3457956" cy="338328"/>
           </a:xfrm>
-          <a:prstGeom prst="rect"/>
+          <a:prstGeom prst="rect">
+            <a:avLst/>
+          </a:prstGeom>
           <a:solidFill>
             <a:srgbClr val="EAEFF7"/>
           </a:solidFill>
@@ -12781,7 +13481,6 @@
             <a:defPPr/>
           </a:lstStyle>
           <a:p>
-            <a:pPr/>
             <a:endParaRPr lang="en-US"/>
           </a:p>
         </p:txBody>
@@ -12797,7 +13496,9 @@
             <a:off x="5347594" y="4561332"/>
             <a:ext cx="0" cy="1708404"/>
           </a:xfrm>
-          <a:prstGeom prst="line"/>
+          <a:prstGeom prst="line">
+            <a:avLst/>
+          </a:prstGeom>
           <a:ln w="10103">
             <a:solidFill>
               <a:srgbClr val="FFFFFF"/>
@@ -12824,7 +13525,6 @@
             <a:defPPr/>
           </a:lstStyle>
           <a:p>
-            <a:pPr/>
             <a:endParaRPr lang="en-US"/>
           </a:p>
         </p:txBody>
@@ -12840,7 +13540,9 @@
             <a:off x="1885066" y="4905756"/>
             <a:ext cx="6926580" cy="0"/>
           </a:xfrm>
-          <a:prstGeom prst="line"/>
+          <a:prstGeom prst="line">
+            <a:avLst/>
+          </a:prstGeom>
           <a:ln w="30310">
             <a:solidFill>
               <a:srgbClr val="FFFFFF"/>
@@ -12867,7 +13569,6 @@
             <a:defPPr/>
           </a:lstStyle>
           <a:p>
-            <a:pPr/>
             <a:endParaRPr lang="en-US"/>
           </a:p>
         </p:txBody>
@@ -12883,7 +13584,9 @@
             <a:off x="1885066" y="5245608"/>
             <a:ext cx="6926580" cy="0"/>
           </a:xfrm>
-          <a:prstGeom prst="line"/>
+          <a:prstGeom prst="line">
+            <a:avLst/>
+          </a:prstGeom>
           <a:ln w="10103">
             <a:solidFill>
               <a:srgbClr val="FFFFFF"/>
@@ -12910,7 +13613,6 @@
             <a:defPPr/>
           </a:lstStyle>
           <a:p>
-            <a:pPr/>
             <a:endParaRPr lang="en-US"/>
           </a:p>
         </p:txBody>
@@ -12926,7 +13628,9 @@
             <a:off x="1885066" y="5585460"/>
             <a:ext cx="6926580" cy="0"/>
           </a:xfrm>
-          <a:prstGeom prst="line"/>
+          <a:prstGeom prst="line">
+            <a:avLst/>
+          </a:prstGeom>
           <a:ln w="10103">
             <a:solidFill>
               <a:srgbClr val="FFFFFF"/>
@@ -12953,7 +13657,6 @@
             <a:defPPr/>
           </a:lstStyle>
           <a:p>
-            <a:pPr/>
             <a:endParaRPr lang="en-US"/>
           </a:p>
         </p:txBody>
@@ -12969,7 +13672,9 @@
             <a:off x="1885066" y="5925312"/>
             <a:ext cx="6926580" cy="0"/>
           </a:xfrm>
-          <a:prstGeom prst="line"/>
+          <a:prstGeom prst="line">
+            <a:avLst/>
+          </a:prstGeom>
           <a:ln w="10103">
             <a:solidFill>
               <a:srgbClr val="FFFFFF"/>
@@ -12996,7 +13701,6 @@
             <a:defPPr/>
           </a:lstStyle>
           <a:p>
-            <a:pPr/>
             <a:endParaRPr lang="en-US"/>
           </a:p>
         </p:txBody>
@@ -13012,7 +13716,9 @@
             <a:off x="1889638" y="4561332"/>
             <a:ext cx="0" cy="1708404"/>
           </a:xfrm>
-          <a:prstGeom prst="line"/>
+          <a:prstGeom prst="line">
+            <a:avLst/>
+          </a:prstGeom>
           <a:ln w="10103">
             <a:solidFill>
               <a:srgbClr val="FFFFFF"/>
@@ -13039,7 +13745,6 @@
             <a:defPPr/>
           </a:lstStyle>
           <a:p>
-            <a:pPr/>
             <a:endParaRPr lang="en-US"/>
           </a:p>
         </p:txBody>
@@ -13055,7 +13760,9 @@
             <a:off x="8805550" y="4561332"/>
             <a:ext cx="0" cy="1708404"/>
           </a:xfrm>
-          <a:prstGeom prst="line"/>
+          <a:prstGeom prst="line">
+            <a:avLst/>
+          </a:prstGeom>
           <a:ln w="10103">
             <a:solidFill>
               <a:srgbClr val="FFFFFF"/>
@@ -13082,7 +13789,6 @@
             <a:defPPr/>
           </a:lstStyle>
           <a:p>
-            <a:pPr/>
             <a:endParaRPr lang="en-US"/>
           </a:p>
         </p:txBody>
@@ -13098,7 +13804,9 @@
             <a:off x="1885066" y="4567428"/>
             <a:ext cx="6926580" cy="0"/>
           </a:xfrm>
-          <a:prstGeom prst="line"/>
+          <a:prstGeom prst="line">
+            <a:avLst/>
+          </a:prstGeom>
           <a:ln w="10103">
             <a:solidFill>
               <a:srgbClr val="FFFFFF"/>
@@ -13125,7 +13833,6 @@
             <a:defPPr/>
           </a:lstStyle>
           <a:p>
-            <a:pPr/>
             <a:endParaRPr lang="en-US"/>
           </a:p>
         </p:txBody>
@@ -13141,7 +13848,9 @@
             <a:off x="1885066" y="6263640"/>
             <a:ext cx="6926580" cy="0"/>
           </a:xfrm>
-          <a:prstGeom prst="line"/>
+          <a:prstGeom prst="line">
+            <a:avLst/>
+          </a:prstGeom>
           <a:ln w="10103">
             <a:solidFill>
               <a:srgbClr val="FFFFFF"/>
@@ -13168,7 +13877,6 @@
             <a:defPPr/>
           </a:lstStyle>
           <a:p>
-            <a:pPr/>
             <a:endParaRPr lang="en-US"/>
           </a:p>
         </p:txBody>
@@ -13184,7 +13892,9 @@
             <a:off x="1810397" y="1275793"/>
             <a:ext cx="5273167" cy="511335"/>
           </a:xfrm>
-          <a:prstGeom prst="rect"/>
+          <a:prstGeom prst="rect">
+            <a:avLst/>
+          </a:prstGeom>
           <a:noFill/>
         </p:spPr>
         <p:style>
@@ -13211,9 +13921,8 @@
             <a:defPPr/>
           </a:lstStyle>
           <a:p>
-            <a:pPr/>
-            <a:r>
-              <a:rPr lang="en-US" sz="3864" dirty="1">
+            <a:r>
+              <a:rPr lang="en-US" sz="3864">
                 <a:solidFill>
                   <a:srgbClr val="00B0F0"/>
                 </a:solidFill>
@@ -13235,7 +13944,9 @@
             <a:off x="1895741" y="2366612"/>
             <a:ext cx="84618" cy="146096"/>
           </a:xfrm>
-          <a:prstGeom prst="rect"/>
+          <a:prstGeom prst="rect">
+            <a:avLst/>
+          </a:prstGeom>
           <a:noFill/>
         </p:spPr>
         <p:style>
@@ -13262,9 +13973,8 @@
             <a:defPPr/>
           </a:lstStyle>
           <a:p>
-            <a:pPr/>
-            <a:r>
-              <a:rPr lang="en-US" sz="1104" dirty="1">
+            <a:r>
+              <a:rPr lang="en-US" sz="1104">
                 <a:solidFill>
                   <a:srgbClr val="000000"/>
                 </a:solidFill>
@@ -13286,7 +13996,9 @@
             <a:off x="2153297" y="2241002"/>
             <a:ext cx="687080" cy="325539"/>
           </a:xfrm>
-          <a:prstGeom prst="rect"/>
+          <a:prstGeom prst="rect">
+            <a:avLst/>
+          </a:prstGeom>
           <a:noFill/>
         </p:spPr>
         <p:style>
@@ -13313,9 +14025,8 @@
             <a:defPPr/>
           </a:lstStyle>
           <a:p>
-            <a:pPr/>
-            <a:r>
-              <a:rPr lang="en-US" sz="2460" dirty="1">
+            <a:r>
+              <a:rPr lang="en-US" sz="2460">
                 <a:solidFill>
                   <a:srgbClr val="000000"/>
                 </a:solidFill>
@@ -13337,7 +14048,9 @@
             <a:off x="2910724" y="2241002"/>
             <a:ext cx="2309588" cy="325539"/>
           </a:xfrm>
-          <a:prstGeom prst="rect"/>
+          <a:prstGeom prst="rect">
+            <a:avLst/>
+          </a:prstGeom>
           <a:noFill/>
         </p:spPr>
         <p:style>
@@ -13364,9 +14077,8 @@
             <a:defPPr/>
           </a:lstStyle>
           <a:p>
-            <a:pPr/>
-            <a:r>
-              <a:rPr lang="en-US" sz="2460" dirty="1">
+            <a:r>
+              <a:rPr lang="en-US" sz="2460">
                 <a:solidFill>
                   <a:srgbClr val="000000"/>
                 </a:solidFill>
@@ -13388,7 +14100,9 @@
             <a:off x="2195969" y="2798352"/>
             <a:ext cx="75420" cy="130216"/>
           </a:xfrm>
-          <a:prstGeom prst="rect"/>
+          <a:prstGeom prst="rect">
+            <a:avLst/>
+          </a:prstGeom>
           <a:noFill/>
         </p:spPr>
         <p:style>
@@ -13415,9 +14129,8 @@
             <a:defPPr/>
           </a:lstStyle>
           <a:p>
-            <a:pPr/>
-            <a:r>
-              <a:rPr lang="en-US" sz="984" dirty="1">
+            <a:r>
+              <a:rPr lang="en-US" sz="984">
                 <a:solidFill>
                   <a:srgbClr val="000000"/>
                 </a:solidFill>
@@ -13436,10 +14149,12 @@
         </p:nvSpPr>
         <p:spPr>
           <a:xfrm>
-            <a:off x="2453525" y="2686080"/>
-            <a:ext cx="6076113" cy="290603"/>
-          </a:xfrm>
-          <a:prstGeom prst="rect"/>
+            <a:off x="2453525" y="2639342"/>
+            <a:ext cx="6253443" cy="384080"/>
+          </a:xfrm>
+          <a:prstGeom prst="rect">
+            <a:avLst/>
+          </a:prstGeom>
           <a:noFill/>
         </p:spPr>
         <p:style>
@@ -13466,15 +14181,14 @@
             <a:defPPr/>
           </a:lstStyle>
           <a:p>
-            <a:pPr/>
-            <a:r>
-              <a:rPr lang="en-US" sz="2196" dirty="1">
+            <a:r>
+              <a:rPr lang="en-US" sz="2196" dirty="0">
                 <a:solidFill>
                   <a:srgbClr val="000000"/>
                 </a:solidFill>
                 <a:latin typeface="Calibri"/>
               </a:rPr>
-              <a:t>Let’s assume the user executes the greedy programas</a:t>
+              <a:t>Let’s assume the user executes the greedy program as</a:t>
             </a:r>
           </a:p>
         </p:txBody>
@@ -13490,7 +14204,9 @@
             <a:off x="2453525" y="2986308"/>
             <a:ext cx="814615" cy="290603"/>
           </a:xfrm>
-          <a:prstGeom prst="rect"/>
+          <a:prstGeom prst="rect">
+            <a:avLst/>
+          </a:prstGeom>
           <a:noFill/>
         </p:spPr>
         <p:style>
@@ -13517,9 +14233,8 @@
             <a:defPPr/>
           </a:lstStyle>
           <a:p>
-            <a:pPr/>
-            <a:r>
-              <a:rPr lang="en-US" sz="2196" dirty="1">
+            <a:r>
+              <a:rPr lang="en-US" sz="2196">
                 <a:solidFill>
                   <a:srgbClr val="000000"/>
                 </a:solidFill>
@@ -13541,7 +14256,9 @@
             <a:off x="3026548" y="4648973"/>
             <a:ext cx="489335" cy="231847"/>
           </a:xfrm>
-          <a:prstGeom prst="rect"/>
+          <a:prstGeom prst="rect">
+            <a:avLst/>
+          </a:prstGeom>
           <a:noFill/>
         </p:spPr>
         <p:style>
@@ -13568,9 +14285,8 @@
             <a:defPPr/>
           </a:lstStyle>
           <a:p>
-            <a:pPr/>
-            <a:r>
-              <a:rPr lang="en-US" sz="1752" b="1" dirty="1">
+            <a:r>
+              <a:rPr lang="en-US" sz="1752" b="1">
                 <a:solidFill>
                   <a:srgbClr val="FFFFFF"/>
                 </a:solidFill>
@@ -13592,7 +14308,9 @@
             <a:off x="3566044" y="4648973"/>
             <a:ext cx="641763" cy="231847"/>
           </a:xfrm>
-          <a:prstGeom prst="rect"/>
+          <a:prstGeom prst="rect">
+            <a:avLst/>
+          </a:prstGeom>
           <a:noFill/>
         </p:spPr>
         <p:style>
@@ -13619,9 +14337,8 @@
             <a:defPPr/>
           </a:lstStyle>
           <a:p>
-            <a:pPr/>
-            <a:r>
-              <a:rPr lang="en-US" sz="1752" b="1" dirty="1">
+            <a:r>
+              <a:rPr lang="en-US" sz="1752" b="1">
                 <a:solidFill>
                   <a:srgbClr val="FFFFFF"/>
                 </a:solidFill>
@@ -13643,7 +14360,9 @@
             <a:off x="6405256" y="4648973"/>
             <a:ext cx="489335" cy="231847"/>
           </a:xfrm>
-          <a:prstGeom prst="rect"/>
+          <a:prstGeom prst="rect">
+            <a:avLst/>
+          </a:prstGeom>
           <a:noFill/>
         </p:spPr>
         <p:style>
@@ -13670,9 +14389,8 @@
             <a:defPPr/>
           </a:lstStyle>
           <a:p>
-            <a:pPr/>
-            <a:r>
-              <a:rPr lang="en-US" sz="1752" b="1" dirty="1">
+            <a:r>
+              <a:rPr lang="en-US" sz="1752" b="1">
                 <a:solidFill>
                   <a:srgbClr val="FFFFFF"/>
                 </a:solidFill>
@@ -13694,7 +14412,9 @@
             <a:off x="6944751" y="4648973"/>
             <a:ext cx="806359" cy="231847"/>
           </a:xfrm>
-          <a:prstGeom prst="rect"/>
+          <a:prstGeom prst="rect">
+            <a:avLst/>
+          </a:prstGeom>
           <a:noFill/>
         </p:spPr>
         <p:style>
@@ -13721,9 +14441,8 @@
             <a:defPPr/>
           </a:lstStyle>
           <a:p>
-            <a:pPr/>
-            <a:r>
-              <a:rPr lang="en-US" sz="1752" b="1" dirty="1">
+            <a:r>
+              <a:rPr lang="en-US" sz="1752" b="1">
                 <a:solidFill>
                   <a:srgbClr val="FFFFFF"/>
                 </a:solidFill>
@@ -13745,7 +14464,9 @@
             <a:off x="3188092" y="4988825"/>
             <a:ext cx="856336" cy="231847"/>
           </a:xfrm>
-          <a:prstGeom prst="rect"/>
+          <a:prstGeom prst="rect">
+            <a:avLst/>
+          </a:prstGeom>
           <a:noFill/>
         </p:spPr>
         <p:style>
@@ -13772,9 +14493,8 @@
             <a:defPPr/>
           </a:lstStyle>
           <a:p>
-            <a:pPr/>
-            <a:r>
-              <a:rPr lang="en-US" sz="1752" dirty="1">
+            <a:r>
+              <a:rPr lang="en-US" sz="1752">
                 <a:solidFill>
                   <a:srgbClr val="000000"/>
                 </a:solidFill>
@@ -13796,7 +14516,9 @@
             <a:off x="6463176" y="4988825"/>
             <a:ext cx="1223337" cy="231847"/>
           </a:xfrm>
-          <a:prstGeom prst="rect"/>
+          <a:prstGeom prst="rect">
+            <a:avLst/>
+          </a:prstGeom>
           <a:noFill/>
         </p:spPr>
         <p:style>
@@ -13823,9 +14545,8 @@
             <a:defPPr/>
           </a:lstStyle>
           <a:p>
-            <a:pPr/>
-            <a:r>
-              <a:rPr lang="en-US" sz="1752" dirty="1">
+            <a:r>
+              <a:rPr lang="en-US" sz="1752">
                 <a:solidFill>
                   <a:srgbClr val="000000"/>
                 </a:solidFill>
@@ -13847,7 +14568,9 @@
             <a:off x="3188092" y="5328677"/>
             <a:ext cx="856336" cy="231847"/>
           </a:xfrm>
-          <a:prstGeom prst="rect"/>
+          <a:prstGeom prst="rect">
+            <a:avLst/>
+          </a:prstGeom>
           <a:noFill/>
         </p:spPr>
         <p:style>
@@ -13874,9 +14597,8 @@
             <a:defPPr/>
           </a:lstStyle>
           <a:p>
-            <a:pPr/>
-            <a:r>
-              <a:rPr lang="en-US" sz="1752" dirty="1">
+            <a:r>
+              <a:rPr lang="en-US" sz="1752">
                 <a:solidFill>
                   <a:srgbClr val="000000"/>
                 </a:solidFill>
@@ -13898,7 +14620,9 @@
             <a:off x="6706996" y="5328677"/>
             <a:ext cx="734002" cy="231847"/>
           </a:xfrm>
-          <a:prstGeom prst="rect"/>
+          <a:prstGeom prst="rect">
+            <a:avLst/>
+          </a:prstGeom>
           <a:noFill/>
         </p:spPr>
         <p:style>
@@ -13925,9 +14649,8 @@
             <a:defPPr/>
           </a:lstStyle>
           <a:p>
-            <a:pPr/>
-            <a:r>
-              <a:rPr lang="en-US" sz="1752" dirty="1">
+            <a:r>
+              <a:rPr lang="en-US" sz="1752">
                 <a:solidFill>
                   <a:srgbClr val="000000"/>
                 </a:solidFill>
@@ -13949,7 +14672,9 @@
             <a:off x="3188092" y="5667004"/>
             <a:ext cx="856336" cy="231847"/>
           </a:xfrm>
-          <a:prstGeom prst="rect"/>
+          <a:prstGeom prst="rect">
+            <a:avLst/>
+          </a:prstGeom>
           <a:noFill/>
         </p:spPr>
         <p:style>
@@ -13976,9 +14701,8 @@
             <a:defPPr/>
           </a:lstStyle>
           <a:p>
-            <a:pPr/>
-            <a:r>
-              <a:rPr lang="en-US" sz="1752" dirty="1">
+            <a:r>
+              <a:rPr lang="en-US" sz="1752">
                 <a:solidFill>
                   <a:srgbClr val="000000"/>
                 </a:solidFill>
@@ -13997,10 +14721,12 @@
         </p:nvSpPr>
         <p:spPr>
           <a:xfrm>
-            <a:off x="6706996" y="5667004"/>
-            <a:ext cx="734002" cy="231847"/>
-          </a:xfrm>
-          <a:prstGeom prst="rect"/>
+            <a:off x="6706996" y="5625032"/>
+            <a:ext cx="1079783" cy="315792"/>
+          </a:xfrm>
+          <a:prstGeom prst="rect">
+            <a:avLst/>
+          </a:prstGeom>
           <a:noFill/>
         </p:spPr>
         <p:style>
@@ -14027,15 +14753,14 @@
             <a:defPPr/>
           </a:lstStyle>
           <a:p>
-            <a:pPr/>
-            <a:r>
-              <a:rPr lang="en-US" sz="1752" dirty="1">
+            <a:r>
+              <a:rPr lang="en-US" sz="1752" dirty="0">
                 <a:solidFill>
                   <a:srgbClr val="000000"/>
                 </a:solidFill>
                 <a:latin typeface="Consolas"/>
               </a:rPr>
-              <a:t>“cs50”</a:t>
+              <a:t>“SQ4007”</a:t>
             </a:r>
           </a:p>
         </p:txBody>
@@ -14051,7 +14776,9 @@
             <a:off x="3188092" y="6006857"/>
             <a:ext cx="856336" cy="231847"/>
           </a:xfrm>
-          <a:prstGeom prst="rect"/>
+          <a:prstGeom prst="rect">
+            <a:avLst/>
+          </a:prstGeom>
           <a:noFill/>
         </p:spPr>
         <p:style>
@@ -14078,9 +14805,8 @@
             <a:defPPr/>
           </a:lstStyle>
           <a:p>
-            <a:pPr/>
-            <a:r>
-              <a:rPr lang="en-US" sz="1752" dirty="1">
+            <a:r>
+              <a:rPr lang="en-US" sz="1752">
                 <a:solidFill>
                   <a:srgbClr val="000000"/>
                 </a:solidFill>
@@ -14102,7 +14828,9 @@
             <a:off x="6891410" y="6006857"/>
             <a:ext cx="367001" cy="231847"/>
           </a:xfrm>
-          <a:prstGeom prst="rect"/>
+          <a:prstGeom prst="rect">
+            <a:avLst/>
+          </a:prstGeom>
           <a:noFill/>
         </p:spPr>
         <p:style>
@@ -14129,9 +14857,8 @@
             <a:defPPr/>
           </a:lstStyle>
           <a:p>
-            <a:pPr/>
-            <a:r>
-              <a:rPr lang="en-US" sz="1752" dirty="1">
+            <a:r>
+              <a:rPr lang="en-US" sz="1752">
                 <a:solidFill>
                   <a:srgbClr val="FF0000"/>
                 </a:solidFill>
@@ -14150,10 +14877,12 @@
         </p:nvSpPr>
         <p:spPr>
           <a:xfrm>
-            <a:off x="3919612" y="3600194"/>
-            <a:ext cx="2805296" cy="295367"/>
-          </a:xfrm>
-          <a:prstGeom prst="rect"/>
+            <a:off x="3919612" y="3553049"/>
+            <a:ext cx="3234219" cy="389658"/>
+          </a:xfrm>
+          <a:prstGeom prst="rect">
+            <a:avLst/>
+          </a:prstGeom>
           <a:noFill/>
         </p:spPr>
         <p:style>
@@ -14180,21 +14909,23 @@
             <a:defPPr/>
           </a:lstStyle>
           <a:p>
-            <a:pPr/>
-            <a:r>
-              <a:rPr lang="en-US" sz="2232" dirty="1">
+            <a:r>
+              <a:rPr lang="en-US" sz="2232" dirty="0">
                 <a:solidFill>
                   <a:srgbClr val="000000"/>
                 </a:solidFill>
                 <a:latin typeface="Consolas"/>
               </a:rPr>
-              <a:t>./greedy 1024 cs50</a:t>
+              <a:t>./greedy 1024 SQ4007</a:t>
             </a:r>
           </a:p>
         </p:txBody>
       </p:sp>
     </p:spTree>
   </p:cSld>
+  <p:clrMapOvr>
+    <a:masterClrMapping/>
+  </p:clrMapOvr>
 </p:sld>
 </file>
 
@@ -14346,7 +15077,7 @@
       <a:effectStyleLst>
         <a:effectStyle>
           <a:effectLst>
-            <a:outerShdw blurRad="40000" dir="5400000" dist="20000">
+            <a:outerShdw blurRad="40000" dist="20000" dir="5400000">
               <a:srgbClr val="000000">
                 <a:alpha val="38000"/>
               </a:srgbClr>
@@ -14355,7 +15086,7 @@
         </a:effectStyle>
         <a:effectStyle>
           <a:effectLst>
-            <a:outerShdw blurRad="40000" dir="5400000" dist="20000">
+            <a:outerShdw blurRad="40000" dist="20000" dir="5400000">
               <a:srgbClr val="000000">
                 <a:alpha val="38000"/>
               </a:srgbClr>
@@ -14364,7 +15095,7 @@
         </a:effectStyle>
         <a:effectStyle>
           <a:effectLst>
-            <a:outerShdw blurRad="40000" dir="5400000" dist="20000">
+            <a:outerShdw blurRad="40000" dist="20000" dir="5400000">
               <a:srgbClr val="000000">
                 <a:alpha val="38000"/>
               </a:srgbClr>
@@ -14386,5 +15117,6 @@
     </a:fmtScheme>
   </a:themeElements>
   <a:objectDefaults/>
+  <a:extraClrSchemeLst/>
 </a:theme>
 </file>